--- a/slides/fermat_findings.pptx
+++ b/slides/fermat_findings.pptx
@@ -3865,7 +3865,7 @@
         <p:spPr>
           <a:xfrm>
             <a:off x="566928" y="2331720"/>
-            <a:ext cx="3931920" cy="237744"/>
+            <a:ext cx="3200400" cy="237744"/>
           </a:xfrm>
           <a:prstGeom prst="rect">
             <a:avLst/>
@@ -3899,8 +3899,8 @@
         </p:nvSpPr>
         <p:spPr>
           <a:xfrm>
-            <a:off x="4498848" y="2331720"/>
-            <a:ext cx="2103120" cy="237744"/>
+            <a:off x="3767328" y="2331720"/>
+            <a:ext cx="3108960" cy="237744"/>
           </a:xfrm>
           <a:prstGeom prst="rect">
             <a:avLst/>
@@ -3921,7 +3921,7 @@
                 </a:solidFill>
                 <a:latin typeface="Arial"/>
               </a:rPr>
-              <a:t>AUROC</a:t>
+              <a:t>AUROC  (95% CI)</a:t>
             </a:r>
           </a:p>
         </p:txBody>
@@ -3979,7 +3979,7 @@
         <p:spPr>
           <a:xfrm>
             <a:off x="566928" y="2715768"/>
-            <a:ext cx="3931920" cy="457200"/>
+            <a:ext cx="3200400" cy="512064"/>
           </a:xfrm>
           <a:prstGeom prst="rect">
             <a:avLst/>
@@ -4000,7 +4000,7 @@
                 </a:solidFill>
                 <a:latin typeface="Arial"/>
               </a:rPr>
-              <a:t>Self-disagreement</a:t>
+              <a:t>All 300 items</a:t>
             </a:r>
           </a:p>
         </p:txBody>
@@ -4013,8 +4013,8 @@
         </p:nvSpPr>
         <p:spPr>
           <a:xfrm>
-            <a:off x="4498848" y="2715768"/>
-            <a:ext cx="2103120" cy="457200"/>
+            <a:off x="3767328" y="2715768"/>
+            <a:ext cx="3108960" cy="512064"/>
           </a:xfrm>
           <a:prstGeom prst="rect">
             <a:avLst/>
@@ -4037,6 +4037,15 @@
               </a:rPr>
               <a:t>0.835</a:t>
             </a:r>
+            <a:r>
+              <a:rPr sz="1150" b="0" i="0">
+                <a:solidFill>
+                  <a:srgbClr val="79828F"/>
+                </a:solidFill>
+                <a:latin typeface="Arial"/>
+              </a:rPr>
+              <a:t>  [0.787, 0.879]</a:t>
+            </a:r>
           </a:p>
         </p:txBody>
       </p:sp>
@@ -4048,7 +4057,7 @@
         </p:nvSpPr>
         <p:spPr>
           <a:xfrm>
-            <a:off x="566928" y="3099816"/>
+            <a:off x="566928" y="3154680"/>
             <a:ext cx="11057839" cy="9525"/>
           </a:xfrm>
           <a:prstGeom prst="rect">
@@ -4092,8 +4101,8 @@
         </p:nvSpPr>
         <p:spPr>
           <a:xfrm>
-            <a:off x="566928" y="3172968"/>
-            <a:ext cx="3931920" cy="457200"/>
+            <a:off x="566928" y="3227832"/>
+            <a:ext cx="3200400" cy="512064"/>
           </a:xfrm>
           <a:prstGeom prst="rect">
             <a:avLst/>
@@ -4108,13 +4117,13 @@
           <a:p>
             <a:pPr algn="l"/>
             <a:r>
-              <a:rPr sz="1300" b="0" i="0">
+              <a:rPr sz="1300" b="1" i="0">
                 <a:solidFill>
                   <a:srgbClr val="171A21"/>
                 </a:solidFill>
                 <a:latin typeface="Arial"/>
               </a:rPr>
-              <a:t>…after every artifact cut</a:t>
+              <a:t>Hardest cases deleted</a:t>
             </a:r>
           </a:p>
         </p:txBody>
@@ -4127,8 +4136,8 @@
         </p:nvSpPr>
         <p:spPr>
           <a:xfrm>
-            <a:off x="4498848" y="3172968"/>
-            <a:ext cx="2103120" cy="457200"/>
+            <a:off x="3767328" y="3227832"/>
+            <a:ext cx="3108960" cy="512064"/>
           </a:xfrm>
           <a:prstGeom prst="rect">
             <a:avLst/>
@@ -4151,6 +4160,15 @@
               </a:rPr>
               <a:t>0.796</a:t>
             </a:r>
+            <a:r>
+              <a:rPr sz="1150" b="0" i="0">
+                <a:solidFill>
+                  <a:srgbClr val="79828F"/>
+                </a:solidFill>
+                <a:latin typeface="Arial"/>
+              </a:rPr>
+              <a:t>  [0.736, 0.852]</a:t>
+            </a:r>
           </a:p>
         </p:txBody>
       </p:sp>
@@ -4162,7 +4180,7 @@
         </p:nvSpPr>
         <p:spPr>
           <a:xfrm>
-            <a:off x="566928" y="3557016"/>
+            <a:off x="566928" y="3666744"/>
             <a:ext cx="11057839" cy="9525"/>
           </a:xfrm>
           <a:prstGeom prst="rect">
@@ -4206,8 +4224,8 @@
         </p:nvSpPr>
         <p:spPr>
           <a:xfrm>
-            <a:off x="566928" y="3630168"/>
-            <a:ext cx="3931920" cy="457200"/>
+            <a:off x="566928" y="3739896"/>
+            <a:ext cx="3200400" cy="512064"/>
           </a:xfrm>
           <a:prstGeom prst="rect">
             <a:avLst/>
@@ -4222,7 +4240,7 @@
           <a:p>
             <a:pPr algn="l"/>
             <a:r>
-              <a:rPr sz="1300" b="0" i="0">
+              <a:rPr sz="1300" b="1" i="0">
                 <a:solidFill>
                   <a:srgbClr val="171A21"/>
                 </a:solidFill>
@@ -4241,8 +4259,8 @@
         </p:nvSpPr>
         <p:spPr>
           <a:xfrm>
-            <a:off x="4498848" y="3630168"/>
-            <a:ext cx="2103120" cy="457200"/>
+            <a:off x="3767328" y="3739896"/>
+            <a:ext cx="3108960" cy="512064"/>
           </a:xfrm>
           <a:prstGeom prst="rect">
             <a:avLst/>
@@ -4265,6 +4283,15 @@
               </a:rPr>
               <a:t>0.537</a:t>
             </a:r>
+            <a:r>
+              <a:rPr sz="1150" b="0" i="0">
+                <a:solidFill>
+                  <a:srgbClr val="79828F"/>
+                </a:solidFill>
+                <a:latin typeface="Arial"/>
+              </a:rPr>
+              <a:t>  [0.469, 0.605]</a:t>
+            </a:r>
           </a:p>
         </p:txBody>
       </p:sp>
@@ -4276,7 +4303,7 @@
         </p:nvSpPr>
         <p:spPr>
           <a:xfrm>
-            <a:off x="566928" y="4014216"/>
+            <a:off x="566928" y="4178808"/>
             <a:ext cx="11057839" cy="9525"/>
           </a:xfrm>
           <a:prstGeom prst="rect">
@@ -4314,7 +4341,42 @@
       </p:sp>
       <p:sp>
         <p:nvSpPr>
-          <p:cNvPr id="17" name="Rectangle 16"/>
+          <p:cNvPr id="17" name="TextBox 16"/>
+          <p:cNvSpPr txBox="1"/>
+          <p:nvPr/>
+        </p:nvSpPr>
+        <p:spPr>
+          <a:xfrm>
+            <a:off x="566928" y="4160520"/>
+            <a:ext cx="5852160" cy="640080"/>
+          </a:xfrm>
+          <a:prstGeom prst="rect">
+            <a:avLst/>
+          </a:prstGeom>
+          <a:noFill/>
+        </p:spPr>
+        <p:txBody>
+          <a:bodyPr wrap="square" lIns="0" rIns="0" tIns="0" bIns="0" anchor="t">
+            <a:spAutoFit/>
+          </a:bodyPr>
+          <a:lstStyle/>
+          <a:p>
+            <a:pPr algn="l"/>
+            <a:r>
+              <a:rPr sz="1200" b="0" i="1">
+                <a:solidFill>
+                  <a:srgbClr val="4A5260"/>
+                </a:solidFill>
+                <a:latin typeface="Arial"/>
+              </a:rPr>
+              <a:t>Row 2 explained on slide 5. Row 3's interval crosses 0.50 — the model's own confidence is no better than a coin flip here.</a:t>
+            </a:r>
+          </a:p>
+        </p:txBody>
+      </p:sp>
+      <p:sp>
+        <p:nvSpPr>
+          <p:cNvPr id="18" name="Rectangle 17"/>
           <p:cNvSpPr/>
           <p:nvPr/>
         </p:nvSpPr>
@@ -4360,7 +4422,7 @@
       </p:sp>
       <p:sp>
         <p:nvSpPr>
-          <p:cNvPr id="18" name="Rectangle 17"/>
+          <p:cNvPr id="19" name="Rectangle 18"/>
           <p:cNvSpPr/>
           <p:nvPr/>
         </p:nvSpPr>
@@ -4404,7 +4466,7 @@
       </p:sp>
       <p:sp>
         <p:nvSpPr>
-          <p:cNvPr id="19" name="TextBox 18"/>
+          <p:cNvPr id="20" name="TextBox 19"/>
           <p:cNvSpPr txBox="1"/>
           <p:nvPr/>
         </p:nvSpPr>
@@ -4471,7 +4533,7 @@
       </p:sp>
       <p:sp>
         <p:nvSpPr>
-          <p:cNvPr id="20" name="TextBox 19"/>
+          <p:cNvPr id="21" name="TextBox 20"/>
           <p:cNvSpPr txBox="1"/>
           <p:nvPr/>
         </p:nvSpPr>
@@ -5560,7 +5622,7 @@
         <p:spPr>
           <a:xfrm>
             <a:off x="566928" y="2377440"/>
-            <a:ext cx="4206240" cy="237744"/>
+            <a:ext cx="3931920" cy="237744"/>
           </a:xfrm>
           <a:prstGeom prst="rect">
             <a:avLst/>
@@ -5594,8 +5656,8 @@
         </p:nvSpPr>
         <p:spPr>
           <a:xfrm>
-            <a:off x="4773168" y="2377440"/>
-            <a:ext cx="2011680" cy="237744"/>
+            <a:off x="4498848" y="2377440"/>
+            <a:ext cx="3291840" cy="237744"/>
           </a:xfrm>
           <a:prstGeom prst="rect">
             <a:avLst/>
@@ -5629,8 +5691,8 @@
         </p:nvSpPr>
         <p:spPr>
           <a:xfrm>
-            <a:off x="6784848" y="2377440"/>
-            <a:ext cx="4754880" cy="237744"/>
+            <a:off x="7790688" y="2377440"/>
+            <a:ext cx="3749039" cy="237744"/>
           </a:xfrm>
           <a:prstGeom prst="rect">
             <a:avLst/>
@@ -5709,7 +5771,7 @@
         <p:spPr>
           <a:xfrm>
             <a:off x="566928" y="2761488"/>
-            <a:ext cx="4206240" cy="566928"/>
+            <a:ext cx="3931920" cy="566928"/>
           </a:xfrm>
           <a:prstGeom prst="rect">
             <a:avLst/>
@@ -5743,8 +5805,8 @@
         </p:nvSpPr>
         <p:spPr>
           <a:xfrm>
-            <a:off x="4773168" y="2761488"/>
-            <a:ext cx="2011680" cy="566928"/>
+            <a:off x="4498848" y="2761488"/>
+            <a:ext cx="3291840" cy="566928"/>
           </a:xfrm>
           <a:prstGeom prst="rect">
             <a:avLst/>
@@ -5767,6 +5829,15 @@
               </a:rPr>
               <a:t>0.520</a:t>
             </a:r>
+            <a:r>
+              <a:rPr sz="1250" b="0" i="0">
+                <a:solidFill>
+                  <a:srgbClr val="79828F"/>
+                </a:solidFill>
+                <a:latin typeface="Arial"/>
+              </a:rPr>
+              <a:t>  [0.458, 0.582]</a:t>
+            </a:r>
           </a:p>
         </p:txBody>
       </p:sp>
@@ -5778,8 +5849,8 @@
         </p:nvSpPr>
         <p:spPr>
           <a:xfrm>
-            <a:off x="6784848" y="2761488"/>
-            <a:ext cx="4754880" cy="566928"/>
+            <a:off x="7790688" y="2761488"/>
+            <a:ext cx="3749039" cy="566928"/>
           </a:xfrm>
           <a:prstGeom prst="rect">
             <a:avLst/>
@@ -5858,7 +5929,7 @@
         <p:spPr>
           <a:xfrm>
             <a:off x="566928" y="3328416"/>
-            <a:ext cx="4206240" cy="566928"/>
+            <a:ext cx="3931920" cy="566928"/>
           </a:xfrm>
           <a:prstGeom prst="rect">
             <a:avLst/>
@@ -5892,8 +5963,8 @@
         </p:nvSpPr>
         <p:spPr>
           <a:xfrm>
-            <a:off x="4773168" y="3328416"/>
-            <a:ext cx="2011680" cy="566928"/>
+            <a:off x="4498848" y="3328416"/>
+            <a:ext cx="3291840" cy="566928"/>
           </a:xfrm>
           <a:prstGeom prst="rect">
             <a:avLst/>
@@ -5916,6 +5987,15 @@
               </a:rPr>
               <a:t>0.801</a:t>
             </a:r>
+            <a:r>
+              <a:rPr sz="1250" b="0" i="0">
+                <a:solidFill>
+                  <a:srgbClr val="79828F"/>
+                </a:solidFill>
+                <a:latin typeface="Arial"/>
+              </a:rPr>
+              <a:t>  [0.751, 0.846]</a:t>
+            </a:r>
           </a:p>
         </p:txBody>
       </p:sp>
@@ -5927,8 +6007,8 @@
         </p:nvSpPr>
         <p:spPr>
           <a:xfrm>
-            <a:off x="6784848" y="3328416"/>
-            <a:ext cx="4754880" cy="566928"/>
+            <a:off x="7790688" y="3328416"/>
+            <a:ext cx="3749039" cy="566928"/>
           </a:xfrm>
           <a:prstGeom prst="rect">
             <a:avLst/>
@@ -6007,7 +6087,7 @@
         <p:spPr>
           <a:xfrm>
             <a:off x="566928" y="3895344"/>
-            <a:ext cx="4206240" cy="566928"/>
+            <a:ext cx="3931920" cy="566928"/>
           </a:xfrm>
           <a:prstGeom prst="rect">
             <a:avLst/>
@@ -6041,8 +6121,8 @@
         </p:nvSpPr>
         <p:spPr>
           <a:xfrm>
-            <a:off x="4773168" y="3895344"/>
-            <a:ext cx="2011680" cy="566928"/>
+            <a:off x="4498848" y="3895344"/>
+            <a:ext cx="3291840" cy="566928"/>
           </a:xfrm>
           <a:prstGeom prst="rect">
             <a:avLst/>
@@ -6065,6 +6145,15 @@
               </a:rPr>
               <a:t>0.280</a:t>
             </a:r>
+            <a:r>
+              <a:rPr sz="1250" b="0" i="0">
+                <a:solidFill>
+                  <a:srgbClr val="79828F"/>
+                </a:solidFill>
+                <a:latin typeface="Arial"/>
+              </a:rPr>
+              <a:t>  [0.200, 0.366]</a:t>
+            </a:r>
           </a:p>
         </p:txBody>
       </p:sp>
@@ -6076,8 +6165,8 @@
         </p:nvSpPr>
         <p:spPr>
           <a:xfrm>
-            <a:off x="6784848" y="3895344"/>
-            <a:ext cx="4754880" cy="566928"/>
+            <a:off x="7790688" y="3895344"/>
+            <a:ext cx="3749039" cy="566928"/>
           </a:xfrm>
           <a:prstGeom prst="rect">
             <a:avLst/>
@@ -6419,8 +6508,8 @@
         </p:nvSpPr>
         <p:spPr>
           <a:xfrm>
-            <a:off x="566928" y="2011680"/>
-            <a:ext cx="3657600" cy="237744"/>
+            <a:off x="566928" y="1965960"/>
+            <a:ext cx="2651760" cy="237744"/>
           </a:xfrm>
           <a:prstGeom prst="rect">
             <a:avLst/>
@@ -6454,8 +6543,8 @@
         </p:nvSpPr>
         <p:spPr>
           <a:xfrm>
-            <a:off x="4224528" y="2011680"/>
-            <a:ext cx="2194560" cy="237744"/>
+            <a:off x="3218688" y="1965960"/>
+            <a:ext cx="2926080" cy="237744"/>
           </a:xfrm>
           <a:prstGeom prst="rect">
             <a:avLst/>
@@ -6476,7 +6565,7 @@
                 </a:solidFill>
                 <a:latin typeface="Arial"/>
               </a:rPr>
-              <a:t>AUROC</a:t>
+              <a:t>AUROC  (95% CI)</a:t>
             </a:r>
           </a:p>
         </p:txBody>
@@ -6489,7 +6578,7 @@
         </p:nvSpPr>
         <p:spPr>
           <a:xfrm>
-            <a:off x="566928" y="2286000"/>
+            <a:off x="566928" y="2240280"/>
             <a:ext cx="11057839" cy="9525"/>
           </a:xfrm>
           <a:prstGeom prst="rect">
@@ -6533,8 +6622,8 @@
         </p:nvSpPr>
         <p:spPr>
           <a:xfrm>
-            <a:off x="566928" y="2395728"/>
-            <a:ext cx="3657600" cy="475488"/>
+            <a:off x="566928" y="2350008"/>
+            <a:ext cx="2651760" cy="493776"/>
           </a:xfrm>
           <a:prstGeom prst="rect">
             <a:avLst/>
@@ -6549,7 +6638,7 @@
           <a:p>
             <a:pPr algn="l"/>
             <a:r>
-              <a:rPr sz="1300" b="0" i="0">
+              <a:rPr sz="1300" b="1" i="0">
                 <a:solidFill>
                   <a:srgbClr val="171A21"/>
                 </a:solidFill>
@@ -6568,8 +6657,8 @@
         </p:nvSpPr>
         <p:spPr>
           <a:xfrm>
-            <a:off x="4224528" y="2395728"/>
-            <a:ext cx="2194560" cy="475488"/>
+            <a:off x="3218688" y="2350008"/>
+            <a:ext cx="2926080" cy="493776"/>
           </a:xfrm>
           <a:prstGeom prst="rect">
             <a:avLst/>
@@ -6592,6 +6681,15 @@
               </a:rPr>
               <a:t>0.854</a:t>
             </a:r>
+            <a:r>
+              <a:rPr sz="1150" b="0" i="0">
+                <a:solidFill>
+                  <a:srgbClr val="79828F"/>
+                </a:solidFill>
+                <a:latin typeface="Arial"/>
+              </a:rPr>
+              <a:t>  [0.796, 0.902]</a:t>
+            </a:r>
           </a:p>
         </p:txBody>
       </p:sp>
@@ -6603,7 +6701,7 @@
         </p:nvSpPr>
         <p:spPr>
           <a:xfrm>
-            <a:off x="566928" y="2798064"/>
+            <a:off x="566928" y="2770632"/>
             <a:ext cx="11057839" cy="9525"/>
           </a:xfrm>
           <a:prstGeom prst="rect">
@@ -6647,8 +6745,8 @@
         </p:nvSpPr>
         <p:spPr>
           <a:xfrm>
-            <a:off x="566928" y="2871216"/>
-            <a:ext cx="3657600" cy="475488"/>
+            <a:off x="566928" y="2843784"/>
+            <a:ext cx="2651760" cy="493776"/>
           </a:xfrm>
           <a:prstGeom prst="rect">
             <a:avLst/>
@@ -6663,7 +6761,7 @@
           <a:p>
             <a:pPr algn="l"/>
             <a:r>
-              <a:rPr sz="1300" b="0" i="0">
+              <a:rPr sz="1300" b="1" i="0">
                 <a:solidFill>
                   <a:srgbClr val="171A21"/>
                 </a:solidFill>
@@ -6682,8 +6780,8 @@
         </p:nvSpPr>
         <p:spPr>
           <a:xfrm>
-            <a:off x="4224528" y="2871216"/>
-            <a:ext cx="2194560" cy="475488"/>
+            <a:off x="3218688" y="2843784"/>
+            <a:ext cx="2926080" cy="493776"/>
           </a:xfrm>
           <a:prstGeom prst="rect">
             <a:avLst/>
@@ -6706,6 +6804,15 @@
               </a:rPr>
               <a:t>0.801</a:t>
             </a:r>
+            <a:r>
+              <a:rPr sz="1150" b="0" i="0">
+                <a:solidFill>
+                  <a:srgbClr val="79828F"/>
+                </a:solidFill>
+                <a:latin typeface="Arial"/>
+              </a:rPr>
+              <a:t>  [0.751, 0.846]</a:t>
+            </a:r>
           </a:p>
         </p:txBody>
       </p:sp>
@@ -6717,7 +6824,7 @@
         </p:nvSpPr>
         <p:spPr>
           <a:xfrm>
-            <a:off x="566928" y="3273552"/>
+            <a:off x="566928" y="3264408"/>
             <a:ext cx="11057839" cy="9525"/>
           </a:xfrm>
           <a:prstGeom prst="rect">
@@ -6761,8 +6868,8 @@
         </p:nvSpPr>
         <p:spPr>
           <a:xfrm>
-            <a:off x="566928" y="3346704"/>
-            <a:ext cx="3657600" cy="475488"/>
+            <a:off x="566928" y="3337560"/>
+            <a:ext cx="2651760" cy="493776"/>
           </a:xfrm>
           <a:prstGeom prst="rect">
             <a:avLst/>
@@ -6777,7 +6884,7 @@
           <a:p>
             <a:pPr algn="l"/>
             <a:r>
-              <a:rPr sz="1300" b="0" i="0">
+              <a:rPr sz="1300" b="1" i="0">
                 <a:solidFill>
                   <a:srgbClr val="171A21"/>
                 </a:solidFill>
@@ -6796,8 +6903,8 @@
         </p:nvSpPr>
         <p:spPr>
           <a:xfrm>
-            <a:off x="4224528" y="3346704"/>
-            <a:ext cx="2194560" cy="475488"/>
+            <a:off x="3218688" y="3337560"/>
+            <a:ext cx="2926080" cy="493776"/>
           </a:xfrm>
           <a:prstGeom prst="rect">
             <a:avLst/>
@@ -6820,6 +6927,15 @@
               </a:rPr>
               <a:t>0.775</a:t>
             </a:r>
+            <a:r>
+              <a:rPr sz="1150" b="0" i="0">
+                <a:solidFill>
+                  <a:srgbClr val="79828F"/>
+                </a:solidFill>
+                <a:latin typeface="Arial"/>
+              </a:rPr>
+              <a:t>  [0.694, 0.848]</a:t>
+            </a:r>
           </a:p>
         </p:txBody>
       </p:sp>
@@ -6831,7 +6947,7 @@
         </p:nvSpPr>
         <p:spPr>
           <a:xfrm>
-            <a:off x="566928" y="3749040"/>
+            <a:off x="566928" y="3758184"/>
             <a:ext cx="11057839" cy="9525"/>
           </a:xfrm>
           <a:prstGeom prst="rect">
@@ -6875,8 +6991,8 @@
         </p:nvSpPr>
         <p:spPr>
           <a:xfrm>
-            <a:off x="566928" y="3794760"/>
-            <a:ext cx="5852160" cy="457200"/>
+            <a:off x="566928" y="3657600"/>
+            <a:ext cx="5577840" cy="365760"/>
           </a:xfrm>
           <a:prstGeom prst="rect">
             <a:avLst/>
@@ -6897,7 +7013,7 @@
                 </a:solidFill>
                 <a:latin typeface="Arial"/>
               </a:rPr>
-              <a:t>Confidence intervals overlap. Not a Qwen quirk.</a:t>
+              <a:t>Intervals overlap. Not a Qwen quirk.</a:t>
             </a:r>
           </a:p>
         </p:txBody>
@@ -6910,8 +7026,8 @@
         </p:nvSpPr>
         <p:spPr>
           <a:xfrm>
-            <a:off x="6858000" y="1920240"/>
-            <a:ext cx="4754880" cy="2743200"/>
+            <a:off x="566928" y="4206240"/>
+            <a:ext cx="11057839" cy="1965960"/>
           </a:xfrm>
           <a:prstGeom prst="rect">
             <a:avLst/>
@@ -6956,14 +7072,14 @@
         </p:nvSpPr>
         <p:spPr>
           <a:xfrm>
-            <a:off x="6858000" y="1920240"/>
-            <a:ext cx="4754880" cy="41148"/>
+            <a:off x="566928" y="4206240"/>
+            <a:ext cx="11057839" cy="41148"/>
           </a:xfrm>
           <a:prstGeom prst="rect">
             <a:avLst/>
           </a:prstGeom>
           <a:solidFill>
-            <a:srgbClr val="B23A34"/>
+            <a:srgbClr val="2F5D8C"/>
           </a:solidFill>
           <a:ln>
             <a:noFill/>
@@ -7000,8 +7116,8 @@
         </p:nvSpPr>
         <p:spPr>
           <a:xfrm>
-            <a:off x="7178040" y="2240280"/>
-            <a:ext cx="4114800" cy="2286000"/>
+            <a:off x="859536" y="4425696"/>
+            <a:ext cx="10835640" cy="1691640"/>
           </a:xfrm>
           <a:prstGeom prst="rect">
             <a:avLst/>
@@ -7016,47 +7132,38 @@
           <a:p>
             <a:pPr algn="l"/>
             <a:r>
-              <a:rPr sz="1200" b="1" i="0">
-                <a:solidFill>
-                  <a:srgbClr val="79828F"/>
-                </a:solidFill>
-                <a:latin typeface="Arial"/>
-              </a:rPr>
-              <a:t>A 4th model looked best</a:t>
+              <a:rPr sz="1050" b="1" i="0">
+                <a:solidFill>
+                  <a:srgbClr val="2F5D8C"/>
+                </a:solidFill>
+                <a:latin typeface="Arial"/>
+              </a:rPr>
+              <a:t>THE ROBUSTNESS CHECK</a:t>
             </a:r>
           </a:p>
           <a:p>
             <a:pPr>
               <a:spcBef>
-                <a:spcPts val="1000"/>
+                <a:spcPts val="700"/>
               </a:spcBef>
             </a:pPr>
             <a:r>
-              <a:rPr sz="3000" b="1" i="0">
-                <a:solidFill>
-                  <a:srgbClr val="B23A34"/>
-                </a:solidFill>
-                <a:latin typeface="Georgia"/>
-              </a:rPr>
-              <a:t>0.915</a:t>
-            </a:r>
-            <a:r>
-              <a:rPr sz="2000" b="0" i="0">
-                <a:solidFill>
-                  <a:srgbClr val="79828F"/>
-                </a:solidFill>
-                <a:latin typeface="Arial"/>
-              </a:rPr>
-              <a:t>   →   </a:t>
-            </a:r>
-            <a:r>
-              <a:rPr sz="3000" b="1" i="0">
+              <a:rPr sz="1500" b="1" i="0">
                 <a:solidFill>
                   <a:srgbClr val="171A21"/>
                 </a:solidFill>
-                <a:latin typeface="Georgia"/>
-              </a:rPr>
-              <a:t>0.556</a:t>
+                <a:latin typeface="Arial"/>
+              </a:rPr>
+              <a:t>Delete every item where all 5 readings differed.</a:t>
+            </a:r>
+            <a:r>
+              <a:rPr sz="1500" b="0" i="0">
+                <a:solidFill>
+                  <a:srgbClr val="4A5260"/>
+                </a:solidFill>
+                <a:latin typeface="Arial"/>
+              </a:rPr>
+              <a:t>  Those are easy to flag and nearly always wrong. If the score survives, the signal is graded. If it collapses, the score was only detecting total breakdown.</a:t>
             </a:r>
           </a:p>
           <a:p>
@@ -7066,13 +7173,40 @@
               </a:spcBef>
             </a:pPr>
             <a:r>
+              <a:rPr sz="1500" b="1" i="0">
+                <a:solidFill>
+                  <a:srgbClr val="1B7A4B"/>
+                </a:solidFill>
+                <a:latin typeface="Arial"/>
+              </a:rPr>
+              <a:t>Qwen  0.835 → 0.794</a:t>
+            </a:r>
+            <a:r>
               <a:rPr sz="1300" b="0" i="0">
                 <a:solidFill>
                   <a:srgbClr val="4A5260"/>
                 </a:solidFill>
                 <a:latin typeface="Arial"/>
               </a:rPr>
-              <a:t>InternVL3. Under the same robustness check, it collapsed to chance — it was producing incoherent output on 2/3 of items.</a:t>
+              <a:t>   239 items left, barely moves          </a:t>
+            </a:r>
+            <a:r>
+              <a:rPr sz="1500" b="1" i="0">
+                <a:solidFill>
+                  <a:srgbClr val="B23A34"/>
+                </a:solidFill>
+                <a:latin typeface="Arial"/>
+              </a:rPr>
+              <a:t>InternVL3  0.915 → 0.556</a:t>
+            </a:r>
+            <a:r>
+              <a:rPr sz="1300" b="0" i="0">
+                <a:solidFill>
+                  <a:srgbClr val="4A5260"/>
+                </a:solidFill>
+                <a:latin typeface="Arial"/>
+              </a:rPr>
+              <a:t>   only 98 left, collapses to chance</a:t>
             </a:r>
           </a:p>
         </p:txBody>

--- a/slides/fermat_findings.pptx
+++ b/slides/fermat_findings.pptx
@@ -11,6 +11,7 @@
     <p:sldId id="259" r:id="rId10"/>
     <p:sldId id="260" r:id="rId11"/>
     <p:sldId id="261" r:id="rId12"/>
+    <p:sldId id="262" r:id="rId13"/>
   </p:sldIdLst>
   <p:sldSz cx="12191695" cy="6858000" type="screen4x3"/>
   <p:notesSz cx="6858000" cy="9144000"/>
@@ -3180,8 +3181,8 @@
         </p:blipFill>
         <p:spPr>
           <a:xfrm>
-            <a:off x="566928" y="2057400"/>
-            <a:ext cx="5058383" cy="3566160"/>
+            <a:off x="566928" y="2103120"/>
+            <a:ext cx="4345021" cy="3063240"/>
           </a:xfrm>
           <a:prstGeom prst="rect">
             <a:avLst/>
@@ -3196,8 +3197,8 @@
         </p:nvSpPr>
         <p:spPr>
           <a:xfrm>
-            <a:off x="6035040" y="2057400"/>
-            <a:ext cx="5577840" cy="1463040"/>
+            <a:off x="5669280" y="2057400"/>
+            <a:ext cx="5943600" cy="914400"/>
           </a:xfrm>
           <a:prstGeom prst="rect">
             <a:avLst/>
@@ -3210,13 +3211,9 @@
           </a:bodyPr>
           <a:lstStyle/>
           <a:p>
-            <a:pPr algn="l">
-              <a:spcAft>
-                <a:spcPts val="900"/>
-              </a:spcAft>
-            </a:pPr>
-            <a:r>
-              <a:rPr sz="1600" b="1" i="0">
+            <a:pPr algn="l"/>
+            <a:r>
+              <a:rPr sz="1500" b="1" i="0">
                 <a:solidFill>
                   <a:srgbClr val="171A21"/>
                 </a:solidFill>
@@ -3225,23 +3222,16 @@
               <a:t>~2,200</a:t>
             </a:r>
             <a:r>
-              <a:rPr sz="1600" b="0" i="0">
+              <a:rPr sz="1500" b="0" i="0">
                 <a:solidFill>
                   <a:srgbClr val="4A5260"/>
                 </a:solidFill>
                 <a:latin typeface="Arial"/>
               </a:rPr>
-              <a:t> photographed solutions</a:t>
-            </a:r>
-          </a:p>
-          <a:p>
-            <a:pPr>
-              <a:spcAft>
-                <a:spcPts val="900"/>
-              </a:spcAft>
-            </a:pPr>
-            <a:r>
-              <a:rPr sz="1600" b="1" i="0">
+              <a:t> photographed solutions   ·   </a:t>
+            </a:r>
+            <a:r>
+              <a:rPr sz="1500" b="1" i="0">
                 <a:solidFill>
                   <a:srgbClr val="171A21"/>
                 </a:solidFill>
@@ -3250,7 +3240,7 @@
               <a:t>85%</a:t>
             </a:r>
             <a:r>
-              <a:rPr sz="1600" b="0" i="0">
+              <a:rPr sz="1500" b="0" i="0">
                 <a:solidFill>
                   <a:srgbClr val="4A5260"/>
                 </a:solidFill>
@@ -3259,43 +3249,108 @@
               <a:t> contain a deliberate error</a:t>
             </a:r>
           </a:p>
-          <a:p>
-            <a:pPr>
-              <a:spcAft>
-                <a:spcPts val="900"/>
-              </a:spcAft>
-            </a:pPr>
-            <a:r>
-              <a:rPr sz="1600" b="1" i="0">
-                <a:solidFill>
-                  <a:srgbClr val="171A21"/>
-                </a:solidFill>
-                <a:latin typeface="Arial"/>
-              </a:rPr>
-              <a:t>Question + answer</a:t>
-            </a:r>
-            <a:r>
-              <a:rPr sz="1600" b="0" i="0">
-                <a:solidFill>
-                  <a:srgbClr val="4A5260"/>
-                </a:solidFill>
-                <a:latin typeface="Arial"/>
-              </a:rPr>
-              <a:t> both in the image</a:t>
-            </a:r>
-          </a:p>
-        </p:txBody>
-      </p:sp>
-      <p:sp>
-        <p:nvSpPr>
-          <p:cNvPr id="6" name="TextBox 5"/>
+        </p:txBody>
+      </p:sp>
+      <p:sp>
+        <p:nvSpPr>
+          <p:cNvPr id="6" name="Rectangle 5"/>
+          <p:cNvSpPr/>
+          <p:nvPr/>
+        </p:nvSpPr>
+        <p:spPr>
+          <a:xfrm>
+            <a:off x="5669280" y="2606040"/>
+            <a:ext cx="5943600" cy="1691640"/>
+          </a:xfrm>
+          <a:prstGeom prst="rect">
+            <a:avLst/>
+          </a:prstGeom>
+          <a:solidFill>
+            <a:srgbClr val="F5F7FA"/>
+          </a:solidFill>
+          <a:ln w="9525">
+            <a:solidFill>
+              <a:srgbClr val="DDE2EA"/>
+            </a:solidFill>
+          </a:ln>
+          <a:effectLst/>
+        </p:spPr>
+        <p:style>
+          <a:lnRef idx="1">
+            <a:schemeClr val="accent1"/>
+          </a:lnRef>
+          <a:fillRef idx="3">
+            <a:schemeClr val="accent1"/>
+          </a:fillRef>
+          <a:effectRef idx="2">
+            <a:schemeClr val="accent1"/>
+          </a:effectRef>
+          <a:fontRef idx="minor">
+            <a:schemeClr val="lt1"/>
+          </a:fontRef>
+        </p:style>
+        <p:txBody>
+          <a:bodyPr rtlCol="0" anchor="ctr"/>
+          <a:lstStyle/>
+          <a:p>
+            <a:pPr algn="ctr"/>
+          </a:p>
+        </p:txBody>
+      </p:sp>
+      <p:sp>
+        <p:nvSpPr>
+          <p:cNvPr id="7" name="Rectangle 6"/>
+          <p:cNvSpPr/>
+          <p:nvPr/>
+        </p:nvSpPr>
+        <p:spPr>
+          <a:xfrm>
+            <a:off x="5669280" y="2606040"/>
+            <a:ext cx="5943600" cy="41148"/>
+          </a:xfrm>
+          <a:prstGeom prst="rect">
+            <a:avLst/>
+          </a:prstGeom>
+          <a:solidFill>
+            <a:srgbClr val="2F5D8C"/>
+          </a:solidFill>
+          <a:ln>
+            <a:noFill/>
+          </a:ln>
+          <a:effectLst/>
+        </p:spPr>
+        <p:style>
+          <a:lnRef idx="1">
+            <a:schemeClr val="accent1"/>
+          </a:lnRef>
+          <a:fillRef idx="3">
+            <a:schemeClr val="accent1"/>
+          </a:fillRef>
+          <a:effectRef idx="2">
+            <a:schemeClr val="accent1"/>
+          </a:effectRef>
+          <a:fontRef idx="minor">
+            <a:schemeClr val="lt1"/>
+          </a:fontRef>
+        </p:style>
+        <p:txBody>
+          <a:bodyPr rtlCol="0" anchor="ctr"/>
+          <a:lstStyle/>
+          <a:p>
+            <a:pPr algn="ctr"/>
+          </a:p>
+        </p:txBody>
+      </p:sp>
+      <p:sp>
+        <p:nvSpPr>
+          <p:cNvPr id="8" name="TextBox 7"/>
           <p:cNvSpPr txBox="1"/>
           <p:nvPr/>
         </p:nvSpPr>
         <p:spPr>
           <a:xfrm>
-            <a:off x="6035040" y="3611880"/>
-            <a:ext cx="5577840" cy="274320"/>
+            <a:off x="5925312" y="2816352"/>
+            <a:ext cx="5440680" cy="1371600"/>
           </a:xfrm>
           <a:prstGeom prst="rect">
             <a:avLst/>
@@ -3310,27 +3365,77 @@
           <a:p>
             <a:pPr algn="l"/>
             <a:r>
-              <a:rPr sz="1050" b="1" i="0">
-                <a:solidFill>
-                  <a:srgbClr val="79828F"/>
-                </a:solidFill>
-                <a:latin typeface="Arial"/>
-              </a:rPr>
-              <a:t>ONLY FERMAT HAS CORRECT ANSWERS TOO</a:t>
-            </a:r>
-          </a:p>
-        </p:txBody>
-      </p:sp>
-      <p:sp>
-        <p:nvSpPr>
-          <p:cNvPr id="7" name="TextBox 6"/>
+              <a:rPr sz="1000" b="1" i="0">
+                <a:solidFill>
+                  <a:srgbClr val="2F5D8C"/>
+                </a:solidFill>
+                <a:latin typeface="Arial"/>
+              </a:rPr>
+              <a:t>WE TEST TWO SEPARATE TASKS</a:t>
+            </a:r>
+          </a:p>
+          <a:p>
+            <a:pPr>
+              <a:spcBef>
+                <a:spcPts val="900"/>
+              </a:spcBef>
+            </a:pPr>
+            <a:r>
+              <a:rPr sz="1400" b="1" i="0">
+                <a:solidFill>
+                  <a:srgbClr val="171A21"/>
+                </a:solidFill>
+                <a:latin typeface="Arial"/>
+              </a:rPr>
+              <a:t>Perception</a:t>
+            </a:r>
+            <a:r>
+              <a:rPr sz="1400" b="0" i="0">
+                <a:solidFill>
+                  <a:srgbClr val="4A5260"/>
+                </a:solidFill>
+                <a:latin typeface="Arial"/>
+              </a:rPr>
+              <a:t> — read the page. Did it transcribe correctly?</a:t>
+            </a:r>
+          </a:p>
+          <a:p>
+            <a:pPr>
+              <a:spcBef>
+                <a:spcPts val="600"/>
+              </a:spcBef>
+            </a:pPr>
+            <a:r>
+              <a:rPr sz="1400" b="1" i="0">
+                <a:solidFill>
+                  <a:srgbClr val="171A21"/>
+                </a:solidFill>
+                <a:latin typeface="Arial"/>
+              </a:rPr>
+              <a:t>Reasoning</a:t>
+            </a:r>
+            <a:r>
+              <a:rPr sz="1400" b="0" i="0">
+                <a:solidFill>
+                  <a:srgbClr val="4A5260"/>
+                </a:solidFill>
+                <a:latin typeface="Arial"/>
+              </a:rPr>
+              <a:t> — grade the page. Did it spot the error correctly?</a:t>
+            </a:r>
+          </a:p>
+        </p:txBody>
+      </p:sp>
+      <p:sp>
+        <p:nvSpPr>
+          <p:cNvPr id="9" name="TextBox 8"/>
           <p:cNvSpPr txBox="1"/>
           <p:nvPr/>
         </p:nvSpPr>
         <p:spPr>
           <a:xfrm>
-            <a:off x="6035040" y="3977639"/>
-            <a:ext cx="2926080" cy="384048"/>
+            <a:off x="5669280" y="4572000"/>
+            <a:ext cx="5943600" cy="274320"/>
           </a:xfrm>
           <a:prstGeom prst="rect">
             <a:avLst/>
@@ -3345,27 +3450,27 @@
           <a:p>
             <a:pPr algn="l"/>
             <a:r>
-              <a:rPr sz="1300" b="0" i="0">
-                <a:solidFill>
-                  <a:srgbClr val="171A21"/>
-                </a:solidFill>
-                <a:latin typeface="Arial"/>
-              </a:rPr>
-              <a:t>FERMAT</a:t>
-            </a:r>
-          </a:p>
-        </p:txBody>
-      </p:sp>
-      <p:sp>
-        <p:nvSpPr>
-          <p:cNvPr id="8" name="TextBox 7"/>
+              <a:rPr sz="1000" b="1" i="0">
+                <a:solidFill>
+                  <a:srgbClr val="79828F"/>
+                </a:solidFill>
+                <a:latin typeface="Arial"/>
+              </a:rPr>
+              <a:t>ONLY FERMAT HAS CORRECT ANSWERS TOO</a:t>
+            </a:r>
+          </a:p>
+        </p:txBody>
+      </p:sp>
+      <p:sp>
+        <p:nvSpPr>
+          <p:cNvPr id="10" name="TextBox 9"/>
           <p:cNvSpPr txBox="1"/>
           <p:nvPr/>
         </p:nvSpPr>
         <p:spPr>
           <a:xfrm>
-            <a:off x="8961120" y="3977639"/>
-            <a:ext cx="2651760" cy="384048"/>
+            <a:off x="5669280" y="4919472"/>
+            <a:ext cx="3291840" cy="365760"/>
           </a:xfrm>
           <a:prstGeom prst="rect">
             <a:avLst/>
@@ -3380,6 +3485,41 @@
           <a:p>
             <a:pPr algn="l"/>
             <a:r>
+              <a:rPr sz="1300" b="0" i="0">
+                <a:solidFill>
+                  <a:srgbClr val="171A21"/>
+                </a:solidFill>
+                <a:latin typeface="Arial"/>
+              </a:rPr>
+              <a:t>FERMAT</a:t>
+            </a:r>
+          </a:p>
+        </p:txBody>
+      </p:sp>
+      <p:sp>
+        <p:nvSpPr>
+          <p:cNvPr id="11" name="TextBox 10"/>
+          <p:cNvSpPr txBox="1"/>
+          <p:nvPr/>
+        </p:nvSpPr>
+        <p:spPr>
+          <a:xfrm>
+            <a:off x="8961120" y="4919472"/>
+            <a:ext cx="2651760" cy="365760"/>
+          </a:xfrm>
+          <a:prstGeom prst="rect">
+            <a:avLst/>
+          </a:prstGeom>
+          <a:noFill/>
+        </p:spPr>
+        <p:txBody>
+          <a:bodyPr wrap="square" lIns="0" rIns="0" tIns="0" bIns="0" anchor="t">
+            <a:spAutoFit/>
+          </a:bodyPr>
+          <a:lstStyle/>
+          <a:p>
+            <a:pPr algn="l"/>
+            <a:r>
               <a:rPr sz="1300" b="1" i="0">
                 <a:solidFill>
                   <a:srgbClr val="1B7A4B"/>
@@ -3393,13 +3533,13 @@
       </p:sp>
       <p:sp>
         <p:nvSpPr>
-          <p:cNvPr id="9" name="Rectangle 8"/>
+          <p:cNvPr id="12" name="Rectangle 11"/>
           <p:cNvSpPr/>
           <p:nvPr/>
         </p:nvSpPr>
         <p:spPr>
           <a:xfrm>
-            <a:off x="566928" y="4288535"/>
+            <a:off x="566928" y="5212080"/>
             <a:ext cx="11057839" cy="9525"/>
           </a:xfrm>
           <a:prstGeom prst="rect">
@@ -3437,14 +3577,14 @@
       </p:sp>
       <p:sp>
         <p:nvSpPr>
-          <p:cNvPr id="10" name="TextBox 9"/>
+          <p:cNvPr id="13" name="TextBox 12"/>
           <p:cNvSpPr txBox="1"/>
           <p:nvPr/>
         </p:nvSpPr>
         <p:spPr>
           <a:xfrm>
-            <a:off x="6035040" y="4361687"/>
-            <a:ext cx="2926080" cy="384048"/>
+            <a:off x="5669280" y="5285232"/>
+            <a:ext cx="3291840" cy="365760"/>
           </a:xfrm>
           <a:prstGeom prst="rect">
             <a:avLst/>
@@ -3465,21 +3605,21 @@
                 </a:solidFill>
                 <a:latin typeface="Arial"/>
               </a:rPr>
-              <a:t>ErrorRadar</a:t>
-            </a:r>
-          </a:p>
-        </p:txBody>
-      </p:sp>
-      <p:sp>
-        <p:nvSpPr>
-          <p:cNvPr id="11" name="TextBox 10"/>
+              <a:t>ErrorRadar  /  ScratchMath</a:t>
+            </a:r>
+          </a:p>
+        </p:txBody>
+      </p:sp>
+      <p:sp>
+        <p:nvSpPr>
+          <p:cNvPr id="14" name="TextBox 13"/>
           <p:cNvSpPr txBox="1"/>
           <p:nvPr/>
         </p:nvSpPr>
         <p:spPr>
           <a:xfrm>
-            <a:off x="8961120" y="4361687"/>
-            <a:ext cx="2651760" cy="384048"/>
+            <a:off x="8961120" y="5285232"/>
+            <a:ext cx="2651760" cy="365760"/>
           </a:xfrm>
           <a:prstGeom prst="rect">
             <a:avLst/>
@@ -3500,20 +3640,20 @@
                 </a:solidFill>
                 <a:latin typeface="Arial"/>
               </a:rPr>
-              <a:t>none</a:t>
-            </a:r>
-          </a:p>
-        </p:txBody>
-      </p:sp>
-      <p:sp>
-        <p:nvSpPr>
-          <p:cNvPr id="12" name="Rectangle 11"/>
+              <a:t>no clean items</a:t>
+            </a:r>
+          </a:p>
+        </p:txBody>
+      </p:sp>
+      <p:sp>
+        <p:nvSpPr>
+          <p:cNvPr id="15" name="Rectangle 14"/>
           <p:cNvSpPr/>
           <p:nvPr/>
         </p:nvSpPr>
         <p:spPr>
           <a:xfrm>
-            <a:off x="566928" y="4672583"/>
+            <a:off x="566928" y="5577840"/>
             <a:ext cx="11057839" cy="9525"/>
           </a:xfrm>
           <a:prstGeom prst="rect">
@@ -3551,14 +3691,14 @@
       </p:sp>
       <p:sp>
         <p:nvSpPr>
-          <p:cNvPr id="13" name="TextBox 12"/>
+          <p:cNvPr id="16" name="TextBox 15"/>
           <p:cNvSpPr txBox="1"/>
           <p:nvPr/>
         </p:nvSpPr>
         <p:spPr>
           <a:xfrm>
-            <a:off x="6035040" y="4745735"/>
-            <a:ext cx="2926080" cy="384048"/>
+            <a:off x="566928" y="6364224"/>
+            <a:ext cx="8229600" cy="292608"/>
           </a:xfrm>
           <a:prstGeom prst="rect">
             <a:avLst/>
@@ -3573,27 +3713,45 @@
           <a:p>
             <a:pPr algn="l"/>
             <a:r>
-              <a:rPr sz="1300" b="0" i="0">
-                <a:solidFill>
-                  <a:srgbClr val="171A21"/>
-                </a:solidFill>
-                <a:latin typeface="Arial"/>
-              </a:rPr>
-              <a:t>ScratchMath</a:t>
-            </a:r>
-          </a:p>
-        </p:txBody>
-      </p:sp>
-      <p:sp>
-        <p:nvSpPr>
-          <p:cNvPr id="14" name="TextBox 13"/>
+              <a:rPr sz="1000" b="1" i="0">
+                <a:solidFill>
+                  <a:srgbClr val="2F5D8C"/>
+                </a:solidFill>
+                <a:latin typeface="Arial"/>
+              </a:rPr>
+              <a:t>FERMAT</a:t>
+            </a:r>
+            <a:r>
+              <a:rPr sz="1000" b="0" i="0">
+                <a:solidFill>
+                  <a:srgbClr val="DDE2EA"/>
+                </a:solidFill>
+                <a:latin typeface="Arial"/>
+              </a:rPr>
+              <a:t>   ·   </a:t>
+            </a:r>
+            <a:r>
+              <a:rPr sz="1000" b="0" i="0">
+                <a:solidFill>
+                  <a:srgbClr val="79828F"/>
+                </a:solidFill>
+                <a:latin typeface="Arial"/>
+              </a:rPr>
+              <a:t>setup</a:t>
+            </a:r>
+          </a:p>
+        </p:txBody>
+      </p:sp>
+      <p:sp>
+        <p:nvSpPr>
+          <p:cNvPr id="17" name="TextBox 16"/>
           <p:cNvSpPr txBox="1"/>
           <p:nvPr/>
         </p:nvSpPr>
         <p:spPr>
           <a:xfrm>
-            <a:off x="8961120" y="4745735"/>
-            <a:ext cx="2651760" cy="384048"/>
+            <a:off x="10527487" y="6382512"/>
+            <a:ext cx="1097280" cy="274320"/>
           </a:xfrm>
           <a:prstGeom prst="rect">
             <a:avLst/>
@@ -3606,120 +3764,6 @@
           </a:bodyPr>
           <a:lstStyle/>
           <a:p>
-            <a:pPr algn="l"/>
-            <a:r>
-              <a:rPr sz="1300" b="1" i="0">
-                <a:solidFill>
-                  <a:srgbClr val="B23A34"/>
-                </a:solidFill>
-                <a:latin typeface="Arial"/>
-              </a:rPr>
-              <a:t>none</a:t>
-            </a:r>
-          </a:p>
-        </p:txBody>
-      </p:sp>
-      <p:sp>
-        <p:nvSpPr>
-          <p:cNvPr id="15" name="Rectangle 14"/>
-          <p:cNvSpPr/>
-          <p:nvPr/>
-        </p:nvSpPr>
-        <p:spPr>
-          <a:xfrm>
-            <a:off x="566928" y="5056631"/>
-            <a:ext cx="11057839" cy="9525"/>
-          </a:xfrm>
-          <a:prstGeom prst="rect">
-            <a:avLst/>
-          </a:prstGeom>
-          <a:solidFill>
-            <a:srgbClr val="DDE2EA"/>
-          </a:solidFill>
-          <a:ln>
-            <a:noFill/>
-          </a:ln>
-          <a:effectLst/>
-        </p:spPr>
-        <p:style>
-          <a:lnRef idx="1">
-            <a:schemeClr val="accent1"/>
-          </a:lnRef>
-          <a:fillRef idx="3">
-            <a:schemeClr val="accent1"/>
-          </a:fillRef>
-          <a:effectRef idx="2">
-            <a:schemeClr val="accent1"/>
-          </a:effectRef>
-          <a:fontRef idx="minor">
-            <a:schemeClr val="lt1"/>
-          </a:fontRef>
-        </p:style>
-        <p:txBody>
-          <a:bodyPr rtlCol="0" anchor="ctr"/>
-          <a:lstStyle/>
-          <a:p>
-            <a:pPr algn="ctr"/>
-          </a:p>
-        </p:txBody>
-      </p:sp>
-      <p:sp>
-        <p:nvSpPr>
-          <p:cNvPr id="16" name="TextBox 15"/>
-          <p:cNvSpPr txBox="1"/>
-          <p:nvPr/>
-        </p:nvSpPr>
-        <p:spPr>
-          <a:xfrm>
-            <a:off x="6035040" y="5440680"/>
-            <a:ext cx="5577840" cy="548640"/>
-          </a:xfrm>
-          <a:prstGeom prst="rect">
-            <a:avLst/>
-          </a:prstGeom>
-          <a:noFill/>
-        </p:spPr>
-        <p:txBody>
-          <a:bodyPr wrap="square" lIns="0" rIns="0" tIns="0" bIns="0" anchor="t">
-            <a:spAutoFit/>
-          </a:bodyPr>
-          <a:lstStyle/>
-          <a:p>
-            <a:pPr algn="l"/>
-            <a:r>
-              <a:rPr sz="1250" b="0" i="1">
-                <a:solidFill>
-                  <a:srgbClr val="4A5260"/>
-                </a:solidFill>
-                <a:latin typeface="Arial"/>
-              </a:rPr>
-              <a:t>No clean items → no balanced set → the finding on slide 4 cannot be measured at all.</a:t>
-            </a:r>
-          </a:p>
-        </p:txBody>
-      </p:sp>
-      <p:sp>
-        <p:nvSpPr>
-          <p:cNvPr id="17" name="TextBox 16"/>
-          <p:cNvSpPr txBox="1"/>
-          <p:nvPr/>
-        </p:nvSpPr>
-        <p:spPr>
-          <a:xfrm>
-            <a:off x="10527487" y="6382512"/>
-            <a:ext cx="1097280" cy="274320"/>
-          </a:xfrm>
-          <a:prstGeom prst="rect">
-            <a:avLst/>
-          </a:prstGeom>
-          <a:noFill/>
-        </p:spPr>
-        <p:txBody>
-          <a:bodyPr wrap="square" lIns="0" rIns="0" tIns="0" bIns="0" anchor="t">
-            <a:spAutoFit/>
-          </a:bodyPr>
-          <a:lstStyle/>
-          <a:p>
             <a:pPr algn="r"/>
             <a:r>
               <a:rPr sz="1000" b="0" i="0">
@@ -3728,7 +3772,7 @@
                 </a:solidFill>
                 <a:latin typeface="Arial"/>
               </a:rPr>
-              <a:t>1 / 6</a:t>
+              <a:t>1 / 7</a:t>
             </a:r>
           </a:p>
         </p:txBody>
@@ -3781,7 +3825,7 @@
                 </a:solidFill>
                 <a:latin typeface="Arial"/>
               </a:rPr>
-              <a:t>RESULT — CONFIRMED</a:t>
+              <a:t>PERCEPTION — CONFIRMED</a:t>
             </a:r>
           </a:p>
         </p:txBody>
@@ -3816,7 +3860,7 @@
                 </a:solidFill>
                 <a:latin typeface="Georgia"/>
               </a:rPr>
-              <a:t>Disagreement predicts error</a:t>
+              <a:t>When it can't read a page twice the same way, it's wrong</a:t>
             </a:r>
           </a:p>
         </p:txBody>
@@ -3829,8 +3873,8 @@
         </p:nvSpPr>
         <p:spPr>
           <a:xfrm>
-            <a:off x="566928" y="1600200"/>
-            <a:ext cx="5486400" cy="365760"/>
+            <a:off x="566928" y="1783080"/>
+            <a:ext cx="7315200" cy="365760"/>
           </a:xfrm>
           <a:prstGeom prst="rect">
             <a:avLst/>
@@ -3864,8 +3908,8 @@
         </p:nvSpPr>
         <p:spPr>
           <a:xfrm>
-            <a:off x="566928" y="2331720"/>
-            <a:ext cx="3200400" cy="237744"/>
+            <a:off x="566928" y="2395728"/>
+            <a:ext cx="3566160" cy="237744"/>
           </a:xfrm>
           <a:prstGeom prst="rect">
             <a:avLst/>
@@ -3899,8 +3943,8 @@
         </p:nvSpPr>
         <p:spPr>
           <a:xfrm>
-            <a:off x="3767328" y="2331720"/>
-            <a:ext cx="3108960" cy="237744"/>
+            <a:off x="4133088" y="2395728"/>
+            <a:ext cx="2743200" cy="237744"/>
           </a:xfrm>
           <a:prstGeom prst="rect">
             <a:avLst/>
@@ -3934,7 +3978,7 @@
         </p:nvSpPr>
         <p:spPr>
           <a:xfrm>
-            <a:off x="566928" y="2606040"/>
+            <a:off x="566928" y="2670048"/>
             <a:ext cx="11057839" cy="9525"/>
           </a:xfrm>
           <a:prstGeom prst="rect">
@@ -3978,8 +4022,8 @@
         </p:nvSpPr>
         <p:spPr>
           <a:xfrm>
-            <a:off x="566928" y="2715768"/>
-            <a:ext cx="3200400" cy="512064"/>
+            <a:off x="566928" y="2779776"/>
+            <a:ext cx="3566160" cy="512064"/>
           </a:xfrm>
           <a:prstGeom prst="rect">
             <a:avLst/>
@@ -4000,7 +4044,7 @@
                 </a:solidFill>
                 <a:latin typeface="Arial"/>
               </a:rPr>
-              <a:t>All 300 items</a:t>
+              <a:t>All 300 pages</a:t>
             </a:r>
           </a:p>
         </p:txBody>
@@ -4013,8 +4057,8 @@
         </p:nvSpPr>
         <p:spPr>
           <a:xfrm>
-            <a:off x="3767328" y="2715768"/>
-            <a:ext cx="3108960" cy="512064"/>
+            <a:off x="4133088" y="2779776"/>
+            <a:ext cx="2743200" cy="512064"/>
           </a:xfrm>
           <a:prstGeom prst="rect">
             <a:avLst/>
@@ -4057,7 +4101,7 @@
         </p:nvSpPr>
         <p:spPr>
           <a:xfrm>
-            <a:off x="566928" y="3154680"/>
+            <a:off x="566928" y="3218688"/>
             <a:ext cx="11057839" cy="9525"/>
           </a:xfrm>
           <a:prstGeom prst="rect">
@@ -4101,8 +4145,8 @@
         </p:nvSpPr>
         <p:spPr>
           <a:xfrm>
-            <a:off x="566928" y="3227832"/>
-            <a:ext cx="3200400" cy="512064"/>
+            <a:off x="566928" y="3291840"/>
+            <a:ext cx="3566160" cy="512064"/>
           </a:xfrm>
           <a:prstGeom prst="rect">
             <a:avLst/>
@@ -4123,7 +4167,7 @@
                 </a:solidFill>
                 <a:latin typeface="Arial"/>
               </a:rPr>
-              <a:t>Hardest cases deleted</a:t>
+              <a:t>Hardest cases deleted  (slide 3)</a:t>
             </a:r>
           </a:p>
         </p:txBody>
@@ -4136,8 +4180,8 @@
         </p:nvSpPr>
         <p:spPr>
           <a:xfrm>
-            <a:off x="3767328" y="3227832"/>
-            <a:ext cx="3108960" cy="512064"/>
+            <a:off x="4133088" y="3291840"/>
+            <a:ext cx="2743200" cy="512064"/>
           </a:xfrm>
           <a:prstGeom prst="rect">
             <a:avLst/>
@@ -4180,7 +4224,7 @@
         </p:nvSpPr>
         <p:spPr>
           <a:xfrm>
-            <a:off x="566928" y="3666744"/>
+            <a:off x="566928" y="3730752"/>
             <a:ext cx="11057839" cy="9525"/>
           </a:xfrm>
           <a:prstGeom prst="rect">
@@ -4224,8 +4268,8 @@
         </p:nvSpPr>
         <p:spPr>
           <a:xfrm>
-            <a:off x="566928" y="3739896"/>
-            <a:ext cx="3200400" cy="512064"/>
+            <a:off x="566928" y="3803904"/>
+            <a:ext cx="3566160" cy="512064"/>
           </a:xfrm>
           <a:prstGeom prst="rect">
             <a:avLst/>
@@ -4246,7 +4290,7 @@
                 </a:solidFill>
                 <a:latin typeface="Arial"/>
               </a:rPr>
-              <a:t>Model's own confidence</a:t>
+              <a:t>The model's own confidence</a:t>
             </a:r>
           </a:p>
         </p:txBody>
@@ -4259,8 +4303,8 @@
         </p:nvSpPr>
         <p:spPr>
           <a:xfrm>
-            <a:off x="3767328" y="3739896"/>
-            <a:ext cx="3108960" cy="512064"/>
+            <a:off x="4133088" y="3803904"/>
+            <a:ext cx="2743200" cy="512064"/>
           </a:xfrm>
           <a:prstGeom prst="rect">
             <a:avLst/>
@@ -4303,7 +4347,7 @@
         </p:nvSpPr>
         <p:spPr>
           <a:xfrm>
-            <a:off x="566928" y="4178808"/>
+            <a:off x="566928" y="4242816"/>
             <a:ext cx="11057839" cy="9525"/>
           </a:xfrm>
           <a:prstGeom prst="rect">
@@ -4347,8 +4391,8 @@
         </p:nvSpPr>
         <p:spPr>
           <a:xfrm>
-            <a:off x="566928" y="4160520"/>
-            <a:ext cx="5852160" cy="640080"/>
+            <a:off x="566928" y="4224528"/>
+            <a:ext cx="5943600" cy="640080"/>
           </a:xfrm>
           <a:prstGeom prst="rect">
             <a:avLst/>
@@ -4369,7 +4413,7 @@
                 </a:solidFill>
                 <a:latin typeface="Arial"/>
               </a:rPr>
-              <a:t>Row 2 explained on slide 5. Row 3's interval crosses 0.50 — the model's own confidence is no better than a coin flip here.</a:t>
+              <a:t>Row 3's interval crosses 0.50 — the model's own confidence score is no better than a coin flip here.</a:t>
             </a:r>
           </a:p>
         </p:txBody>
@@ -4382,8 +4426,8 @@
         </p:nvSpPr>
         <p:spPr>
           <a:xfrm>
-            <a:off x="6858000" y="2194560"/>
-            <a:ext cx="4754880" cy="2194560"/>
+            <a:off x="7223760" y="2286000"/>
+            <a:ext cx="4389120" cy="2286000"/>
           </a:xfrm>
           <a:prstGeom prst="rect">
             <a:avLst/>
@@ -4428,8 +4472,8 @@
         </p:nvSpPr>
         <p:spPr>
           <a:xfrm>
-            <a:off x="6858000" y="2194560"/>
-            <a:ext cx="4754880" cy="41148"/>
+            <a:off x="7223760" y="2286000"/>
+            <a:ext cx="4389120" cy="41148"/>
           </a:xfrm>
           <a:prstGeom prst="rect">
             <a:avLst/>
@@ -4472,8 +4516,8 @@
         </p:nvSpPr>
         <p:spPr>
           <a:xfrm>
-            <a:off x="7178040" y="2514600"/>
-            <a:ext cx="4114800" cy="1737360"/>
+            <a:off x="7516368" y="2606040"/>
+            <a:ext cx="3840480" cy="1828800"/>
           </a:xfrm>
           <a:prstGeom prst="rect">
             <a:avLst/>
@@ -4488,7 +4532,7 @@
           <a:p>
             <a:pPr algn="l"/>
             <a:r>
-              <a:rPr sz="1900" b="1" i="0">
+              <a:rPr sz="1800" b="1" i="0">
                 <a:solidFill>
                   <a:srgbClr val="171A21"/>
                 </a:solidFill>
@@ -4504,7 +4548,7 @@
               </a:spcBef>
             </a:pPr>
             <a:r>
-              <a:rPr sz="1900" b="1" i="0">
+              <a:rPr sz="1800" b="1" i="0">
                 <a:solidFill>
                   <a:srgbClr val="1B7A4B"/>
                 </a:solidFill>
@@ -4526,7 +4570,7 @@
                 </a:solidFill>
                 <a:latin typeface="Arial"/>
               </a:rPr>
-              <a:t>A usable abstention rule. No training, no labels.</a:t>
+              <a:t>Flag those for a human. Catches 57 real errors, wastes 4.</a:t>
             </a:r>
           </a:p>
         </p:txBody>
@@ -4539,8 +4583,8 @@
         </p:nvSpPr>
         <p:spPr>
           <a:xfrm>
-            <a:off x="10527487" y="6382512"/>
-            <a:ext cx="1097280" cy="274320"/>
+            <a:off x="566928" y="6364224"/>
+            <a:ext cx="8229600" cy="292608"/>
           </a:xfrm>
           <a:prstGeom prst="rect">
             <a:avLst/>
@@ -4553,6 +4597,59 @@
           </a:bodyPr>
           <a:lstStyle/>
           <a:p>
+            <a:pPr algn="l"/>
+            <a:r>
+              <a:rPr sz="1000" b="1" i="0">
+                <a:solidFill>
+                  <a:srgbClr val="2F5D8C"/>
+                </a:solidFill>
+                <a:latin typeface="Arial"/>
+              </a:rPr>
+              <a:t>FERMAT</a:t>
+            </a:r>
+            <a:r>
+              <a:rPr sz="1000" b="0" i="0">
+                <a:solidFill>
+                  <a:srgbClr val="DDE2EA"/>
+                </a:solidFill>
+                <a:latin typeface="Arial"/>
+              </a:rPr>
+              <a:t>   ·   </a:t>
+            </a:r>
+            <a:r>
+              <a:rPr sz="1000" b="0" i="0">
+                <a:solidFill>
+                  <a:srgbClr val="79828F"/>
+                </a:solidFill>
+                <a:latin typeface="Arial"/>
+              </a:rPr>
+              <a:t>perception — reading the page</a:t>
+            </a:r>
+          </a:p>
+        </p:txBody>
+      </p:sp>
+      <p:sp>
+        <p:nvSpPr>
+          <p:cNvPr id="22" name="TextBox 21"/>
+          <p:cNvSpPr txBox="1"/>
+          <p:nvPr/>
+        </p:nvSpPr>
+        <p:spPr>
+          <a:xfrm>
+            <a:off x="10527487" y="6382512"/>
+            <a:ext cx="1097280" cy="274320"/>
+          </a:xfrm>
+          <a:prstGeom prst="rect">
+            <a:avLst/>
+          </a:prstGeom>
+          <a:noFill/>
+        </p:spPr>
+        <p:txBody>
+          <a:bodyPr wrap="square" lIns="0" rIns="0" tIns="0" bIns="0" anchor="t">
+            <a:spAutoFit/>
+          </a:bodyPr>
+          <a:lstStyle/>
+          <a:p>
             <a:pPr algn="r"/>
             <a:r>
               <a:rPr sz="1000" b="0" i="0">
@@ -4561,7 +4658,7 @@
                 </a:solidFill>
                 <a:latin typeface="Arial"/>
               </a:rPr>
-              <a:t>2 / 6</a:t>
+              <a:t>2 / 7</a:t>
             </a:r>
           </a:p>
         </p:txBody>
@@ -4614,7 +4711,7 @@
                 </a:solidFill>
                 <a:latin typeface="Arial"/>
               </a:rPr>
-              <a:t>EVIDENCE — FOUR REAL PAGES</a:t>
+              <a:t>PERCEPTION — EVIDENCE</a:t>
             </a:r>
           </a:p>
         </p:txBody>
@@ -4662,8 +4759,8 @@
         </p:nvSpPr>
         <p:spPr>
           <a:xfrm>
-            <a:off x="566928" y="1783080"/>
-            <a:ext cx="2761488" cy="2788920"/>
+            <a:off x="566928" y="1737360"/>
+            <a:ext cx="2761488" cy="2697480"/>
           </a:xfrm>
           <a:prstGeom prst="rect">
             <a:avLst/>
@@ -4708,7 +4805,7 @@
         </p:nvSpPr>
         <p:spPr>
           <a:xfrm>
-            <a:off x="566928" y="1783080"/>
+            <a:off x="566928" y="1737360"/>
             <a:ext cx="2761488" cy="41148"/>
           </a:xfrm>
           <a:prstGeom prst="rect">
@@ -4760,8 +4857,8 @@
         </p:blipFill>
         <p:spPr>
           <a:xfrm>
-            <a:off x="1187320" y="1938528"/>
-            <a:ext cx="1520703" cy="1874518"/>
+            <a:off x="1224410" y="1883664"/>
+            <a:ext cx="1446523" cy="1783080"/>
           </a:xfrm>
           <a:prstGeom prst="rect">
             <a:avLst/>
@@ -4776,7 +4873,7 @@
         </p:nvSpPr>
         <p:spPr>
           <a:xfrm>
-            <a:off x="704088" y="3950208"/>
+            <a:off x="704088" y="3803904"/>
             <a:ext cx="2487168" cy="548640"/>
           </a:xfrm>
           <a:prstGeom prst="rect">
@@ -4827,8 +4924,8 @@
         </p:nvSpPr>
         <p:spPr>
           <a:xfrm>
-            <a:off x="3456432" y="1783080"/>
-            <a:ext cx="2761488" cy="2788920"/>
+            <a:off x="3456432" y="1737360"/>
+            <a:ext cx="2761488" cy="2697480"/>
           </a:xfrm>
           <a:prstGeom prst="rect">
             <a:avLst/>
@@ -4873,7 +4970,7 @@
         </p:nvSpPr>
         <p:spPr>
           <a:xfrm>
-            <a:off x="3456432" y="1783080"/>
+            <a:off x="3456432" y="1737360"/>
             <a:ext cx="2761488" cy="41148"/>
           </a:xfrm>
           <a:prstGeom prst="rect">
@@ -4925,7 +5022,7 @@
         </p:blipFill>
         <p:spPr>
           <a:xfrm>
-            <a:off x="3593592" y="2193371"/>
+            <a:off x="3593592" y="2092787"/>
             <a:ext cx="2487168" cy="1364833"/>
           </a:xfrm>
           <a:prstGeom prst="rect">
@@ -4941,7 +5038,7 @@
         </p:nvSpPr>
         <p:spPr>
           <a:xfrm>
-            <a:off x="3593592" y="3950208"/>
+            <a:off x="3593592" y="3803904"/>
             <a:ext cx="2487168" cy="548640"/>
           </a:xfrm>
           <a:prstGeom prst="rect">
@@ -4992,8 +5089,8 @@
         </p:nvSpPr>
         <p:spPr>
           <a:xfrm>
-            <a:off x="6345936" y="1783080"/>
-            <a:ext cx="2761488" cy="2788920"/>
+            <a:off x="6345936" y="1737360"/>
+            <a:ext cx="2761488" cy="2697480"/>
           </a:xfrm>
           <a:prstGeom prst="rect">
             <a:avLst/>
@@ -5038,7 +5135,7 @@
         </p:nvSpPr>
         <p:spPr>
           <a:xfrm>
-            <a:off x="6345936" y="1783080"/>
+            <a:off x="6345936" y="1737360"/>
             <a:ext cx="2761488" cy="41148"/>
           </a:xfrm>
           <a:prstGeom prst="rect">
@@ -5090,8 +5187,8 @@
         </p:blipFill>
         <p:spPr>
           <a:xfrm>
-            <a:off x="6958127" y="1938528"/>
-            <a:ext cx="1537105" cy="1874518"/>
+            <a:off x="6995617" y="1883664"/>
+            <a:ext cx="1462125" cy="1783080"/>
           </a:xfrm>
           <a:prstGeom prst="rect">
             <a:avLst/>
@@ -5106,7 +5203,7 @@
         </p:nvSpPr>
         <p:spPr>
           <a:xfrm>
-            <a:off x="6483096" y="3950208"/>
+            <a:off x="6483096" y="3803904"/>
             <a:ext cx="2487168" cy="548640"/>
           </a:xfrm>
           <a:prstGeom prst="rect">
@@ -5157,8 +5254,8 @@
         </p:nvSpPr>
         <p:spPr>
           <a:xfrm>
-            <a:off x="9235440" y="1783080"/>
-            <a:ext cx="2761488" cy="2788920"/>
+            <a:off x="9235440" y="1737360"/>
+            <a:ext cx="2761488" cy="2697480"/>
           </a:xfrm>
           <a:prstGeom prst="rect">
             <a:avLst/>
@@ -5203,7 +5300,7 @@
         </p:nvSpPr>
         <p:spPr>
           <a:xfrm>
-            <a:off x="9235440" y="1783080"/>
+            <a:off x="9235440" y="1737360"/>
             <a:ext cx="2761488" cy="41148"/>
           </a:xfrm>
           <a:prstGeom prst="rect">
@@ -5255,8 +5352,8 @@
         </p:blipFill>
         <p:spPr>
           <a:xfrm>
-            <a:off x="9856923" y="1938528"/>
-            <a:ext cx="1518522" cy="1874519"/>
+            <a:off x="9893959" y="1883664"/>
+            <a:ext cx="1444449" cy="1783080"/>
           </a:xfrm>
           <a:prstGeom prst="rect">
             <a:avLst/>
@@ -5271,7 +5368,7 @@
         </p:nvSpPr>
         <p:spPr>
           <a:xfrm>
-            <a:off x="9372600" y="3950208"/>
+            <a:off x="9372600" y="3803904"/>
             <a:ext cx="2487168" cy="548640"/>
           </a:xfrm>
           <a:prstGeom prst="rect">
@@ -5322,8 +5419,8 @@
         </p:nvSpPr>
         <p:spPr>
           <a:xfrm>
-            <a:off x="566928" y="4864608"/>
-            <a:ext cx="11057839" cy="1234440"/>
+            <a:off x="566928" y="4617720"/>
+            <a:ext cx="11057839" cy="1481328"/>
           </a:xfrm>
           <a:prstGeom prst="rect">
             <a:avLst/>
@@ -5368,7 +5465,7 @@
         </p:nvSpPr>
         <p:spPr>
           <a:xfrm>
-            <a:off x="566928" y="4864608"/>
+            <a:off x="566928" y="4617720"/>
             <a:ext cx="11057839" cy="41148"/>
           </a:xfrm>
           <a:prstGeom prst="rect">
@@ -5412,8 +5509,8 @@
         </p:nvSpPr>
         <p:spPr>
           <a:xfrm>
-            <a:off x="886968" y="5138928"/>
-            <a:ext cx="10789920" cy="822960"/>
+            <a:off x="859536" y="4828032"/>
+            <a:ext cx="10835640" cy="1234440"/>
           </a:xfrm>
           <a:prstGeom prst="rect">
             <a:avLst/>
@@ -5428,29 +5525,56 @@
           <a:p>
             <a:pPr algn="l"/>
             <a:r>
-              <a:rPr sz="1900" b="1" i="0">
+              <a:rPr sz="1700" b="1" i="0">
                 <a:solidFill>
                   <a:srgbClr val="171A21"/>
                 </a:solidFill>
                 <a:latin typeface="Georgia"/>
               </a:rPr>
-              <a:t>Page 1 and page 4 look identical to the method — both entropy zero.</a:t>
+              <a:t>Page 1 and page 4 look identical to the method — both entropy zero. One is right, one is wrong.</a:t>
             </a:r>
           </a:p>
           <a:p>
             <a:pPr>
               <a:spcBef>
-                <a:spcPts val="700"/>
+                <a:spcPts val="900"/>
               </a:spcBef>
             </a:pPr>
             <a:r>
+              <a:rPr sz="1350" b="1" i="0">
+                <a:solidFill>
+                  <a:srgbClr val="2F5D8C"/>
+                </a:solidFill>
+                <a:latin typeface="Arial"/>
+              </a:rPr>
+              <a:t>The robustness check: </a:t>
+            </a:r>
+            <a:r>
               <a:rPr sz="1350" b="0" i="0">
                 <a:solidFill>
                   <a:srgbClr val="4A5260"/>
                 </a:solidFill>
                 <a:latin typeface="Arial"/>
               </a:rPr>
-              <a:t>One is right, one is wrong. Confident errors are invisible to it.</a:t>
+              <a:t>delete every page where all 5 readings differed — easy to flag, nearly always wrong. If the score survives, the signal is graded. Qwen </a:t>
+            </a:r>
+            <a:r>
+              <a:rPr sz="1350" b="1" i="0">
+                <a:solidFill>
+                  <a:srgbClr val="1B7A4B"/>
+                </a:solidFill>
+                <a:latin typeface="Arial"/>
+              </a:rPr>
+              <a:t>0.835 → 0.794</a:t>
+            </a:r>
+            <a:r>
+              <a:rPr sz="1350" b="0" i="0">
+                <a:solidFill>
+                  <a:srgbClr val="4A5260"/>
+                </a:solidFill>
+                <a:latin typeface="Arial"/>
+              </a:rPr>
+              <a:t>, 239 pages left.</a:t>
             </a:r>
           </a:p>
         </p:txBody>
@@ -5463,8 +5587,8 @@
         </p:nvSpPr>
         <p:spPr>
           <a:xfrm>
-            <a:off x="10527487" y="6382512"/>
-            <a:ext cx="1097280" cy="274320"/>
+            <a:off x="566928" y="6364224"/>
+            <a:ext cx="8229600" cy="292608"/>
           </a:xfrm>
           <a:prstGeom prst="rect">
             <a:avLst/>
@@ -5477,6 +5601,59 @@
           </a:bodyPr>
           <a:lstStyle/>
           <a:p>
+            <a:pPr algn="l"/>
+            <a:r>
+              <a:rPr sz="1000" b="1" i="0">
+                <a:solidFill>
+                  <a:srgbClr val="2F5D8C"/>
+                </a:solidFill>
+                <a:latin typeface="Arial"/>
+              </a:rPr>
+              <a:t>FERMAT</a:t>
+            </a:r>
+            <a:r>
+              <a:rPr sz="1000" b="0" i="0">
+                <a:solidFill>
+                  <a:srgbClr val="DDE2EA"/>
+                </a:solidFill>
+                <a:latin typeface="Arial"/>
+              </a:rPr>
+              <a:t>   ·   </a:t>
+            </a:r>
+            <a:r>
+              <a:rPr sz="1000" b="0" i="0">
+                <a:solidFill>
+                  <a:srgbClr val="79828F"/>
+                </a:solidFill>
+                <a:latin typeface="Arial"/>
+              </a:rPr>
+              <a:t>perception — Qwen2.5-VL-3B</a:t>
+            </a:r>
+          </a:p>
+        </p:txBody>
+      </p:sp>
+      <p:sp>
+        <p:nvSpPr>
+          <p:cNvPr id="24" name="TextBox 23"/>
+          <p:cNvSpPr txBox="1"/>
+          <p:nvPr/>
+        </p:nvSpPr>
+        <p:spPr>
+          <a:xfrm>
+            <a:off x="10527487" y="6382512"/>
+            <a:ext cx="1097280" cy="274320"/>
+          </a:xfrm>
+          <a:prstGeom prst="rect">
+            <a:avLst/>
+          </a:prstGeom>
+          <a:noFill/>
+        </p:spPr>
+        <p:txBody>
+          <a:bodyPr wrap="square" lIns="0" rIns="0" tIns="0" bIns="0" anchor="t">
+            <a:spAutoFit/>
+          </a:bodyPr>
+          <a:lstStyle/>
+          <a:p>
             <a:pPr algn="r"/>
             <a:r>
               <a:rPr sz="1000" b="0" i="0">
@@ -5485,7 +5662,7 @@
                 </a:solidFill>
                 <a:latin typeface="Arial"/>
               </a:rPr>
-              <a:t>3 / 6</a:t>
+              <a:t>3 / 7</a:t>
             </a:r>
           </a:p>
         </p:txBody>
@@ -5538,7 +5715,7 @@
                 </a:solidFill>
                 <a:latin typeface="Arial"/>
               </a:rPr>
-              <a:t>METHOD WARNING — THE KEY FINDING</a:t>
+              <a:t>REASONING — THE KEY FINDING</a:t>
             </a:r>
           </a:p>
         </p:txBody>
@@ -5586,7 +5763,7 @@
         </p:nvSpPr>
         <p:spPr>
           <a:xfrm>
-            <a:off x="566928" y="1627632"/>
+            <a:off x="566928" y="1691640"/>
             <a:ext cx="10515600" cy="365760"/>
           </a:xfrm>
           <a:prstGeom prst="rect">
@@ -5608,7 +5785,7 @@
                 </a:solidFill>
                 <a:latin typeface="Arial"/>
               </a:rPr>
-              <a:t>Grading task. Same 300 items, split by whether an error was really there.</a:t>
+              <a:t>Different task: the model grades the page. Same 300 pages, split by whether an error was really there.</a:t>
             </a:r>
           </a:p>
         </p:txBody>
@@ -5621,7 +5798,7 @@
         </p:nvSpPr>
         <p:spPr>
           <a:xfrm>
-            <a:off x="566928" y="2377440"/>
+            <a:off x="566928" y="2423160"/>
             <a:ext cx="3931920" cy="237744"/>
           </a:xfrm>
           <a:prstGeom prst="rect">
@@ -5656,7 +5833,7 @@
         </p:nvSpPr>
         <p:spPr>
           <a:xfrm>
-            <a:off x="4498848" y="2377440"/>
+            <a:off x="4498848" y="2423160"/>
             <a:ext cx="3291840" cy="237744"/>
           </a:xfrm>
           <a:prstGeom prst="rect">
@@ -5678,7 +5855,7 @@
                 </a:solidFill>
                 <a:latin typeface="Arial"/>
               </a:rPr>
-              <a:t>AUROC</a:t>
+              <a:t>AUROC  (95% CI)</a:t>
             </a:r>
           </a:p>
         </p:txBody>
@@ -5691,7 +5868,7 @@
         </p:nvSpPr>
         <p:spPr>
           <a:xfrm>
-            <a:off x="7790688" y="2377440"/>
+            <a:off x="7790688" y="2423160"/>
             <a:ext cx="3749039" cy="237744"/>
           </a:xfrm>
           <a:prstGeom prst="rect">
@@ -5726,7 +5903,7 @@
         </p:nvSpPr>
         <p:spPr>
           <a:xfrm>
-            <a:off x="566928" y="2651760"/>
+            <a:off x="566928" y="2697480"/>
             <a:ext cx="11057839" cy="9525"/>
           </a:xfrm>
           <a:prstGeom prst="rect">
@@ -5770,7 +5947,7 @@
         </p:nvSpPr>
         <p:spPr>
           <a:xfrm>
-            <a:off x="566928" y="2761488"/>
+            <a:off x="566928" y="2807208"/>
             <a:ext cx="3931920" cy="566928"/>
           </a:xfrm>
           <a:prstGeom prst="rect">
@@ -5805,7 +5982,7 @@
         </p:nvSpPr>
         <p:spPr>
           <a:xfrm>
-            <a:off x="4498848" y="2761488"/>
+            <a:off x="4498848" y="2807208"/>
             <a:ext cx="3291840" cy="566928"/>
           </a:xfrm>
           <a:prstGeom prst="rect">
@@ -5849,7 +6026,7 @@
         </p:nvSpPr>
         <p:spPr>
           <a:xfrm>
-            <a:off x="7790688" y="2761488"/>
+            <a:off x="7790688" y="2807208"/>
             <a:ext cx="3749039" cy="566928"/>
           </a:xfrm>
           <a:prstGeom prst="rect">
@@ -5884,7 +6061,7 @@
         </p:nvSpPr>
         <p:spPr>
           <a:xfrm>
-            <a:off x="566928" y="3255264"/>
+            <a:off x="566928" y="3300984"/>
             <a:ext cx="11057839" cy="9525"/>
           </a:xfrm>
           <a:prstGeom prst="rect">
@@ -5928,7 +6105,7 @@
         </p:nvSpPr>
         <p:spPr>
           <a:xfrm>
-            <a:off x="566928" y="3328416"/>
+            <a:off x="566928" y="3374136"/>
             <a:ext cx="3931920" cy="566928"/>
           </a:xfrm>
           <a:prstGeom prst="rect">
@@ -5950,7 +6127,7 @@
                 </a:solidFill>
                 <a:latin typeface="Arial"/>
               </a:rPr>
-              <a:t>Items with an error</a:t>
+              <a:t>Pages with an error</a:t>
             </a:r>
           </a:p>
         </p:txBody>
@@ -5963,7 +6140,7 @@
         </p:nvSpPr>
         <p:spPr>
           <a:xfrm>
-            <a:off x="4498848" y="3328416"/>
+            <a:off x="4498848" y="3374136"/>
             <a:ext cx="3291840" cy="566928"/>
           </a:xfrm>
           <a:prstGeom prst="rect">
@@ -6007,7 +6184,7 @@
         </p:nvSpPr>
         <p:spPr>
           <a:xfrm>
-            <a:off x="7790688" y="3328416"/>
+            <a:off x="7790688" y="3374136"/>
             <a:ext cx="3749039" cy="566928"/>
           </a:xfrm>
           <a:prstGeom prst="rect">
@@ -6042,7 +6219,7 @@
         </p:nvSpPr>
         <p:spPr>
           <a:xfrm>
-            <a:off x="566928" y="3822192"/>
+            <a:off x="566928" y="3867912"/>
             <a:ext cx="11057839" cy="9525"/>
           </a:xfrm>
           <a:prstGeom prst="rect">
@@ -6086,7 +6263,7 @@
         </p:nvSpPr>
         <p:spPr>
           <a:xfrm>
-            <a:off x="566928" y="3895344"/>
+            <a:off x="566928" y="3941064"/>
             <a:ext cx="3931920" cy="566928"/>
           </a:xfrm>
           <a:prstGeom prst="rect">
@@ -6108,7 +6285,7 @@
                 </a:solidFill>
                 <a:latin typeface="Arial"/>
               </a:rPr>
-              <a:t>Items that are correct</a:t>
+              <a:t>Pages that are correct</a:t>
             </a:r>
           </a:p>
         </p:txBody>
@@ -6121,7 +6298,7 @@
         </p:nvSpPr>
         <p:spPr>
           <a:xfrm>
-            <a:off x="4498848" y="3895344"/>
+            <a:off x="4498848" y="3941064"/>
             <a:ext cx="3291840" cy="566928"/>
           </a:xfrm>
           <a:prstGeom prst="rect">
@@ -6165,7 +6342,7 @@
         </p:nvSpPr>
         <p:spPr>
           <a:xfrm>
-            <a:off x="7790688" y="3895344"/>
+            <a:off x="7790688" y="3941064"/>
             <a:ext cx="3749039" cy="566928"/>
           </a:xfrm>
           <a:prstGeom prst="rect">
@@ -6200,7 +6377,7 @@
         </p:nvSpPr>
         <p:spPr>
           <a:xfrm>
-            <a:off x="566928" y="4389120"/>
+            <a:off x="566928" y="4434840"/>
             <a:ext cx="11057839" cy="9525"/>
           </a:xfrm>
           <a:prstGeom prst="rect">
@@ -6372,7 +6549,7 @@
                 </a:solidFill>
                 <a:latin typeface="Arial"/>
               </a:rPr>
-              <a:t>Both halves are real. Pooling reports neither. Only visible because FERMAT has correct items.</a:t>
+              <a:t>Both halves are real. Pooling reports neither. Only visible because FERMAT has correct pages to separate out.</a:t>
             </a:r>
           </a:p>
         </p:txBody>
@@ -6385,8 +6562,8 @@
         </p:nvSpPr>
         <p:spPr>
           <a:xfrm>
-            <a:off x="10527487" y="6382512"/>
-            <a:ext cx="1097280" cy="274320"/>
+            <a:off x="566928" y="6364224"/>
+            <a:ext cx="8229600" cy="292608"/>
           </a:xfrm>
           <a:prstGeom prst="rect">
             <a:avLst/>
@@ -6399,6 +6576,59 @@
           </a:bodyPr>
           <a:lstStyle/>
           <a:p>
+            <a:pPr algn="l"/>
+            <a:r>
+              <a:rPr sz="1000" b="1" i="0">
+                <a:solidFill>
+                  <a:srgbClr val="2F5D8C"/>
+                </a:solidFill>
+                <a:latin typeface="Arial"/>
+              </a:rPr>
+              <a:t>FERMAT</a:t>
+            </a:r>
+            <a:r>
+              <a:rPr sz="1000" b="0" i="0">
+                <a:solidFill>
+                  <a:srgbClr val="DDE2EA"/>
+                </a:solidFill>
+                <a:latin typeface="Arial"/>
+              </a:rPr>
+              <a:t>   ·   </a:t>
+            </a:r>
+            <a:r>
+              <a:rPr sz="1000" b="0" i="0">
+                <a:solidFill>
+                  <a:srgbClr val="79828F"/>
+                </a:solidFill>
+                <a:latin typeface="Arial"/>
+              </a:rPr>
+              <a:t>reasoning — grading the page  ·  Qwen2.5-VL-7B</a:t>
+            </a:r>
+          </a:p>
+        </p:txBody>
+      </p:sp>
+      <p:sp>
+        <p:nvSpPr>
+          <p:cNvPr id="25" name="TextBox 24"/>
+          <p:cNvSpPr txBox="1"/>
+          <p:nvPr/>
+        </p:nvSpPr>
+        <p:spPr>
+          <a:xfrm>
+            <a:off x="10527487" y="6382512"/>
+            <a:ext cx="1097280" cy="274320"/>
+          </a:xfrm>
+          <a:prstGeom prst="rect">
+            <a:avLst/>
+          </a:prstGeom>
+          <a:noFill/>
+        </p:spPr>
+        <p:txBody>
+          <a:bodyPr wrap="square" lIns="0" rIns="0" tIns="0" bIns="0" anchor="t">
+            <a:spAutoFit/>
+          </a:bodyPr>
+          <a:lstStyle/>
+          <a:p>
             <a:pPr algn="r"/>
             <a:r>
               <a:rPr sz="1000" b="0" i="0">
@@ -6407,7 +6637,7 @@
                 </a:solidFill>
                 <a:latin typeface="Arial"/>
               </a:rPr>
-              <a:t>4 / 6</a:t>
+              <a:t>4 / 7</a:t>
             </a:r>
           </a:p>
         </p:txBody>
@@ -6460,7 +6690,7 @@
                 </a:solidFill>
                 <a:latin typeface="Arial"/>
               </a:rPr>
-              <a:t>REPLICATION</a:t>
+              <a:t>REASONING — REPLICATION</a:t>
             </a:r>
           </a:p>
         </p:txBody>
@@ -6508,8 +6738,8 @@
         </p:nvSpPr>
         <p:spPr>
           <a:xfrm>
-            <a:off x="566928" y="1965960"/>
-            <a:ext cx="2651760" cy="237744"/>
+            <a:off x="566928" y="1737360"/>
+            <a:ext cx="10058400" cy="365760"/>
           </a:xfrm>
           <a:prstGeom prst="rect">
             <a:avLst/>
@@ -6524,13 +6754,13 @@
           <a:p>
             <a:pPr algn="l"/>
             <a:r>
-              <a:rPr sz="950" b="1" i="0">
-                <a:solidFill>
-                  <a:srgbClr val="79828F"/>
-                </a:solidFill>
-                <a:latin typeface="Arial"/>
-              </a:rPr>
-              <a:t>MODEL</a:t>
+              <a:rPr sz="1500" b="0" i="0">
+                <a:solidFill>
+                  <a:srgbClr val="4A5260"/>
+                </a:solidFill>
+                <a:latin typeface="Arial"/>
+              </a:rPr>
+              <a:t>The 0.80 result above, on pages that contain an error.</a:t>
             </a:r>
           </a:p>
         </p:txBody>
@@ -6543,8 +6773,8 @@
         </p:nvSpPr>
         <p:spPr>
           <a:xfrm>
-            <a:off x="3218688" y="1965960"/>
-            <a:ext cx="2926080" cy="237744"/>
+            <a:off x="566928" y="2468880"/>
+            <a:ext cx="3291840" cy="237744"/>
           </a:xfrm>
           <a:prstGeom prst="rect">
             <a:avLst/>
@@ -6565,6 +6795,41 @@
                 </a:solidFill>
                 <a:latin typeface="Arial"/>
               </a:rPr>
+              <a:t>MODEL</a:t>
+            </a:r>
+          </a:p>
+        </p:txBody>
+      </p:sp>
+      <p:sp>
+        <p:nvSpPr>
+          <p:cNvPr id="6" name="TextBox 5"/>
+          <p:cNvSpPr txBox="1"/>
+          <p:nvPr/>
+        </p:nvSpPr>
+        <p:spPr>
+          <a:xfrm>
+            <a:off x="3858768" y="2468880"/>
+            <a:ext cx="3474720" cy="237744"/>
+          </a:xfrm>
+          <a:prstGeom prst="rect">
+            <a:avLst/>
+          </a:prstGeom>
+          <a:noFill/>
+        </p:spPr>
+        <p:txBody>
+          <a:bodyPr wrap="square" lIns="0" rIns="0" tIns="0" bIns="0" anchor="t">
+            <a:spAutoFit/>
+          </a:bodyPr>
+          <a:lstStyle/>
+          <a:p>
+            <a:pPr algn="l"/>
+            <a:r>
+              <a:rPr sz="950" b="1" i="0">
+                <a:solidFill>
+                  <a:srgbClr val="79828F"/>
+                </a:solidFill>
+                <a:latin typeface="Arial"/>
+              </a:rPr>
               <a:t>AUROC  (95% CI)</a:t>
             </a:r>
           </a:p>
@@ -6572,13 +6837,13 @@
       </p:sp>
       <p:sp>
         <p:nvSpPr>
-          <p:cNvPr id="6" name="Rectangle 5"/>
+          <p:cNvPr id="7" name="Rectangle 6"/>
           <p:cNvSpPr/>
           <p:nvPr/>
         </p:nvSpPr>
         <p:spPr>
           <a:xfrm>
-            <a:off x="566928" y="2240280"/>
+            <a:off x="566928" y="2743200"/>
             <a:ext cx="11057839" cy="9525"/>
           </a:xfrm>
           <a:prstGeom prst="rect">
@@ -6616,14 +6881,14 @@
       </p:sp>
       <p:sp>
         <p:nvSpPr>
-          <p:cNvPr id="7" name="TextBox 6"/>
+          <p:cNvPr id="8" name="TextBox 7"/>
           <p:cNvSpPr txBox="1"/>
           <p:nvPr/>
         </p:nvSpPr>
         <p:spPr>
           <a:xfrm>
-            <a:off x="566928" y="2350008"/>
-            <a:ext cx="2651760" cy="493776"/>
+            <a:off x="566928" y="2852928"/>
+            <a:ext cx="3291840" cy="530352"/>
           </a:xfrm>
           <a:prstGeom prst="rect">
             <a:avLst/>
@@ -6651,14 +6916,14 @@
       </p:sp>
       <p:sp>
         <p:nvSpPr>
-          <p:cNvPr id="8" name="TextBox 7"/>
+          <p:cNvPr id="9" name="TextBox 8"/>
           <p:cNvSpPr txBox="1"/>
           <p:nvPr/>
         </p:nvSpPr>
         <p:spPr>
           <a:xfrm>
-            <a:off x="3218688" y="2350008"/>
-            <a:ext cx="2926080" cy="493776"/>
+            <a:off x="3858768" y="2852928"/>
+            <a:ext cx="3474720" cy="530352"/>
           </a:xfrm>
           <a:prstGeom prst="rect">
             <a:avLst/>
@@ -6695,13 +6960,13 @@
       </p:sp>
       <p:sp>
         <p:nvSpPr>
-          <p:cNvPr id="9" name="Rectangle 8"/>
+          <p:cNvPr id="10" name="Rectangle 9"/>
           <p:cNvSpPr/>
           <p:nvPr/>
         </p:nvSpPr>
         <p:spPr>
           <a:xfrm>
-            <a:off x="566928" y="2770632"/>
+            <a:off x="566928" y="3310128"/>
             <a:ext cx="11057839" cy="9525"/>
           </a:xfrm>
           <a:prstGeom prst="rect">
@@ -6739,14 +7004,14 @@
       </p:sp>
       <p:sp>
         <p:nvSpPr>
-          <p:cNvPr id="10" name="TextBox 9"/>
+          <p:cNvPr id="11" name="TextBox 10"/>
           <p:cNvSpPr txBox="1"/>
           <p:nvPr/>
         </p:nvSpPr>
         <p:spPr>
           <a:xfrm>
-            <a:off x="566928" y="2843784"/>
-            <a:ext cx="2651760" cy="493776"/>
+            <a:off x="566928" y="3383280"/>
+            <a:ext cx="3291840" cy="530352"/>
           </a:xfrm>
           <a:prstGeom prst="rect">
             <a:avLst/>
@@ -6774,14 +7039,14 @@
       </p:sp>
       <p:sp>
         <p:nvSpPr>
-          <p:cNvPr id="11" name="TextBox 10"/>
+          <p:cNvPr id="12" name="TextBox 11"/>
           <p:cNvSpPr txBox="1"/>
           <p:nvPr/>
         </p:nvSpPr>
         <p:spPr>
           <a:xfrm>
-            <a:off x="3218688" y="2843784"/>
-            <a:ext cx="2926080" cy="493776"/>
+            <a:off x="3858768" y="3383280"/>
+            <a:ext cx="3474720" cy="530352"/>
           </a:xfrm>
           <a:prstGeom prst="rect">
             <a:avLst/>
@@ -6818,13 +7083,13 @@
       </p:sp>
       <p:sp>
         <p:nvSpPr>
-          <p:cNvPr id="12" name="Rectangle 11"/>
+          <p:cNvPr id="13" name="Rectangle 12"/>
           <p:cNvSpPr/>
           <p:nvPr/>
         </p:nvSpPr>
         <p:spPr>
           <a:xfrm>
-            <a:off x="566928" y="3264408"/>
+            <a:off x="566928" y="3840480"/>
             <a:ext cx="11057839" cy="9525"/>
           </a:xfrm>
           <a:prstGeom prst="rect">
@@ -6862,14 +7127,14 @@
       </p:sp>
       <p:sp>
         <p:nvSpPr>
-          <p:cNvPr id="13" name="TextBox 12"/>
+          <p:cNvPr id="14" name="TextBox 13"/>
           <p:cNvSpPr txBox="1"/>
           <p:nvPr/>
         </p:nvSpPr>
         <p:spPr>
           <a:xfrm>
-            <a:off x="566928" y="3337560"/>
-            <a:ext cx="2651760" cy="493776"/>
+            <a:off x="566928" y="3913632"/>
+            <a:ext cx="3291840" cy="530352"/>
           </a:xfrm>
           <a:prstGeom prst="rect">
             <a:avLst/>
@@ -6897,14 +7162,14 @@
       </p:sp>
       <p:sp>
         <p:nvSpPr>
-          <p:cNvPr id="14" name="TextBox 13"/>
+          <p:cNvPr id="15" name="TextBox 14"/>
           <p:cNvSpPr txBox="1"/>
           <p:nvPr/>
         </p:nvSpPr>
         <p:spPr>
           <a:xfrm>
-            <a:off x="3218688" y="3337560"/>
-            <a:ext cx="2926080" cy="493776"/>
+            <a:off x="3858768" y="3913632"/>
+            <a:ext cx="3474720" cy="530352"/>
           </a:xfrm>
           <a:prstGeom prst="rect">
             <a:avLst/>
@@ -6941,13 +7206,13 @@
       </p:sp>
       <p:sp>
         <p:nvSpPr>
-          <p:cNvPr id="15" name="Rectangle 14"/>
+          <p:cNvPr id="16" name="Rectangle 15"/>
           <p:cNvSpPr/>
           <p:nvPr/>
         </p:nvSpPr>
         <p:spPr>
           <a:xfrm>
-            <a:off x="566928" y="3758184"/>
+            <a:off x="566928" y="4370832"/>
             <a:ext cx="11057839" cy="9525"/>
           </a:xfrm>
           <a:prstGeom prst="rect">
@@ -6985,49 +7250,14 @@
       </p:sp>
       <p:sp>
         <p:nvSpPr>
-          <p:cNvPr id="16" name="TextBox 15"/>
-          <p:cNvSpPr txBox="1"/>
-          <p:nvPr/>
-        </p:nvSpPr>
-        <p:spPr>
-          <a:xfrm>
-            <a:off x="566928" y="3657600"/>
-            <a:ext cx="5577840" cy="365760"/>
-          </a:xfrm>
-          <a:prstGeom prst="rect">
-            <a:avLst/>
-          </a:prstGeom>
-          <a:noFill/>
-        </p:spPr>
-        <p:txBody>
-          <a:bodyPr wrap="square" lIns="0" rIns="0" tIns="0" bIns="0" anchor="t">
-            <a:spAutoFit/>
-          </a:bodyPr>
-          <a:lstStyle/>
-          <a:p>
-            <a:pPr algn="l"/>
-            <a:r>
-              <a:rPr sz="1350" b="0" i="0">
-                <a:solidFill>
-                  <a:srgbClr val="4A5260"/>
-                </a:solidFill>
-                <a:latin typeface="Arial"/>
-              </a:rPr>
-              <a:t>Intervals overlap. Not a Qwen quirk.</a:t>
-            </a:r>
-          </a:p>
-        </p:txBody>
-      </p:sp>
-      <p:sp>
-        <p:nvSpPr>
           <p:cNvPr id="17" name="Rectangle 16"/>
           <p:cNvSpPr/>
           <p:nvPr/>
         </p:nvSpPr>
         <p:spPr>
           <a:xfrm>
-            <a:off x="566928" y="4206240"/>
-            <a:ext cx="11057839" cy="1965960"/>
+            <a:off x="566928" y="4572000"/>
+            <a:ext cx="11057839" cy="1234440"/>
           </a:xfrm>
           <a:prstGeom prst="rect">
             <a:avLst/>
@@ -7072,14 +7302,14 @@
         </p:nvSpPr>
         <p:spPr>
           <a:xfrm>
-            <a:off x="566928" y="4206240"/>
+            <a:off x="566928" y="4572000"/>
             <a:ext cx="11057839" cy="41148"/>
           </a:xfrm>
           <a:prstGeom prst="rect">
             <a:avLst/>
           </a:prstGeom>
           <a:solidFill>
-            <a:srgbClr val="2F5D8C"/>
+            <a:srgbClr val="1B7A4B"/>
           </a:solidFill>
           <a:ln>
             <a:noFill/>
@@ -7116,8 +7346,8 @@
         </p:nvSpPr>
         <p:spPr>
           <a:xfrm>
-            <a:off x="859536" y="4425696"/>
-            <a:ext cx="10835640" cy="1691640"/>
+            <a:off x="886968" y="4846320"/>
+            <a:ext cx="10789920" cy="822960"/>
           </a:xfrm>
           <a:prstGeom prst="rect">
             <a:avLst/>
@@ -7132,13 +7362,13 @@
           <a:p>
             <a:pPr algn="l"/>
             <a:r>
-              <a:rPr sz="1050" b="1" i="0">
-                <a:solidFill>
-                  <a:srgbClr val="2F5D8C"/>
-                </a:solidFill>
-                <a:latin typeface="Arial"/>
-              </a:rPr>
-              <a:t>THE ROBUSTNESS CHECK</a:t>
+              <a:rPr sz="2000" b="1" i="0">
+                <a:solidFill>
+                  <a:srgbClr val="171A21"/>
+                </a:solidFill>
+                <a:latin typeface="Georgia"/>
+              </a:rPr>
+              <a:t>Three independently built models. Intervals overlap.</a:t>
             </a:r>
           </a:p>
           <a:p>
@@ -7148,65 +7378,13 @@
               </a:spcBef>
             </a:pPr>
             <a:r>
-              <a:rPr sz="1500" b="1" i="0">
-                <a:solidFill>
-                  <a:srgbClr val="171A21"/>
-                </a:solidFill>
-                <a:latin typeface="Arial"/>
-              </a:rPr>
-              <a:t>Delete every item where all 5 readings differed.</a:t>
-            </a:r>
-            <a:r>
-              <a:rPr sz="1500" b="0" i="0">
+              <a:rPr sz="1350" b="0" i="0">
                 <a:solidFill>
                   <a:srgbClr val="4A5260"/>
                 </a:solidFill>
                 <a:latin typeface="Arial"/>
               </a:rPr>
-              <a:t>  Those are easy to flag and nearly always wrong. If the score survives, the signal is graded. If it collapses, the score was only detecting total breakdown.</a:t>
-            </a:r>
-          </a:p>
-          <a:p>
-            <a:pPr>
-              <a:spcBef>
-                <a:spcPts val="1200"/>
-              </a:spcBef>
-            </a:pPr>
-            <a:r>
-              <a:rPr sz="1500" b="1" i="0">
-                <a:solidFill>
-                  <a:srgbClr val="1B7A4B"/>
-                </a:solidFill>
-                <a:latin typeface="Arial"/>
-              </a:rPr>
-              <a:t>Qwen  0.835 → 0.794</a:t>
-            </a:r>
-            <a:r>
-              <a:rPr sz="1300" b="0" i="0">
-                <a:solidFill>
-                  <a:srgbClr val="4A5260"/>
-                </a:solidFill>
-                <a:latin typeface="Arial"/>
-              </a:rPr>
-              <a:t>   239 items left, barely moves          </a:t>
-            </a:r>
-            <a:r>
-              <a:rPr sz="1500" b="1" i="0">
-                <a:solidFill>
-                  <a:srgbClr val="B23A34"/>
-                </a:solidFill>
-                <a:latin typeface="Arial"/>
-              </a:rPr>
-              <a:t>InternVL3  0.915 → 0.556</a:t>
-            </a:r>
-            <a:r>
-              <a:rPr sz="1300" b="0" i="0">
-                <a:solidFill>
-                  <a:srgbClr val="4A5260"/>
-                </a:solidFill>
-                <a:latin typeface="Arial"/>
-              </a:rPr>
-              <a:t>   only 98 left, collapses to chance</a:t>
+              <a:t>Not a quirk of one model.</a:t>
             </a:r>
           </a:p>
         </p:txBody>
@@ -7219,8 +7397,8 @@
         </p:nvSpPr>
         <p:spPr>
           <a:xfrm>
-            <a:off x="10527487" y="6382512"/>
-            <a:ext cx="1097280" cy="274320"/>
+            <a:off x="566928" y="6364224"/>
+            <a:ext cx="8229600" cy="292608"/>
           </a:xfrm>
           <a:prstGeom prst="rect">
             <a:avLst/>
@@ -7233,6 +7411,59 @@
           </a:bodyPr>
           <a:lstStyle/>
           <a:p>
+            <a:pPr algn="l"/>
+            <a:r>
+              <a:rPr sz="1000" b="1" i="0">
+                <a:solidFill>
+                  <a:srgbClr val="2F5D8C"/>
+                </a:solidFill>
+                <a:latin typeface="Arial"/>
+              </a:rPr>
+              <a:t>FERMAT</a:t>
+            </a:r>
+            <a:r>
+              <a:rPr sz="1000" b="0" i="0">
+                <a:solidFill>
+                  <a:srgbClr val="DDE2EA"/>
+                </a:solidFill>
+                <a:latin typeface="Arial"/>
+              </a:rPr>
+              <a:t>   ·   </a:t>
+            </a:r>
+            <a:r>
+              <a:rPr sz="1000" b="0" i="0">
+                <a:solidFill>
+                  <a:srgbClr val="79828F"/>
+                </a:solidFill>
+                <a:latin typeface="Arial"/>
+              </a:rPr>
+              <a:t>reasoning — grading the page</a:t>
+            </a:r>
+          </a:p>
+        </p:txBody>
+      </p:sp>
+      <p:sp>
+        <p:nvSpPr>
+          <p:cNvPr id="21" name="TextBox 20"/>
+          <p:cNvSpPr txBox="1"/>
+          <p:nvPr/>
+        </p:nvSpPr>
+        <p:spPr>
+          <a:xfrm>
+            <a:off x="10527487" y="6382512"/>
+            <a:ext cx="1097280" cy="274320"/>
+          </a:xfrm>
+          <a:prstGeom prst="rect">
+            <a:avLst/>
+          </a:prstGeom>
+          <a:noFill/>
+        </p:spPr>
+        <p:txBody>
+          <a:bodyPr wrap="square" lIns="0" rIns="0" tIns="0" bIns="0" anchor="t">
+            <a:spAutoFit/>
+          </a:bodyPr>
+          <a:lstStyle/>
+          <a:p>
             <a:pPr algn="r"/>
             <a:r>
               <a:rPr sz="1000" b="0" i="0">
@@ -7241,7 +7472,7 @@
                 </a:solidFill>
                 <a:latin typeface="Arial"/>
               </a:rPr>
-              <a:t>5 / 6</a:t>
+              <a:t>5 / 7</a:t>
             </a:r>
           </a:p>
         </p:txBody>
@@ -7290,11 +7521,11 @@
             <a:r>
               <a:rPr sz="1100" b="1" i="0">
                 <a:solidFill>
-                  <a:srgbClr val="2F5D8C"/>
-                </a:solidFill>
-                <a:latin typeface="Arial"/>
-              </a:rPr>
-              <a:t>OPEN DECISION</a:t>
+                  <a:srgbClr val="B23A34"/>
+                </a:solidFill>
+                <a:latin typeface="Arial"/>
+              </a:rPr>
+              <a:t>WHAT DID NOT WORK</a:t>
             </a:r>
           </a:p>
         </p:txBody>
@@ -7329,7 +7560,7 @@
                 </a:solidFill>
                 <a:latin typeface="Georgia"/>
               </a:rPr>
-              <a:t>One question</a:t>
+              <a:t>Two results we had to throw out</a:t>
             </a:r>
           </a:p>
         </p:txBody>
@@ -7342,8 +7573,8 @@
         </p:nvSpPr>
         <p:spPr>
           <a:xfrm>
-            <a:off x="566928" y="1828800"/>
-            <a:ext cx="5440680" cy="2514600"/>
+            <a:off x="566928" y="1874519"/>
+            <a:ext cx="5440680" cy="3200400"/>
           </a:xfrm>
           <a:prstGeom prst="rect">
             <a:avLst/>
@@ -7388,14 +7619,14 @@
         </p:nvSpPr>
         <p:spPr>
           <a:xfrm>
-            <a:off x="566928" y="1828800"/>
+            <a:off x="566928" y="1874519"/>
             <a:ext cx="5440680" cy="41148"/>
           </a:xfrm>
           <a:prstGeom prst="rect">
             <a:avLst/>
           </a:prstGeom>
           <a:solidFill>
-            <a:srgbClr val="1B7A4B"/>
+            <a:srgbClr val="B23A34"/>
           </a:solidFill>
           <a:ln>
             <a:noFill/>
@@ -7433,7 +7664,7 @@
         <p:spPr>
           <a:xfrm>
             <a:off x="859536" y="2103120"/>
-            <a:ext cx="4846320" cy="2103120"/>
+            <a:ext cx="4846320" cy="2834640"/>
           </a:xfrm>
           <a:prstGeom prst="rect">
             <a:avLst/>
@@ -7448,13 +7679,13 @@
           <a:p>
             <a:pPr algn="l"/>
             <a:r>
-              <a:rPr sz="1100" b="1" i="0">
-                <a:solidFill>
-                  <a:srgbClr val="1B7A4B"/>
-                </a:solidFill>
-                <a:latin typeface="Arial"/>
-              </a:rPr>
-              <a:t>SOLID</a:t>
+              <a:rPr sz="1000" b="1" i="0">
+                <a:solidFill>
+                  <a:srgbClr val="79828F"/>
+                </a:solidFill>
+                <a:latin typeface="Arial"/>
+              </a:rPr>
+              <a:t>A 4TH MODEL, PERCEPTION</a:t>
             </a:r>
           </a:p>
           <a:p>
@@ -7464,61 +7695,65 @@
               </a:spcBef>
             </a:pPr>
             <a:r>
-              <a:rPr sz="1350" b="0" i="0">
+              <a:rPr sz="2700" b="1" i="0">
+                <a:solidFill>
+                  <a:srgbClr val="B23A34"/>
+                </a:solidFill>
+                <a:latin typeface="Georgia"/>
+              </a:rPr>
+              <a:t>0.915</a:t>
+            </a:r>
+            <a:r>
+              <a:rPr sz="1800" b="0" i="0">
+                <a:solidFill>
+                  <a:srgbClr val="79828F"/>
+                </a:solidFill>
+                <a:latin typeface="Arial"/>
+              </a:rPr>
+              <a:t>  →  </a:t>
+            </a:r>
+            <a:r>
+              <a:rPr sz="2700" b="1" i="0">
                 <a:solidFill>
                   <a:srgbClr val="171A21"/>
                 </a:solidFill>
-                <a:latin typeface="Arial"/>
-              </a:rPr>
-              <a:t>— Perception signal 0.835, robust</a:t>
+                <a:latin typeface="Georgia"/>
+              </a:rPr>
+              <a:t>0.556</a:t>
             </a:r>
           </a:p>
           <a:p>
             <a:pPr>
               <a:spcBef>
-                <a:spcPts val="900"/>
+                <a:spcPts val="1100"/>
               </a:spcBef>
             </a:pPr>
             <a:r>
               <a:rPr sz="1350" b="0" i="0">
                 <a:solidFill>
+                  <a:srgbClr val="4A5260"/>
+                </a:solidFill>
+                <a:latin typeface="Arial"/>
+              </a:rPr>
+              <a:t>InternVL3 looked like our best result. Under the robustness check it collapsed to chance — </a:t>
+            </a:r>
+            <a:r>
+              <a:rPr sz="1350" b="1" i="0">
+                <a:solidFill>
                   <a:srgbClr val="171A21"/>
                 </a:solidFill>
                 <a:latin typeface="Arial"/>
               </a:rPr>
-              <a:t>— Abstention rule 57/61</a:t>
-            </a:r>
-          </a:p>
-          <a:p>
-            <a:pPr>
-              <a:spcBef>
-                <a:spcPts val="900"/>
-              </a:spcBef>
-            </a:pPr>
+              <a:t>2 of every 3 pages were total breakdowns</a:t>
+            </a:r>
             <a:r>
               <a:rPr sz="1350" b="0" i="0">
                 <a:solidFill>
-                  <a:srgbClr val="171A21"/>
-                </a:solidFill>
-                <a:latin typeface="Arial"/>
-              </a:rPr>
-              <a:t>— Confirmed on 3 model families</a:t>
-            </a:r>
-          </a:p>
-          <a:p>
-            <a:pPr>
-              <a:spcBef>
-                <a:spcPts val="900"/>
-              </a:spcBef>
-            </a:pPr>
-            <a:r>
-              <a:rPr sz="1350" b="0" i="0">
-                <a:solidFill>
-                  <a:srgbClr val="171A21"/>
-                </a:solidFill>
-                <a:latin typeface="Arial"/>
-              </a:rPr>
-              <a:t>— Pooled-vs-split: a method contribution</a:t>
+                  <a:srgbClr val="4A5260"/>
+                </a:solidFill>
+                <a:latin typeface="Arial"/>
+              </a:rPr>
+              <a:t>, and that binary was all the score was detecting.</a:t>
             </a:r>
           </a:p>
         </p:txBody>
@@ -7531,8 +7766,8 @@
         </p:nvSpPr>
         <p:spPr>
           <a:xfrm>
-            <a:off x="6355080" y="1828800"/>
-            <a:ext cx="5257800" cy="2514600"/>
+            <a:off x="6355080" y="1874519"/>
+            <a:ext cx="5257800" cy="3200400"/>
           </a:xfrm>
           <a:prstGeom prst="rect">
             <a:avLst/>
@@ -7577,7 +7812,7 @@
         </p:nvSpPr>
         <p:spPr>
           <a:xfrm>
-            <a:off x="6355080" y="1828800"/>
+            <a:off x="6355080" y="1874519"/>
             <a:ext cx="5257800" cy="41148"/>
           </a:xfrm>
           <a:prstGeom prst="rect">
@@ -7622,7 +7857,7 @@
         <p:spPr>
           <a:xfrm>
             <a:off x="6647688" y="2103120"/>
-            <a:ext cx="4663440" cy="2103120"/>
+            <a:ext cx="4709160" cy="2834640"/>
           </a:xfrm>
           <a:prstGeom prst="rect">
             <a:avLst/>
@@ -7637,13 +7872,13 @@
           <a:p>
             <a:pPr algn="l"/>
             <a:r>
-              <a:rPr sz="1100" b="1" i="0">
-                <a:solidFill>
-                  <a:srgbClr val="9A6A12"/>
-                </a:solidFill>
-                <a:latin typeface="Arial"/>
-              </a:rPr>
-              <a:t>LIMITED</a:t>
+              <a:rPr sz="1000" b="1" i="0">
+                <a:solidFill>
+                  <a:srgbClr val="79828F"/>
+                </a:solidFill>
+                <a:latin typeface="Arial"/>
+              </a:rPr>
+              <a:t>A 2ND DATASET, REASONING</a:t>
             </a:r>
           </a:p>
           <a:p>
@@ -7653,62 +7888,54 @@
               </a:spcBef>
             </a:pPr>
             <a:r>
-              <a:rPr sz="1350" b="0" i="0">
-                <a:solidFill>
-                  <a:srgbClr val="171A21"/>
-                </a:solidFill>
-                <a:latin typeface="Arial"/>
-              </a:rPr>
-              <a:t>— Everything sits on one dataset</a:t>
+              <a:rPr sz="2700" b="1" i="0">
+                <a:solidFill>
+                  <a:srgbClr val="9A6A12"/>
+                </a:solidFill>
+                <a:latin typeface="Georgia"/>
+              </a:rPr>
+              <a:t>96%</a:t>
+            </a:r>
+            <a:r>
+              <a:rPr sz="1400" b="0" i="0">
+                <a:solidFill>
+                  <a:srgbClr val="4A5260"/>
+                </a:solidFill>
+                <a:latin typeface="Arial"/>
+              </a:rPr>
+              <a:t>  accuracy, and meaningless</a:t>
             </a:r>
           </a:p>
           <a:p>
             <a:pPr>
               <a:spcBef>
-                <a:spcPts val="900"/>
+                <a:spcPts val="1100"/>
               </a:spcBef>
             </a:pPr>
             <a:r>
               <a:rPr sz="1350" b="0" i="0">
                 <a:solidFill>
-                  <a:srgbClr val="171A21"/>
-                </a:solidFill>
-                <a:latin typeface="Arial"/>
-              </a:rPr>
-              <a:t>— Both alternatives are 100% error items</a:t>
+                  <a:srgbClr val="4A5260"/>
+                </a:solidFill>
+                <a:latin typeface="Arial"/>
+              </a:rPr>
+              <a:t>ScratchMath, 100 pages. Every page contains an error, and the model answers “error” 90% of the time — so it scores well by construction.</a:t>
             </a:r>
           </a:p>
           <a:p>
             <a:pPr>
               <a:spcBef>
-                <a:spcPts val="900"/>
+                <a:spcPts val="800"/>
               </a:spcBef>
             </a:pPr>
             <a:r>
-              <a:rPr sz="1350" b="0" i="0">
+              <a:rPr sz="1350" b="1" i="0">
                 <a:solidFill>
                   <a:srgbClr val="171A21"/>
                 </a:solidFill>
                 <a:latin typeface="Arial"/>
               </a:rPr>
-              <a:t>— …so they cannot test the split at all</a:t>
-            </a:r>
-          </a:p>
-          <a:p>
-            <a:pPr>
-              <a:spcBef>
-                <a:spcPts val="900"/>
-              </a:spcBef>
-            </a:pPr>
-            <a:r>
-              <a:rPr sz="1350" b="0" i="0">
-                <a:solidFill>
-                  <a:srgbClr val="171A21"/>
-                </a:solidFill>
-                <a:latin typeface="Arial"/>
-              </a:rPr>
-              <a:t>— On one, the model said “error” while
-    saying it could not read the image</a:t>
+              <a:t>In 24% of readings it said it could not read the image. It answered “error” anyway in 82% of those.</a:t>
             </a:r>
           </a:p>
         </p:txBody>
@@ -7721,8 +7948,8 @@
         </p:nvSpPr>
         <p:spPr>
           <a:xfrm>
-            <a:off x="566928" y="4617720"/>
-            <a:ext cx="11057839" cy="1371600"/>
+            <a:off x="566928" y="5285232"/>
+            <a:ext cx="11057839" cy="868680"/>
           </a:xfrm>
           <a:prstGeom prst="rect">
             <a:avLst/>
@@ -7767,7 +7994,7 @@
         </p:nvSpPr>
         <p:spPr>
           <a:xfrm>
-            <a:off x="566928" y="4617720"/>
+            <a:off x="566928" y="5285232"/>
             <a:ext cx="11057839" cy="41148"/>
           </a:xfrm>
           <a:prstGeom prst="rect">
@@ -7811,8 +8038,8 @@
         </p:nvSpPr>
         <p:spPr>
           <a:xfrm>
-            <a:off x="886968" y="4892040"/>
-            <a:ext cx="10789920" cy="914400"/>
+            <a:off x="886968" y="5468112"/>
+            <a:ext cx="10789920" cy="548640"/>
           </a:xfrm>
           <a:prstGeom prst="rect">
             <a:avLst/>
@@ -7827,13 +8054,660 @@
           <a:p>
             <a:pPr algn="l"/>
             <a:r>
+              <a:rPr sz="1450" b="1" i="0">
+                <a:solidFill>
+                  <a:srgbClr val="171A21"/>
+                </a:solidFill>
+                <a:latin typeface="Georgia"/>
+              </a:rPr>
+              <a:t>Both were caught by checks we run on every number — which is why the results on the earlier slides can be trusted.</a:t>
+            </a:r>
+          </a:p>
+        </p:txBody>
+      </p:sp>
+      <p:sp>
+        <p:nvSpPr>
+          <p:cNvPr id="13" name="TextBox 12"/>
+          <p:cNvSpPr txBox="1"/>
+          <p:nvPr/>
+        </p:nvSpPr>
+        <p:spPr>
+          <a:xfrm>
+            <a:off x="566928" y="6364224"/>
+            <a:ext cx="8229600" cy="292608"/>
+          </a:xfrm>
+          <a:prstGeom prst="rect">
+            <a:avLst/>
+          </a:prstGeom>
+          <a:noFill/>
+        </p:spPr>
+        <p:txBody>
+          <a:bodyPr wrap="square" lIns="0" rIns="0" tIns="0" bIns="0" anchor="t">
+            <a:spAutoFit/>
+          </a:bodyPr>
+          <a:lstStyle/>
+          <a:p>
+            <a:pPr algn="l"/>
+            <a:r>
+              <a:rPr sz="1000" b="1" i="0">
+                <a:solidFill>
+                  <a:srgbClr val="2F5D8C"/>
+                </a:solidFill>
+                <a:latin typeface="Arial"/>
+              </a:rPr>
+              <a:t>InternVL3 on FERMAT  ·  Qwen2.5-VL-7B on ScratchMath</a:t>
+            </a:r>
+          </a:p>
+        </p:txBody>
+      </p:sp>
+      <p:sp>
+        <p:nvSpPr>
+          <p:cNvPr id="14" name="TextBox 13"/>
+          <p:cNvSpPr txBox="1"/>
+          <p:nvPr/>
+        </p:nvSpPr>
+        <p:spPr>
+          <a:xfrm>
+            <a:off x="10527487" y="6382512"/>
+            <a:ext cx="1097280" cy="274320"/>
+          </a:xfrm>
+          <a:prstGeom prst="rect">
+            <a:avLst/>
+          </a:prstGeom>
+          <a:noFill/>
+        </p:spPr>
+        <p:txBody>
+          <a:bodyPr wrap="square" lIns="0" rIns="0" tIns="0" bIns="0" anchor="t">
+            <a:spAutoFit/>
+          </a:bodyPr>
+          <a:lstStyle/>
+          <a:p>
+            <a:pPr algn="r"/>
+            <a:r>
+              <a:rPr sz="1000" b="0" i="0">
+                <a:solidFill>
+                  <a:srgbClr val="79828F"/>
+                </a:solidFill>
+                <a:latin typeface="Arial"/>
+              </a:rPr>
+              <a:t>6 / 7</a:t>
+            </a:r>
+          </a:p>
+        </p:txBody>
+      </p:sp>
+    </p:spTree>
+  </p:cSld>
+  <p:clrMapOvr>
+    <a:masterClrMapping/>
+  </p:clrMapOvr>
+</p:sld>
+</file>
+
+<file path=ppt/slides/slide7.xml><?xml version="1.0" encoding="utf-8"?>
+<p:sld xmlns:a="http://schemas.openxmlformats.org/drawingml/2006/main" xmlns:p="http://schemas.openxmlformats.org/presentationml/2006/main" xmlns:r="http://schemas.openxmlformats.org/officeDocument/2006/relationships">
+  <p:cSld>
+    <p:spTree>
+      <p:nvGrpSpPr>
+        <p:cNvPr id="1" name=""/>
+        <p:cNvGrpSpPr/>
+        <p:nvPr/>
+      </p:nvGrpSpPr>
+      <p:grpSpPr/>
+      <p:sp>
+        <p:nvSpPr>
+          <p:cNvPr id="2" name="TextBox 1"/>
+          <p:cNvSpPr txBox="1"/>
+          <p:nvPr/>
+        </p:nvSpPr>
+        <p:spPr>
+          <a:xfrm>
+            <a:off x="566928" y="384048"/>
+            <a:ext cx="8229600" cy="274320"/>
+          </a:xfrm>
+          <a:prstGeom prst="rect">
+            <a:avLst/>
+          </a:prstGeom>
+          <a:noFill/>
+        </p:spPr>
+        <p:txBody>
+          <a:bodyPr wrap="square" lIns="0" rIns="0" tIns="0" bIns="0" anchor="t">
+            <a:spAutoFit/>
+          </a:bodyPr>
+          <a:lstStyle/>
+          <a:p>
+            <a:pPr algn="l"/>
+            <a:r>
+              <a:rPr sz="1100" b="1" i="0">
+                <a:solidFill>
+                  <a:srgbClr val="2F5D8C"/>
+                </a:solidFill>
+                <a:latin typeface="Arial"/>
+              </a:rPr>
+              <a:t>OPEN DECISION</a:t>
+            </a:r>
+          </a:p>
+        </p:txBody>
+      </p:sp>
+      <p:sp>
+        <p:nvSpPr>
+          <p:cNvPr id="3" name="TextBox 2"/>
+          <p:cNvSpPr txBox="1"/>
+          <p:nvPr/>
+        </p:nvSpPr>
+        <p:spPr>
+          <a:xfrm>
+            <a:off x="566928" y="713232"/>
+            <a:ext cx="10424160" cy="914400"/>
+          </a:xfrm>
+          <a:prstGeom prst="rect">
+            <a:avLst/>
+          </a:prstGeom>
+          <a:noFill/>
+        </p:spPr>
+        <p:txBody>
+          <a:bodyPr wrap="square" lIns="0" rIns="0" tIns="0" bIns="0" anchor="t">
+            <a:spAutoFit/>
+          </a:bodyPr>
+          <a:lstStyle/>
+          <a:p>
+            <a:pPr algn="l"/>
+            <a:r>
+              <a:rPr sz="3100" b="1" i="0">
+                <a:solidFill>
+                  <a:srgbClr val="171A21"/>
+                </a:solidFill>
+                <a:latin typeface="Georgia"/>
+              </a:rPr>
+              <a:t>One question</a:t>
+            </a:r>
+          </a:p>
+        </p:txBody>
+      </p:sp>
+      <p:sp>
+        <p:nvSpPr>
+          <p:cNvPr id="4" name="Rectangle 3"/>
+          <p:cNvSpPr/>
+          <p:nvPr/>
+        </p:nvSpPr>
+        <p:spPr>
+          <a:xfrm>
+            <a:off x="566928" y="1828800"/>
+            <a:ext cx="5440680" cy="2514600"/>
+          </a:xfrm>
+          <a:prstGeom prst="rect">
+            <a:avLst/>
+          </a:prstGeom>
+          <a:solidFill>
+            <a:srgbClr val="F5F7FA"/>
+          </a:solidFill>
+          <a:ln w="9525">
+            <a:solidFill>
+              <a:srgbClr val="DDE2EA"/>
+            </a:solidFill>
+          </a:ln>
+          <a:effectLst/>
+        </p:spPr>
+        <p:style>
+          <a:lnRef idx="1">
+            <a:schemeClr val="accent1"/>
+          </a:lnRef>
+          <a:fillRef idx="3">
+            <a:schemeClr val="accent1"/>
+          </a:fillRef>
+          <a:effectRef idx="2">
+            <a:schemeClr val="accent1"/>
+          </a:effectRef>
+          <a:fontRef idx="minor">
+            <a:schemeClr val="lt1"/>
+          </a:fontRef>
+        </p:style>
+        <p:txBody>
+          <a:bodyPr rtlCol="0" anchor="ctr"/>
+          <a:lstStyle/>
+          <a:p>
+            <a:pPr algn="ctr"/>
+          </a:p>
+        </p:txBody>
+      </p:sp>
+      <p:sp>
+        <p:nvSpPr>
+          <p:cNvPr id="5" name="Rectangle 4"/>
+          <p:cNvSpPr/>
+          <p:nvPr/>
+        </p:nvSpPr>
+        <p:spPr>
+          <a:xfrm>
+            <a:off x="566928" y="1828800"/>
+            <a:ext cx="5440680" cy="41148"/>
+          </a:xfrm>
+          <a:prstGeom prst="rect">
+            <a:avLst/>
+          </a:prstGeom>
+          <a:solidFill>
+            <a:srgbClr val="1B7A4B"/>
+          </a:solidFill>
+          <a:ln>
+            <a:noFill/>
+          </a:ln>
+          <a:effectLst/>
+        </p:spPr>
+        <p:style>
+          <a:lnRef idx="1">
+            <a:schemeClr val="accent1"/>
+          </a:lnRef>
+          <a:fillRef idx="3">
+            <a:schemeClr val="accent1"/>
+          </a:fillRef>
+          <a:effectRef idx="2">
+            <a:schemeClr val="accent1"/>
+          </a:effectRef>
+          <a:fontRef idx="minor">
+            <a:schemeClr val="lt1"/>
+          </a:fontRef>
+        </p:style>
+        <p:txBody>
+          <a:bodyPr rtlCol="0" anchor="ctr"/>
+          <a:lstStyle/>
+          <a:p>
+            <a:pPr algn="ctr"/>
+          </a:p>
+        </p:txBody>
+      </p:sp>
+      <p:sp>
+        <p:nvSpPr>
+          <p:cNvPr id="6" name="TextBox 5"/>
+          <p:cNvSpPr txBox="1"/>
+          <p:nvPr/>
+        </p:nvSpPr>
+        <p:spPr>
+          <a:xfrm>
+            <a:off x="859536" y="2103120"/>
+            <a:ext cx="4846320" cy="2103120"/>
+          </a:xfrm>
+          <a:prstGeom prst="rect">
+            <a:avLst/>
+          </a:prstGeom>
+          <a:noFill/>
+        </p:spPr>
+        <p:txBody>
+          <a:bodyPr wrap="square" lIns="0" rIns="0" tIns="0" bIns="0" anchor="t">
+            <a:spAutoFit/>
+          </a:bodyPr>
+          <a:lstStyle/>
+          <a:p>
+            <a:pPr algn="l"/>
+            <a:r>
+              <a:rPr sz="1100" b="1" i="0">
+                <a:solidFill>
+                  <a:srgbClr val="1B7A4B"/>
+                </a:solidFill>
+                <a:latin typeface="Arial"/>
+              </a:rPr>
+              <a:t>SOLID</a:t>
+            </a:r>
+          </a:p>
+          <a:p>
+            <a:pPr>
+              <a:spcBef>
+                <a:spcPts val="900"/>
+              </a:spcBef>
+            </a:pPr>
+            <a:r>
+              <a:rPr sz="1350" b="0" i="0">
+                <a:solidFill>
+                  <a:srgbClr val="171A21"/>
+                </a:solidFill>
+                <a:latin typeface="Arial"/>
+              </a:rPr>
+              <a:t>— Perception: 0.835, survives every check</a:t>
+            </a:r>
+          </a:p>
+          <a:p>
+            <a:pPr>
+              <a:spcBef>
+                <a:spcPts val="900"/>
+              </a:spcBef>
+            </a:pPr>
+            <a:r>
+              <a:rPr sz="1350" b="0" i="0">
+                <a:solidFill>
+                  <a:srgbClr val="171A21"/>
+                </a:solidFill>
+                <a:latin typeface="Arial"/>
+              </a:rPr>
+              <a:t>— Abstention rule: 57 of 61</a:t>
+            </a:r>
+          </a:p>
+          <a:p>
+            <a:pPr>
+              <a:spcBef>
+                <a:spcPts val="900"/>
+              </a:spcBef>
+            </a:pPr>
+            <a:r>
+              <a:rPr sz="1350" b="0" i="0">
+                <a:solidFill>
+                  <a:srgbClr val="171A21"/>
+                </a:solidFill>
+                <a:latin typeface="Arial"/>
+              </a:rPr>
+              <a:t>— Reasoning: confirmed on 3 model families</a:t>
+            </a:r>
+          </a:p>
+          <a:p>
+            <a:pPr>
+              <a:spcBef>
+                <a:spcPts val="900"/>
+              </a:spcBef>
+            </a:pPr>
+            <a:r>
+              <a:rPr sz="1350" b="0" i="0">
+                <a:solidFill>
+                  <a:srgbClr val="171A21"/>
+                </a:solidFill>
+                <a:latin typeface="Arial"/>
+              </a:rPr>
+              <a:t>— Pooled-vs-split: a method contribution</a:t>
+            </a:r>
+          </a:p>
+        </p:txBody>
+      </p:sp>
+      <p:sp>
+        <p:nvSpPr>
+          <p:cNvPr id="7" name="Rectangle 6"/>
+          <p:cNvSpPr/>
+          <p:nvPr/>
+        </p:nvSpPr>
+        <p:spPr>
+          <a:xfrm>
+            <a:off x="6355080" y="1828800"/>
+            <a:ext cx="5257800" cy="2514600"/>
+          </a:xfrm>
+          <a:prstGeom prst="rect">
+            <a:avLst/>
+          </a:prstGeom>
+          <a:solidFill>
+            <a:srgbClr val="F5F7FA"/>
+          </a:solidFill>
+          <a:ln w="9525">
+            <a:solidFill>
+              <a:srgbClr val="DDE2EA"/>
+            </a:solidFill>
+          </a:ln>
+          <a:effectLst/>
+        </p:spPr>
+        <p:style>
+          <a:lnRef idx="1">
+            <a:schemeClr val="accent1"/>
+          </a:lnRef>
+          <a:fillRef idx="3">
+            <a:schemeClr val="accent1"/>
+          </a:fillRef>
+          <a:effectRef idx="2">
+            <a:schemeClr val="accent1"/>
+          </a:effectRef>
+          <a:fontRef idx="minor">
+            <a:schemeClr val="lt1"/>
+          </a:fontRef>
+        </p:style>
+        <p:txBody>
+          <a:bodyPr rtlCol="0" anchor="ctr"/>
+          <a:lstStyle/>
+          <a:p>
+            <a:pPr algn="ctr"/>
+          </a:p>
+        </p:txBody>
+      </p:sp>
+      <p:sp>
+        <p:nvSpPr>
+          <p:cNvPr id="8" name="Rectangle 7"/>
+          <p:cNvSpPr/>
+          <p:nvPr/>
+        </p:nvSpPr>
+        <p:spPr>
+          <a:xfrm>
+            <a:off x="6355080" y="1828800"/>
+            <a:ext cx="5257800" cy="41148"/>
+          </a:xfrm>
+          <a:prstGeom prst="rect">
+            <a:avLst/>
+          </a:prstGeom>
+          <a:solidFill>
+            <a:srgbClr val="9A6A12"/>
+          </a:solidFill>
+          <a:ln>
+            <a:noFill/>
+          </a:ln>
+          <a:effectLst/>
+        </p:spPr>
+        <p:style>
+          <a:lnRef idx="1">
+            <a:schemeClr val="accent1"/>
+          </a:lnRef>
+          <a:fillRef idx="3">
+            <a:schemeClr val="accent1"/>
+          </a:fillRef>
+          <a:effectRef idx="2">
+            <a:schemeClr val="accent1"/>
+          </a:effectRef>
+          <a:fontRef idx="minor">
+            <a:schemeClr val="lt1"/>
+          </a:fontRef>
+        </p:style>
+        <p:txBody>
+          <a:bodyPr rtlCol="0" anchor="ctr"/>
+          <a:lstStyle/>
+          <a:p>
+            <a:pPr algn="ctr"/>
+          </a:p>
+        </p:txBody>
+      </p:sp>
+      <p:sp>
+        <p:nvSpPr>
+          <p:cNvPr id="9" name="TextBox 8"/>
+          <p:cNvSpPr txBox="1"/>
+          <p:nvPr/>
+        </p:nvSpPr>
+        <p:spPr>
+          <a:xfrm>
+            <a:off x="6647688" y="2103120"/>
+            <a:ext cx="4663440" cy="2103120"/>
+          </a:xfrm>
+          <a:prstGeom prst="rect">
+            <a:avLst/>
+          </a:prstGeom>
+          <a:noFill/>
+        </p:spPr>
+        <p:txBody>
+          <a:bodyPr wrap="square" lIns="0" rIns="0" tIns="0" bIns="0" anchor="t">
+            <a:spAutoFit/>
+          </a:bodyPr>
+          <a:lstStyle/>
+          <a:p>
+            <a:pPr algn="l"/>
+            <a:r>
+              <a:rPr sz="1100" b="1" i="0">
+                <a:solidFill>
+                  <a:srgbClr val="9A6A12"/>
+                </a:solidFill>
+                <a:latin typeface="Arial"/>
+              </a:rPr>
+              <a:t>LIMITED</a:t>
+            </a:r>
+          </a:p>
+          <a:p>
+            <a:pPr>
+              <a:spcBef>
+                <a:spcPts val="900"/>
+              </a:spcBef>
+            </a:pPr>
+            <a:r>
+              <a:rPr sz="1350" b="0" i="0">
+                <a:solidFill>
+                  <a:srgbClr val="171A21"/>
+                </a:solidFill>
+                <a:latin typeface="Arial"/>
+              </a:rPr>
+              <a:t>— Every result sits on FERMAT alone</a:t>
+            </a:r>
+          </a:p>
+          <a:p>
+            <a:pPr>
+              <a:spcBef>
+                <a:spcPts val="900"/>
+              </a:spcBef>
+            </a:pPr>
+            <a:r>
+              <a:rPr sz="1350" b="0" i="0">
+                <a:solidFill>
+                  <a:srgbClr val="171A21"/>
+                </a:solidFill>
+                <a:latin typeface="Arial"/>
+              </a:rPr>
+              <a:t>— Both alternative datasets are 100%
+    error items</a:t>
+            </a:r>
+          </a:p>
+          <a:p>
+            <a:pPr>
+              <a:spcBef>
+                <a:spcPts val="900"/>
+              </a:spcBef>
+            </a:pPr>
+            <a:r>
+              <a:rPr sz="1350" b="0" i="0">
+                <a:solidFill>
+                  <a:srgbClr val="171A21"/>
+                </a:solidFill>
+                <a:latin typeface="Arial"/>
+              </a:rPr>
+              <a:t>— …so neither can test the split on
+    slide 4 at all</a:t>
+            </a:r>
+          </a:p>
+        </p:txBody>
+      </p:sp>
+      <p:sp>
+        <p:nvSpPr>
+          <p:cNvPr id="10" name="Rectangle 9"/>
+          <p:cNvSpPr/>
+          <p:nvPr/>
+        </p:nvSpPr>
+        <p:spPr>
+          <a:xfrm>
+            <a:off x="566928" y="4617720"/>
+            <a:ext cx="11057839" cy="1371600"/>
+          </a:xfrm>
+          <a:prstGeom prst="rect">
+            <a:avLst/>
+          </a:prstGeom>
+          <a:solidFill>
+            <a:srgbClr val="F5F7FA"/>
+          </a:solidFill>
+          <a:ln w="9525">
+            <a:solidFill>
+              <a:srgbClr val="DDE2EA"/>
+            </a:solidFill>
+          </a:ln>
+          <a:effectLst/>
+        </p:spPr>
+        <p:style>
+          <a:lnRef idx="1">
+            <a:schemeClr val="accent1"/>
+          </a:lnRef>
+          <a:fillRef idx="3">
+            <a:schemeClr val="accent1"/>
+          </a:fillRef>
+          <a:effectRef idx="2">
+            <a:schemeClr val="accent1"/>
+          </a:effectRef>
+          <a:fontRef idx="minor">
+            <a:schemeClr val="lt1"/>
+          </a:fontRef>
+        </p:style>
+        <p:txBody>
+          <a:bodyPr rtlCol="0" anchor="ctr"/>
+          <a:lstStyle/>
+          <a:p>
+            <a:pPr algn="ctr"/>
+          </a:p>
+        </p:txBody>
+      </p:sp>
+      <p:sp>
+        <p:nvSpPr>
+          <p:cNvPr id="11" name="Rectangle 10"/>
+          <p:cNvSpPr/>
+          <p:nvPr/>
+        </p:nvSpPr>
+        <p:spPr>
+          <a:xfrm>
+            <a:off x="566928" y="4617720"/>
+            <a:ext cx="11057839" cy="41148"/>
+          </a:xfrm>
+          <a:prstGeom prst="rect">
+            <a:avLst/>
+          </a:prstGeom>
+          <a:solidFill>
+            <a:srgbClr val="2F5D8C"/>
+          </a:solidFill>
+          <a:ln>
+            <a:noFill/>
+          </a:ln>
+          <a:effectLst/>
+        </p:spPr>
+        <p:style>
+          <a:lnRef idx="1">
+            <a:schemeClr val="accent1"/>
+          </a:lnRef>
+          <a:fillRef idx="3">
+            <a:schemeClr val="accent1"/>
+          </a:fillRef>
+          <a:effectRef idx="2">
+            <a:schemeClr val="accent1"/>
+          </a:effectRef>
+          <a:fontRef idx="minor">
+            <a:schemeClr val="lt1"/>
+          </a:fontRef>
+        </p:style>
+        <p:txBody>
+          <a:bodyPr rtlCol="0" anchor="ctr"/>
+          <a:lstStyle/>
+          <a:p>
+            <a:pPr algn="ctr"/>
+          </a:p>
+        </p:txBody>
+      </p:sp>
+      <p:sp>
+        <p:nvSpPr>
+          <p:cNvPr id="12" name="TextBox 11"/>
+          <p:cNvSpPr txBox="1"/>
+          <p:nvPr/>
+        </p:nvSpPr>
+        <p:spPr>
+          <a:xfrm>
+            <a:off x="886968" y="4892040"/>
+            <a:ext cx="10789920" cy="914400"/>
+          </a:xfrm>
+          <a:prstGeom prst="rect">
+            <a:avLst/>
+          </a:prstGeom>
+          <a:noFill/>
+        </p:spPr>
+        <p:txBody>
+          <a:bodyPr wrap="square" lIns="0" rIns="0" tIns="0" bIns="0" anchor="t">
+            <a:spAutoFit/>
+          </a:bodyPr>
+          <a:lstStyle/>
+          <a:p>
+            <a:pPr algn="l"/>
+            <a:r>
               <a:rPr sz="2100" b="1" i="0">
                 <a:solidFill>
                   <a:srgbClr val="171A21"/>
                 </a:solidFill>
                 <a:latin typeface="Georgia"/>
               </a:rPr>
-              <a:t>Accept one dataset as a limitation — or label correct items ourselves?</a:t>
+              <a:t>Accept one dataset as a limitation — or label correct pages ourselves?</a:t>
             </a:r>
           </a:p>
           <a:p>
@@ -7862,8 +8736,8 @@
         </p:nvSpPr>
         <p:spPr>
           <a:xfrm>
-            <a:off x="10527487" y="6382512"/>
-            <a:ext cx="1097280" cy="274320"/>
+            <a:off x="566928" y="6364224"/>
+            <a:ext cx="8229600" cy="292608"/>
           </a:xfrm>
           <a:prstGeom prst="rect">
             <a:avLst/>
@@ -7876,6 +8750,59 @@
           </a:bodyPr>
           <a:lstStyle/>
           <a:p>
+            <a:pPr algn="l"/>
+            <a:r>
+              <a:rPr sz="1000" b="1" i="0">
+                <a:solidFill>
+                  <a:srgbClr val="2F5D8C"/>
+                </a:solidFill>
+                <a:latin typeface="Arial"/>
+              </a:rPr>
+              <a:t>FERMAT</a:t>
+            </a:r>
+            <a:r>
+              <a:rPr sz="1000" b="0" i="0">
+                <a:solidFill>
+                  <a:srgbClr val="DDE2EA"/>
+                </a:solidFill>
+                <a:latin typeface="Arial"/>
+              </a:rPr>
+              <a:t>   ·   </a:t>
+            </a:r>
+            <a:r>
+              <a:rPr sz="1000" b="0" i="0">
+                <a:solidFill>
+                  <a:srgbClr val="79828F"/>
+                </a:solidFill>
+                <a:latin typeface="Arial"/>
+              </a:rPr>
+              <a:t>both tasks</a:t>
+            </a:r>
+          </a:p>
+        </p:txBody>
+      </p:sp>
+      <p:sp>
+        <p:nvSpPr>
+          <p:cNvPr id="14" name="TextBox 13"/>
+          <p:cNvSpPr txBox="1"/>
+          <p:nvPr/>
+        </p:nvSpPr>
+        <p:spPr>
+          <a:xfrm>
+            <a:off x="10527487" y="6382512"/>
+            <a:ext cx="1097280" cy="274320"/>
+          </a:xfrm>
+          <a:prstGeom prst="rect">
+            <a:avLst/>
+          </a:prstGeom>
+          <a:noFill/>
+        </p:spPr>
+        <p:txBody>
+          <a:bodyPr wrap="square" lIns="0" rIns="0" tIns="0" bIns="0" anchor="t">
+            <a:spAutoFit/>
+          </a:bodyPr>
+          <a:lstStyle/>
+          <a:p>
             <a:pPr algn="r"/>
             <a:r>
               <a:rPr sz="1000" b="0" i="0">
@@ -7884,7 +8811,7 @@
                 </a:solidFill>
                 <a:latin typeface="Arial"/>
               </a:rPr>
-              <a:t>6 / 6</a:t>
+              <a:t>7 / 7</a:t>
             </a:r>
           </a:p>
         </p:txBody>

--- a/slides/fermat_findings.pptx
+++ b/slides/fermat_findings.pptx
@@ -12,6 +12,7 @@
     <p:sldId id="260" r:id="rId11"/>
     <p:sldId id="261" r:id="rId12"/>
     <p:sldId id="262" r:id="rId13"/>
+    <p:sldId id="263" r:id="rId14"/>
   </p:sldIdLst>
   <p:sldSz cx="12191695" cy="6858000" type="screen4x3"/>
   <p:notesSz cx="6858000" cy="9144000"/>
@@ -3772,7 +3773,7 @@
                 </a:solidFill>
                 <a:latin typeface="Arial"/>
               </a:rPr>
-              <a:t>1 / 7</a:t>
+              <a:t>1 / 8</a:t>
             </a:r>
           </a:p>
         </p:txBody>
@@ -4658,7 +4659,7 @@
                 </a:solidFill>
                 <a:latin typeface="Arial"/>
               </a:rPr>
-              <a:t>2 / 7</a:t>
+              <a:t>2 / 8</a:t>
             </a:r>
           </a:p>
         </p:txBody>
@@ -5662,7 +5663,7 @@
                 </a:solidFill>
                 <a:latin typeface="Arial"/>
               </a:rPr>
-              <a:t>3 / 7</a:t>
+              <a:t>3 / 8</a:t>
             </a:r>
           </a:p>
         </p:txBody>
@@ -5763,8 +5764,8 @@
         </p:nvSpPr>
         <p:spPr>
           <a:xfrm>
-            <a:off x="566928" y="1691640"/>
-            <a:ext cx="10515600" cy="365760"/>
+            <a:off x="566928" y="1645920"/>
+            <a:ext cx="10698480" cy="777240"/>
           </a:xfrm>
           <a:prstGeom prst="rect">
             <a:avLst/>
@@ -5785,7 +5786,41 @@
                 </a:solidFill>
                 <a:latin typeface="Arial"/>
               </a:rPr>
-              <a:t>Different task: the model grades the page. Same 300 pages, split by whether an error was really there.</a:t>
+              <a:t>Different task. The model is asked only: </a:t>
+            </a:r>
+            <a:r>
+              <a:rPr sz="1500" b="0" i="1">
+                <a:solidFill>
+                  <a:srgbClr val="171A21"/>
+                </a:solidFill>
+                <a:latin typeface="Arial"/>
+              </a:rPr>
+              <a:t>“analyze the Answer to determine whether there is any error.”</a:t>
+            </a:r>
+            <a:r>
+              <a:rPr sz="1500" b="0" i="0">
+                <a:solidFill>
+                  <a:srgbClr val="4A5260"/>
+                </a:solidFill>
+                <a:latin typeface="Arial"/>
+              </a:rPr>
+              <a:t>  It is never shown the correct answer.</a:t>
+            </a:r>
+          </a:p>
+          <a:p>
+            <a:pPr>
+              <a:spcBef>
+                <a:spcPts val="500"/>
+              </a:spcBef>
+            </a:pPr>
+            <a:r>
+              <a:rPr sz="1500" b="0" i="0">
+                <a:solidFill>
+                  <a:srgbClr val="4A5260"/>
+                </a:solidFill>
+                <a:latin typeface="Arial"/>
+              </a:rPr>
+              <a:t>Same 300 pages, split by whether an error was really there.</a:t>
             </a:r>
           </a:p>
         </p:txBody>
@@ -5798,7 +5833,7 @@
         </p:nvSpPr>
         <p:spPr>
           <a:xfrm>
-            <a:off x="566928" y="2423160"/>
+            <a:off x="566928" y="2606040"/>
             <a:ext cx="3931920" cy="237744"/>
           </a:xfrm>
           <a:prstGeom prst="rect">
@@ -5833,7 +5868,7 @@
         </p:nvSpPr>
         <p:spPr>
           <a:xfrm>
-            <a:off x="4498848" y="2423160"/>
+            <a:off x="4498848" y="2606040"/>
             <a:ext cx="3291840" cy="237744"/>
           </a:xfrm>
           <a:prstGeom prst="rect">
@@ -5868,7 +5903,7 @@
         </p:nvSpPr>
         <p:spPr>
           <a:xfrm>
-            <a:off x="7790688" y="2423160"/>
+            <a:off x="7790688" y="2606040"/>
             <a:ext cx="3749039" cy="237744"/>
           </a:xfrm>
           <a:prstGeom prst="rect">
@@ -5903,7 +5938,7 @@
         </p:nvSpPr>
         <p:spPr>
           <a:xfrm>
-            <a:off x="566928" y="2697480"/>
+            <a:off x="566928" y="2880360"/>
             <a:ext cx="11057839" cy="9525"/>
           </a:xfrm>
           <a:prstGeom prst="rect">
@@ -5947,7 +5982,7 @@
         </p:nvSpPr>
         <p:spPr>
           <a:xfrm>
-            <a:off x="566928" y="2807208"/>
+            <a:off x="566928" y="2990088"/>
             <a:ext cx="3931920" cy="566928"/>
           </a:xfrm>
           <a:prstGeom prst="rect">
@@ -5982,7 +6017,7 @@
         </p:nvSpPr>
         <p:spPr>
           <a:xfrm>
-            <a:off x="4498848" y="2807208"/>
+            <a:off x="4498848" y="2990088"/>
             <a:ext cx="3291840" cy="566928"/>
           </a:xfrm>
           <a:prstGeom prst="rect">
@@ -6026,7 +6061,7 @@
         </p:nvSpPr>
         <p:spPr>
           <a:xfrm>
-            <a:off x="7790688" y="2807208"/>
+            <a:off x="7790688" y="2990088"/>
             <a:ext cx="3749039" cy="566928"/>
           </a:xfrm>
           <a:prstGeom prst="rect">
@@ -6061,7 +6096,7 @@
         </p:nvSpPr>
         <p:spPr>
           <a:xfrm>
-            <a:off x="566928" y="3300984"/>
+            <a:off x="566928" y="3483864"/>
             <a:ext cx="11057839" cy="9525"/>
           </a:xfrm>
           <a:prstGeom prst="rect">
@@ -6105,7 +6140,7 @@
         </p:nvSpPr>
         <p:spPr>
           <a:xfrm>
-            <a:off x="566928" y="3374136"/>
+            <a:off x="566928" y="3557016"/>
             <a:ext cx="3931920" cy="566928"/>
           </a:xfrm>
           <a:prstGeom prst="rect">
@@ -6140,7 +6175,7 @@
         </p:nvSpPr>
         <p:spPr>
           <a:xfrm>
-            <a:off x="4498848" y="3374136"/>
+            <a:off x="4498848" y="3557016"/>
             <a:ext cx="3291840" cy="566928"/>
           </a:xfrm>
           <a:prstGeom prst="rect">
@@ -6184,7 +6219,7 @@
         </p:nvSpPr>
         <p:spPr>
           <a:xfrm>
-            <a:off x="7790688" y="3374136"/>
+            <a:off x="7790688" y="3557016"/>
             <a:ext cx="3749039" cy="566928"/>
           </a:xfrm>
           <a:prstGeom prst="rect">
@@ -6219,7 +6254,7 @@
         </p:nvSpPr>
         <p:spPr>
           <a:xfrm>
-            <a:off x="566928" y="3867912"/>
+            <a:off x="566928" y="4050792"/>
             <a:ext cx="11057839" cy="9525"/>
           </a:xfrm>
           <a:prstGeom prst="rect">
@@ -6263,7 +6298,7 @@
         </p:nvSpPr>
         <p:spPr>
           <a:xfrm>
-            <a:off x="566928" y="3941064"/>
+            <a:off x="566928" y="4123944"/>
             <a:ext cx="3931920" cy="566928"/>
           </a:xfrm>
           <a:prstGeom prst="rect">
@@ -6298,7 +6333,7 @@
         </p:nvSpPr>
         <p:spPr>
           <a:xfrm>
-            <a:off x="4498848" y="3941064"/>
+            <a:off x="4498848" y="4123944"/>
             <a:ext cx="3291840" cy="566928"/>
           </a:xfrm>
           <a:prstGeom prst="rect">
@@ -6342,7 +6377,7 @@
         </p:nvSpPr>
         <p:spPr>
           <a:xfrm>
-            <a:off x="7790688" y="3941064"/>
+            <a:off x="7790688" y="4123944"/>
             <a:ext cx="3749039" cy="566928"/>
           </a:xfrm>
           <a:prstGeom prst="rect">
@@ -6377,7 +6412,7 @@
         </p:nvSpPr>
         <p:spPr>
           <a:xfrm>
-            <a:off x="566928" y="4434840"/>
+            <a:off x="566928" y="4617720"/>
             <a:ext cx="11057839" cy="9525"/>
           </a:xfrm>
           <a:prstGeom prst="rect">
@@ -6421,8 +6456,8 @@
         </p:nvSpPr>
         <p:spPr>
           <a:xfrm>
-            <a:off x="566928" y="4617720"/>
-            <a:ext cx="11057839" cy="1371600"/>
+            <a:off x="566928" y="4709160"/>
+            <a:ext cx="11057839" cy="1298448"/>
           </a:xfrm>
           <a:prstGeom prst="rect">
             <a:avLst/>
@@ -6467,7 +6502,7 @@
         </p:nvSpPr>
         <p:spPr>
           <a:xfrm>
-            <a:off x="566928" y="4617720"/>
+            <a:off x="566928" y="4709160"/>
             <a:ext cx="11057839" cy="41148"/>
           </a:xfrm>
           <a:prstGeom prst="rect">
@@ -6511,7 +6546,7 @@
         </p:nvSpPr>
         <p:spPr>
           <a:xfrm>
-            <a:off x="886968" y="4892040"/>
+            <a:off x="886968" y="4956048"/>
             <a:ext cx="10789920" cy="914400"/>
           </a:xfrm>
           <a:prstGeom prst="rect">
@@ -6527,7 +6562,7 @@
           <a:p>
             <a:pPr algn="l"/>
             <a:r>
-              <a:rPr sz="2300" b="1" i="0">
+              <a:rPr sz="2200" b="1" i="0">
                 <a:solidFill>
                   <a:srgbClr val="171A21"/>
                 </a:solidFill>
@@ -6637,7 +6672,7 @@
                 </a:solidFill>
                 <a:latin typeface="Arial"/>
               </a:rPr>
-              <a:t>4 / 7</a:t>
+              <a:t>4 / 8</a:t>
             </a:r>
           </a:p>
         </p:txBody>
@@ -7472,7 +7507,7 @@
                 </a:solidFill>
                 <a:latin typeface="Arial"/>
               </a:rPr>
-              <a:t>5 / 7</a:t>
+              <a:t>5 / 8</a:t>
             </a:r>
           </a:p>
         </p:txBody>
@@ -8130,7 +8165,7 @@
                 </a:solidFill>
                 <a:latin typeface="Arial"/>
               </a:rPr>
-              <a:t>6 / 7</a:t>
+              <a:t>6 / 8</a:t>
             </a:r>
           </a:p>
         </p:txBody>
@@ -8811,7 +8846,865 @@
                 </a:solidFill>
                 <a:latin typeface="Arial"/>
               </a:rPr>
-              <a:t>7 / 7</a:t>
+              <a:t>7 / 8</a:t>
+            </a:r>
+          </a:p>
+        </p:txBody>
+      </p:sp>
+    </p:spTree>
+  </p:cSld>
+  <p:clrMapOvr>
+    <a:masterClrMapping/>
+  </p:clrMapOvr>
+</p:sld>
+</file>
+
+<file path=ppt/slides/slide8.xml><?xml version="1.0" encoding="utf-8"?>
+<p:sld xmlns:a="http://schemas.openxmlformats.org/drawingml/2006/main" xmlns:p="http://schemas.openxmlformats.org/presentationml/2006/main" xmlns:r="http://schemas.openxmlformats.org/officeDocument/2006/relationships">
+  <p:cSld>
+    <p:spTree>
+      <p:nvGrpSpPr>
+        <p:cNvPr id="1" name=""/>
+        <p:cNvGrpSpPr/>
+        <p:nvPr/>
+      </p:nvGrpSpPr>
+      <p:grpSpPr/>
+      <p:sp>
+        <p:nvSpPr>
+          <p:cNvPr id="2" name="TextBox 1"/>
+          <p:cNvSpPr txBox="1"/>
+          <p:nvPr/>
+        </p:nvSpPr>
+        <p:spPr>
+          <a:xfrm>
+            <a:off x="566928" y="384048"/>
+            <a:ext cx="8229600" cy="274320"/>
+          </a:xfrm>
+          <a:prstGeom prst="rect">
+            <a:avLst/>
+          </a:prstGeom>
+          <a:noFill/>
+        </p:spPr>
+        <p:txBody>
+          <a:bodyPr wrap="square" lIns="0" rIns="0" tIns="0" bIns="0" anchor="t">
+            <a:spAutoFit/>
+          </a:bodyPr>
+          <a:lstStyle/>
+          <a:p>
+            <a:pPr algn="l"/>
+            <a:r>
+              <a:rPr sz="1100" b="1" i="0">
+                <a:solidFill>
+                  <a:srgbClr val="2F5D8C"/>
+                </a:solidFill>
+                <a:latin typeface="Arial"/>
+              </a:rPr>
+              <a:t>PROPOSED NEXT EXPERIMENT</a:t>
+            </a:r>
+          </a:p>
+        </p:txBody>
+      </p:sp>
+      <p:sp>
+        <p:nvSpPr>
+          <p:cNvPr id="3" name="TextBox 2"/>
+          <p:cNvSpPr txBox="1"/>
+          <p:nvPr/>
+        </p:nvSpPr>
+        <p:spPr>
+          <a:xfrm>
+            <a:off x="566928" y="713232"/>
+            <a:ext cx="10424160" cy="914400"/>
+          </a:xfrm>
+          <a:prstGeom prst="rect">
+            <a:avLst/>
+          </a:prstGeom>
+          <a:noFill/>
+        </p:spPr>
+        <p:txBody>
+          <a:bodyPr wrap="square" lIns="0" rIns="0" tIns="0" bIns="0" anchor="t">
+            <a:spAutoFit/>
+          </a:bodyPr>
+          <a:lstStyle/>
+          <a:p>
+            <a:pPr algn="l"/>
+            <a:r>
+              <a:rPr sz="3100" b="1" i="0">
+                <a:solidFill>
+                  <a:srgbClr val="171A21"/>
+                </a:solidFill>
+                <a:latin typeface="Georgia"/>
+              </a:rPr>
+              <a:t>Make it solve the problem, not just eyeball it</a:t>
+            </a:r>
+          </a:p>
+        </p:txBody>
+      </p:sp>
+      <p:sp>
+        <p:nvSpPr>
+          <p:cNvPr id="4" name="Rectangle 3"/>
+          <p:cNvSpPr/>
+          <p:nvPr/>
+        </p:nvSpPr>
+        <p:spPr>
+          <a:xfrm>
+            <a:off x="566928" y="1783080"/>
+            <a:ext cx="11057839" cy="1143000"/>
+          </a:xfrm>
+          <a:prstGeom prst="rect">
+            <a:avLst/>
+          </a:prstGeom>
+          <a:solidFill>
+            <a:srgbClr val="F5F7FA"/>
+          </a:solidFill>
+          <a:ln w="9525">
+            <a:solidFill>
+              <a:srgbClr val="DDE2EA"/>
+            </a:solidFill>
+          </a:ln>
+          <a:effectLst/>
+        </p:spPr>
+        <p:style>
+          <a:lnRef idx="1">
+            <a:schemeClr val="accent1"/>
+          </a:lnRef>
+          <a:fillRef idx="3">
+            <a:schemeClr val="accent1"/>
+          </a:fillRef>
+          <a:effectRef idx="2">
+            <a:schemeClr val="accent1"/>
+          </a:effectRef>
+          <a:fontRef idx="minor">
+            <a:schemeClr val="lt1"/>
+          </a:fontRef>
+        </p:style>
+        <p:txBody>
+          <a:bodyPr rtlCol="0" anchor="ctr"/>
+          <a:lstStyle/>
+          <a:p>
+            <a:pPr algn="ctr"/>
+          </a:p>
+        </p:txBody>
+      </p:sp>
+      <p:sp>
+        <p:nvSpPr>
+          <p:cNvPr id="5" name="Rectangle 4"/>
+          <p:cNvSpPr/>
+          <p:nvPr/>
+        </p:nvSpPr>
+        <p:spPr>
+          <a:xfrm>
+            <a:off x="566928" y="1783080"/>
+            <a:ext cx="11057839" cy="41148"/>
+          </a:xfrm>
+          <a:prstGeom prst="rect">
+            <a:avLst/>
+          </a:prstGeom>
+          <a:solidFill>
+            <a:srgbClr val="9A6A12"/>
+          </a:solidFill>
+          <a:ln>
+            <a:noFill/>
+          </a:ln>
+          <a:effectLst/>
+        </p:spPr>
+        <p:style>
+          <a:lnRef idx="1">
+            <a:schemeClr val="accent1"/>
+          </a:lnRef>
+          <a:fillRef idx="3">
+            <a:schemeClr val="accent1"/>
+          </a:fillRef>
+          <a:effectRef idx="2">
+            <a:schemeClr val="accent1"/>
+          </a:effectRef>
+          <a:fontRef idx="minor">
+            <a:schemeClr val="lt1"/>
+          </a:fontRef>
+        </p:style>
+        <p:txBody>
+          <a:bodyPr rtlCol="0" anchor="ctr"/>
+          <a:lstStyle/>
+          <a:p>
+            <a:pPr algn="ctr"/>
+          </a:p>
+        </p:txBody>
+      </p:sp>
+      <p:sp>
+        <p:nvSpPr>
+          <p:cNvPr id="6" name="TextBox 5"/>
+          <p:cNvSpPr txBox="1"/>
+          <p:nvPr/>
+        </p:nvSpPr>
+        <p:spPr>
+          <a:xfrm>
+            <a:off x="859536" y="1993392"/>
+            <a:ext cx="10835640" cy="914400"/>
+          </a:xfrm>
+          <a:prstGeom prst="rect">
+            <a:avLst/>
+          </a:prstGeom>
+          <a:noFill/>
+        </p:spPr>
+        <p:txBody>
+          <a:bodyPr wrap="square" lIns="0" rIns="0" tIns="0" bIns="0" anchor="t">
+            <a:spAutoFit/>
+          </a:bodyPr>
+          <a:lstStyle/>
+          <a:p>
+            <a:pPr algn="l"/>
+            <a:r>
+              <a:rPr sz="1800" b="1" i="0">
+                <a:solidFill>
+                  <a:srgbClr val="171A21"/>
+                </a:solidFill>
+                <a:latin typeface="Georgia"/>
+              </a:rPr>
+              <a:t>The gap: plausibility-checking instead of recomputing.</a:t>
+            </a:r>
+          </a:p>
+          <a:p>
+            <a:pPr>
+              <a:spcBef>
+                <a:spcPts val="700"/>
+              </a:spcBef>
+            </a:pPr>
+            <a:r>
+              <a:rPr sz="1350" b="0" i="0">
+                <a:solidFill>
+                  <a:srgbClr val="4A5260"/>
+                </a:solidFill>
+                <a:latin typeface="Arial"/>
+              </a:rPr>
+              <a:t>It reads the student's steps and judges whether they look right. One page asserts </a:t>
+            </a:r>
+            <a:r>
+              <a:rPr sz="1350" b="1" i="0">
+                <a:solidFill>
+                  <a:srgbClr val="171A21"/>
+                </a:solidFill>
+                <a:latin typeface="Arial"/>
+              </a:rPr>
+              <a:t>19 × −18 × 23 = −7966</a:t>
+            </a:r>
+            <a:r>
+              <a:rPr sz="1350" b="0" i="0">
+                <a:solidFill>
+                  <a:srgbClr val="4A5260"/>
+                </a:solidFill>
+                <a:latin typeface="Arial"/>
+              </a:rPr>
+              <a:t>. The model accepted it. The correct value is </a:t>
+            </a:r>
+            <a:r>
+              <a:rPr sz="1350" b="1" i="0">
+                <a:solidFill>
+                  <a:srgbClr val="B23A34"/>
+                </a:solidFill>
+                <a:latin typeface="Arial"/>
+              </a:rPr>
+              <a:t>−7866</a:t>
+            </a:r>
+            <a:r>
+              <a:rPr sz="1350" b="0" i="0">
+                <a:solidFill>
+                  <a:srgbClr val="4A5260"/>
+                </a:solidFill>
+                <a:latin typeface="Arial"/>
+              </a:rPr>
+              <a:t>.</a:t>
+            </a:r>
+          </a:p>
+        </p:txBody>
+      </p:sp>
+      <p:sp>
+        <p:nvSpPr>
+          <p:cNvPr id="7" name="Rectangle 6"/>
+          <p:cNvSpPr/>
+          <p:nvPr/>
+        </p:nvSpPr>
+        <p:spPr>
+          <a:xfrm>
+            <a:off x="566928" y="3154680"/>
+            <a:ext cx="5440680" cy="2331720"/>
+          </a:xfrm>
+          <a:prstGeom prst="rect">
+            <a:avLst/>
+          </a:prstGeom>
+          <a:solidFill>
+            <a:srgbClr val="F5F7FA"/>
+          </a:solidFill>
+          <a:ln w="9525">
+            <a:solidFill>
+              <a:srgbClr val="DDE2EA"/>
+            </a:solidFill>
+          </a:ln>
+          <a:effectLst/>
+        </p:spPr>
+        <p:style>
+          <a:lnRef idx="1">
+            <a:schemeClr val="accent1"/>
+          </a:lnRef>
+          <a:fillRef idx="3">
+            <a:schemeClr val="accent1"/>
+          </a:fillRef>
+          <a:effectRef idx="2">
+            <a:schemeClr val="accent1"/>
+          </a:effectRef>
+          <a:fontRef idx="minor">
+            <a:schemeClr val="lt1"/>
+          </a:fontRef>
+        </p:style>
+        <p:txBody>
+          <a:bodyPr rtlCol="0" anchor="ctr"/>
+          <a:lstStyle/>
+          <a:p>
+            <a:pPr algn="ctr"/>
+          </a:p>
+        </p:txBody>
+      </p:sp>
+      <p:sp>
+        <p:nvSpPr>
+          <p:cNvPr id="8" name="Rectangle 7"/>
+          <p:cNvSpPr/>
+          <p:nvPr/>
+        </p:nvSpPr>
+        <p:spPr>
+          <a:xfrm>
+            <a:off x="566928" y="3154680"/>
+            <a:ext cx="5440680" cy="41148"/>
+          </a:xfrm>
+          <a:prstGeom prst="rect">
+            <a:avLst/>
+          </a:prstGeom>
+          <a:solidFill>
+            <a:srgbClr val="B23A34"/>
+          </a:solidFill>
+          <a:ln>
+            <a:noFill/>
+          </a:ln>
+          <a:effectLst/>
+        </p:spPr>
+        <p:style>
+          <a:lnRef idx="1">
+            <a:schemeClr val="accent1"/>
+          </a:lnRef>
+          <a:fillRef idx="3">
+            <a:schemeClr val="accent1"/>
+          </a:fillRef>
+          <a:effectRef idx="2">
+            <a:schemeClr val="accent1"/>
+          </a:effectRef>
+          <a:fontRef idx="minor">
+            <a:schemeClr val="lt1"/>
+          </a:fontRef>
+        </p:style>
+        <p:txBody>
+          <a:bodyPr rtlCol="0" anchor="ctr"/>
+          <a:lstStyle/>
+          <a:p>
+            <a:pPr algn="ctr"/>
+          </a:p>
+        </p:txBody>
+      </p:sp>
+      <p:sp>
+        <p:nvSpPr>
+          <p:cNvPr id="9" name="TextBox 8"/>
+          <p:cNvSpPr txBox="1"/>
+          <p:nvPr/>
+        </p:nvSpPr>
+        <p:spPr>
+          <a:xfrm>
+            <a:off x="859536" y="3364992"/>
+            <a:ext cx="4846320" cy="2011680"/>
+          </a:xfrm>
+          <a:prstGeom prst="rect">
+            <a:avLst/>
+          </a:prstGeom>
+          <a:noFill/>
+        </p:spPr>
+        <p:txBody>
+          <a:bodyPr wrap="square" lIns="0" rIns="0" tIns="0" bIns="0" anchor="t">
+            <a:spAutoFit/>
+          </a:bodyPr>
+          <a:lstStyle/>
+          <a:p>
+            <a:pPr algn="l"/>
+            <a:r>
+              <a:rPr sz="1000" b="1" i="0">
+                <a:solidFill>
+                  <a:srgbClr val="79828F"/>
+                </a:solidFill>
+                <a:latin typeface="Arial"/>
+              </a:rPr>
+              <a:t>ALREADY TRIED — PROMPT LEVEL</a:t>
+            </a:r>
+          </a:p>
+          <a:p>
+            <a:pPr>
+              <a:spcBef>
+                <a:spcPts val="800"/>
+              </a:spcBef>
+            </a:pPr>
+            <a:r>
+              <a:rPr sz="1350" b="0" i="1">
+                <a:solidFill>
+                  <a:srgbClr val="171A21"/>
+                </a:solidFill>
+                <a:latin typeface="Arial"/>
+              </a:rPr>
+              <a:t>“Work the problem yourself, then judge.”</a:t>
+            </a:r>
+          </a:p>
+          <a:p>
+            <a:pPr>
+              <a:spcBef>
+                <a:spcPts val="900"/>
+              </a:spcBef>
+            </a:pPr>
+            <a:r>
+              <a:rPr sz="1300" b="1" i="0">
+                <a:solidFill>
+                  <a:srgbClr val="171A21"/>
+                </a:solidFill>
+                <a:latin typeface="Arial"/>
+              </a:rPr>
+              <a:t>Qwen-3B  </a:t>
+            </a:r>
+            <a:r>
+              <a:rPr sz="1300" b="0" i="0">
+                <a:solidFill>
+                  <a:srgbClr val="4A5260"/>
+                </a:solidFill>
+                <a:latin typeface="Arial"/>
+              </a:rPr>
+              <a:t>says-error 94% → 38%, accuracy 0.51 → 0.55</a:t>
+            </a:r>
+          </a:p>
+          <a:p>
+            <a:pPr>
+              <a:spcBef>
+                <a:spcPts val="500"/>
+              </a:spcBef>
+            </a:pPr>
+            <a:r>
+              <a:rPr sz="1300" b="1" i="0">
+                <a:solidFill>
+                  <a:srgbClr val="171A21"/>
+                </a:solidFill>
+                <a:latin typeface="Arial"/>
+              </a:rPr>
+              <a:t>InternVL3  </a:t>
+            </a:r>
+            <a:r>
+              <a:rPr sz="1300" b="0" i="0">
+                <a:solidFill>
+                  <a:srgbClr val="4A5260"/>
+                </a:solidFill>
+                <a:latin typeface="Arial"/>
+              </a:rPr>
+              <a:t>accuracy 0.70 → 0.67</a:t>
+            </a:r>
+          </a:p>
+          <a:p>
+            <a:pPr>
+              <a:spcBef>
+                <a:spcPts val="900"/>
+              </a:spcBef>
+            </a:pPr>
+            <a:r>
+              <a:rPr sz="1300" b="1" i="0">
+                <a:solidFill>
+                  <a:srgbClr val="B23A34"/>
+                </a:solidFill>
+                <a:latin typeface="Arial"/>
+              </a:rPr>
+              <a:t>Behaviour swung hard. Accuracy did not move.</a:t>
+            </a:r>
+          </a:p>
+        </p:txBody>
+      </p:sp>
+      <p:sp>
+        <p:nvSpPr>
+          <p:cNvPr id="10" name="Rectangle 9"/>
+          <p:cNvSpPr/>
+          <p:nvPr/>
+        </p:nvSpPr>
+        <p:spPr>
+          <a:xfrm>
+            <a:off x="6355080" y="3154680"/>
+            <a:ext cx="5257800" cy="2331720"/>
+          </a:xfrm>
+          <a:prstGeom prst="rect">
+            <a:avLst/>
+          </a:prstGeom>
+          <a:solidFill>
+            <a:srgbClr val="F5F7FA"/>
+          </a:solidFill>
+          <a:ln w="9525">
+            <a:solidFill>
+              <a:srgbClr val="DDE2EA"/>
+            </a:solidFill>
+          </a:ln>
+          <a:effectLst/>
+        </p:spPr>
+        <p:style>
+          <a:lnRef idx="1">
+            <a:schemeClr val="accent1"/>
+          </a:lnRef>
+          <a:fillRef idx="3">
+            <a:schemeClr val="accent1"/>
+          </a:fillRef>
+          <a:effectRef idx="2">
+            <a:schemeClr val="accent1"/>
+          </a:effectRef>
+          <a:fontRef idx="minor">
+            <a:schemeClr val="lt1"/>
+          </a:fontRef>
+        </p:style>
+        <p:txBody>
+          <a:bodyPr rtlCol="0" anchor="ctr"/>
+          <a:lstStyle/>
+          <a:p>
+            <a:pPr algn="ctr"/>
+          </a:p>
+        </p:txBody>
+      </p:sp>
+      <p:sp>
+        <p:nvSpPr>
+          <p:cNvPr id="11" name="Rectangle 10"/>
+          <p:cNvSpPr/>
+          <p:nvPr/>
+        </p:nvSpPr>
+        <p:spPr>
+          <a:xfrm>
+            <a:off x="6355080" y="3154680"/>
+            <a:ext cx="5257800" cy="41148"/>
+          </a:xfrm>
+          <a:prstGeom prst="rect">
+            <a:avLst/>
+          </a:prstGeom>
+          <a:solidFill>
+            <a:srgbClr val="1B7A4B"/>
+          </a:solidFill>
+          <a:ln>
+            <a:noFill/>
+          </a:ln>
+          <a:effectLst/>
+        </p:spPr>
+        <p:style>
+          <a:lnRef idx="1">
+            <a:schemeClr val="accent1"/>
+          </a:lnRef>
+          <a:fillRef idx="3">
+            <a:schemeClr val="accent1"/>
+          </a:fillRef>
+          <a:effectRef idx="2">
+            <a:schemeClr val="accent1"/>
+          </a:effectRef>
+          <a:fontRef idx="minor">
+            <a:schemeClr val="lt1"/>
+          </a:fontRef>
+        </p:style>
+        <p:txBody>
+          <a:bodyPr rtlCol="0" anchor="ctr"/>
+          <a:lstStyle/>
+          <a:p>
+            <a:pPr algn="ctr"/>
+          </a:p>
+        </p:txBody>
+      </p:sp>
+      <p:sp>
+        <p:nvSpPr>
+          <p:cNvPr id="12" name="TextBox 11"/>
+          <p:cNvSpPr txBox="1"/>
+          <p:nvPr/>
+        </p:nvSpPr>
+        <p:spPr>
+          <a:xfrm>
+            <a:off x="6647688" y="3364992"/>
+            <a:ext cx="4709160" cy="2011680"/>
+          </a:xfrm>
+          <a:prstGeom prst="rect">
+            <a:avLst/>
+          </a:prstGeom>
+          <a:noFill/>
+        </p:spPr>
+        <p:txBody>
+          <a:bodyPr wrap="square" lIns="0" rIns="0" tIns="0" bIns="0" anchor="t">
+            <a:spAutoFit/>
+          </a:bodyPr>
+          <a:lstStyle/>
+          <a:p>
+            <a:pPr algn="l"/>
+            <a:r>
+              <a:rPr sz="1000" b="1" i="0">
+                <a:solidFill>
+                  <a:srgbClr val="79828F"/>
+                </a:solidFill>
+                <a:latin typeface="Arial"/>
+              </a:rPr>
+              <a:t>NOT YET TRIED — PIPELINE LEVEL</a:t>
+            </a:r>
+          </a:p>
+          <a:p>
+            <a:pPr>
+              <a:spcBef>
+                <a:spcPts val="800"/>
+              </a:spcBef>
+            </a:pPr>
+            <a:r>
+              <a:rPr sz="1350" b="1" i="0">
+                <a:solidFill>
+                  <a:srgbClr val="171A21"/>
+                </a:solidFill>
+                <a:latin typeface="Arial"/>
+              </a:rPr>
+              <a:t>Solve the page independently, then compare in code.</a:t>
+            </a:r>
+          </a:p>
+          <a:p>
+            <a:pPr>
+              <a:spcBef>
+                <a:spcPts val="900"/>
+              </a:spcBef>
+            </a:pPr>
+            <a:r>
+              <a:rPr sz="1300" b="0" i="0">
+                <a:solidFill>
+                  <a:srgbClr val="4A5260"/>
+                </a:solidFill>
+                <a:latin typeface="Arial"/>
+              </a:rPr>
+              <a:t>Asking one prompt to do both still lets the model see the student's answer first, so it can anchor on it. A separate solve step cannot.</a:t>
+            </a:r>
+          </a:p>
+          <a:p>
+            <a:pPr>
+              <a:spcBef>
+                <a:spcPts val="800"/>
+              </a:spcBef>
+            </a:pPr>
+            <a:r>
+              <a:rPr sz="1300" b="0" i="0">
+                <a:solidFill>
+                  <a:srgbClr val="4A5260"/>
+                </a:solidFill>
+                <a:latin typeface="Arial"/>
+              </a:rPr>
+              <a:t>Then re-measure: does the split on slide 4 still hold, and does uncertainty still predict the errors?</a:t>
+            </a:r>
+          </a:p>
+        </p:txBody>
+      </p:sp>
+      <p:sp>
+        <p:nvSpPr>
+          <p:cNvPr id="13" name="Rectangle 12"/>
+          <p:cNvSpPr/>
+          <p:nvPr/>
+        </p:nvSpPr>
+        <p:spPr>
+          <a:xfrm>
+            <a:off x="566928" y="5715000"/>
+            <a:ext cx="11057839" cy="658368"/>
+          </a:xfrm>
+          <a:prstGeom prst="rect">
+            <a:avLst/>
+          </a:prstGeom>
+          <a:solidFill>
+            <a:srgbClr val="F5F7FA"/>
+          </a:solidFill>
+          <a:ln w="9525">
+            <a:solidFill>
+              <a:srgbClr val="DDE2EA"/>
+            </a:solidFill>
+          </a:ln>
+          <a:effectLst/>
+        </p:spPr>
+        <p:style>
+          <a:lnRef idx="1">
+            <a:schemeClr val="accent1"/>
+          </a:lnRef>
+          <a:fillRef idx="3">
+            <a:schemeClr val="accent1"/>
+          </a:fillRef>
+          <a:effectRef idx="2">
+            <a:schemeClr val="accent1"/>
+          </a:effectRef>
+          <a:fontRef idx="minor">
+            <a:schemeClr val="lt1"/>
+          </a:fontRef>
+        </p:style>
+        <p:txBody>
+          <a:bodyPr rtlCol="0" anchor="ctr"/>
+          <a:lstStyle/>
+          <a:p>
+            <a:pPr algn="ctr"/>
+          </a:p>
+        </p:txBody>
+      </p:sp>
+      <p:sp>
+        <p:nvSpPr>
+          <p:cNvPr id="14" name="Rectangle 13"/>
+          <p:cNvSpPr/>
+          <p:nvPr/>
+        </p:nvSpPr>
+        <p:spPr>
+          <a:xfrm>
+            <a:off x="566928" y="5715000"/>
+            <a:ext cx="11057839" cy="41148"/>
+          </a:xfrm>
+          <a:prstGeom prst="rect">
+            <a:avLst/>
+          </a:prstGeom>
+          <a:solidFill>
+            <a:srgbClr val="2F5D8C"/>
+          </a:solidFill>
+          <a:ln>
+            <a:noFill/>
+          </a:ln>
+          <a:effectLst/>
+        </p:spPr>
+        <p:style>
+          <a:lnRef idx="1">
+            <a:schemeClr val="accent1"/>
+          </a:lnRef>
+          <a:fillRef idx="3">
+            <a:schemeClr val="accent1"/>
+          </a:fillRef>
+          <a:effectRef idx="2">
+            <a:schemeClr val="accent1"/>
+          </a:effectRef>
+          <a:fontRef idx="minor">
+            <a:schemeClr val="lt1"/>
+          </a:fontRef>
+        </p:style>
+        <p:txBody>
+          <a:bodyPr rtlCol="0" anchor="ctr"/>
+          <a:lstStyle/>
+          <a:p>
+            <a:pPr algn="ctr"/>
+          </a:p>
+        </p:txBody>
+      </p:sp>
+      <p:sp>
+        <p:nvSpPr>
+          <p:cNvPr id="15" name="TextBox 14"/>
+          <p:cNvSpPr txBox="1"/>
+          <p:nvPr/>
+        </p:nvSpPr>
+        <p:spPr>
+          <a:xfrm>
+            <a:off x="886968" y="5870448"/>
+            <a:ext cx="10789920" cy="411480"/>
+          </a:xfrm>
+          <a:prstGeom prst="rect">
+            <a:avLst/>
+          </a:prstGeom>
+          <a:noFill/>
+        </p:spPr>
+        <p:txBody>
+          <a:bodyPr wrap="square" lIns="0" rIns="0" tIns="0" bIns="0" anchor="t">
+            <a:spAutoFit/>
+          </a:bodyPr>
+          <a:lstStyle/>
+          <a:p>
+            <a:pPr algn="l"/>
+            <a:r>
+              <a:rPr sz="1500" b="1" i="0">
+                <a:solidFill>
+                  <a:srgbClr val="171A21"/>
+                </a:solidFill>
+                <a:latin typeface="Georgia"/>
+              </a:rPr>
+              <a:t>Worth the remaining time — or write up what we have?</a:t>
+            </a:r>
+          </a:p>
+        </p:txBody>
+      </p:sp>
+      <p:sp>
+        <p:nvSpPr>
+          <p:cNvPr id="16" name="TextBox 15"/>
+          <p:cNvSpPr txBox="1"/>
+          <p:nvPr/>
+        </p:nvSpPr>
+        <p:spPr>
+          <a:xfrm>
+            <a:off x="566928" y="6364224"/>
+            <a:ext cx="8229600" cy="292608"/>
+          </a:xfrm>
+          <a:prstGeom prst="rect">
+            <a:avLst/>
+          </a:prstGeom>
+          <a:noFill/>
+        </p:spPr>
+        <p:txBody>
+          <a:bodyPr wrap="square" lIns="0" rIns="0" tIns="0" bIns="0" anchor="t">
+            <a:spAutoFit/>
+          </a:bodyPr>
+          <a:lstStyle/>
+          <a:p>
+            <a:pPr algn="l"/>
+            <a:r>
+              <a:rPr sz="1000" b="1" i="0">
+                <a:solidFill>
+                  <a:srgbClr val="2F5D8C"/>
+                </a:solidFill>
+                <a:latin typeface="Arial"/>
+              </a:rPr>
+              <a:t>FERMAT</a:t>
+            </a:r>
+            <a:r>
+              <a:rPr sz="1000" b="0" i="0">
+                <a:solidFill>
+                  <a:srgbClr val="DDE2EA"/>
+                </a:solidFill>
+                <a:latin typeface="Arial"/>
+              </a:rPr>
+              <a:t>   ·   </a:t>
+            </a:r>
+            <a:r>
+              <a:rPr sz="1000" b="0" i="0">
+                <a:solidFill>
+                  <a:srgbClr val="79828F"/>
+                </a:solidFill>
+                <a:latin typeface="Arial"/>
+              </a:rPr>
+              <a:t>reasoning — proposed</a:t>
+            </a:r>
+          </a:p>
+        </p:txBody>
+      </p:sp>
+      <p:sp>
+        <p:nvSpPr>
+          <p:cNvPr id="17" name="TextBox 16"/>
+          <p:cNvSpPr txBox="1"/>
+          <p:nvPr/>
+        </p:nvSpPr>
+        <p:spPr>
+          <a:xfrm>
+            <a:off x="10527487" y="6382512"/>
+            <a:ext cx="1097280" cy="274320"/>
+          </a:xfrm>
+          <a:prstGeom prst="rect">
+            <a:avLst/>
+          </a:prstGeom>
+          <a:noFill/>
+        </p:spPr>
+        <p:txBody>
+          <a:bodyPr wrap="square" lIns="0" rIns="0" tIns="0" bIns="0" anchor="t">
+            <a:spAutoFit/>
+          </a:bodyPr>
+          <a:lstStyle/>
+          <a:p>
+            <a:pPr algn="r"/>
+            <a:r>
+              <a:rPr sz="1000" b="0" i="0">
+                <a:solidFill>
+                  <a:srgbClr val="79828F"/>
+                </a:solidFill>
+                <a:latin typeface="Arial"/>
+              </a:rPr>
+              <a:t>8 / 8</a:t>
             </a:r>
           </a:p>
         </p:txBody>

--- a/slides/fermat_findings.pptx
+++ b/slides/fermat_findings.pptx
@@ -3874,8 +3874,8 @@
         </p:nvSpPr>
         <p:spPr>
           <a:xfrm>
-            <a:off x="566928" y="1783080"/>
-            <a:ext cx="7315200" cy="365760"/>
+            <a:off x="566928" y="1737360"/>
+            <a:ext cx="10881360" cy="777240"/>
           </a:xfrm>
           <a:prstGeom prst="rect">
             <a:avLst/>
@@ -3896,7 +3896,32 @@
                 </a:solidFill>
                 <a:latin typeface="Arial"/>
               </a:rPr>
-              <a:t>Read the same page 5 times. Measure the disagreement.</a:t>
+              <a:t>The model is asked to </a:t>
+            </a:r>
+            <a:r>
+              <a:rPr sz="1500" b="0" i="1">
+                <a:solidFill>
+                  <a:srgbClr val="171A21"/>
+                </a:solidFill>
+                <a:latin typeface="Arial"/>
+              </a:rPr>
+              <a:t>“explicitly perform OCR on the handwritten text and extract the content in LaTeX format.”</a:t>
+            </a:r>
+          </a:p>
+          <a:p>
+            <a:pPr>
+              <a:spcBef>
+                <a:spcPts val="500"/>
+              </a:spcBef>
+            </a:pPr>
+            <a:r>
+              <a:rPr sz="1500" b="0" i="0">
+                <a:solidFill>
+                  <a:srgbClr val="4A5260"/>
+                </a:solidFill>
+                <a:latin typeface="Arial"/>
+              </a:rPr>
+              <a:t>We do that 5 times per page and measure how much the readings disagree.</a:t>
             </a:r>
           </a:p>
         </p:txBody>
@@ -3909,7 +3934,7 @@
         </p:nvSpPr>
         <p:spPr>
           <a:xfrm>
-            <a:off x="566928" y="2395728"/>
+            <a:off x="566928" y="2651760"/>
             <a:ext cx="3566160" cy="237744"/>
           </a:xfrm>
           <a:prstGeom prst="rect">
@@ -3944,7 +3969,7 @@
         </p:nvSpPr>
         <p:spPr>
           <a:xfrm>
-            <a:off x="4133088" y="2395728"/>
+            <a:off x="4133088" y="2651760"/>
             <a:ext cx="2743200" cy="237744"/>
           </a:xfrm>
           <a:prstGeom prst="rect">
@@ -3979,7 +4004,7 @@
         </p:nvSpPr>
         <p:spPr>
           <a:xfrm>
-            <a:off x="566928" y="2670048"/>
+            <a:off x="566928" y="2926080"/>
             <a:ext cx="11057839" cy="9525"/>
           </a:xfrm>
           <a:prstGeom prst="rect">
@@ -4023,7 +4048,7 @@
         </p:nvSpPr>
         <p:spPr>
           <a:xfrm>
-            <a:off x="566928" y="2779776"/>
+            <a:off x="566928" y="3035808"/>
             <a:ext cx="3566160" cy="512064"/>
           </a:xfrm>
           <a:prstGeom prst="rect">
@@ -4058,7 +4083,7 @@
         </p:nvSpPr>
         <p:spPr>
           <a:xfrm>
-            <a:off x="4133088" y="2779776"/>
+            <a:off x="4133088" y="3035808"/>
             <a:ext cx="2743200" cy="512064"/>
           </a:xfrm>
           <a:prstGeom prst="rect">
@@ -4102,7 +4127,7 @@
         </p:nvSpPr>
         <p:spPr>
           <a:xfrm>
-            <a:off x="566928" y="3218688"/>
+            <a:off x="566928" y="3474720"/>
             <a:ext cx="11057839" cy="9525"/>
           </a:xfrm>
           <a:prstGeom prst="rect">
@@ -4146,7 +4171,7 @@
         </p:nvSpPr>
         <p:spPr>
           <a:xfrm>
-            <a:off x="566928" y="3291840"/>
+            <a:off x="566928" y="3547872"/>
             <a:ext cx="3566160" cy="512064"/>
           </a:xfrm>
           <a:prstGeom prst="rect">
@@ -4181,7 +4206,7 @@
         </p:nvSpPr>
         <p:spPr>
           <a:xfrm>
-            <a:off x="4133088" y="3291840"/>
+            <a:off x="4133088" y="3547872"/>
             <a:ext cx="2743200" cy="512064"/>
           </a:xfrm>
           <a:prstGeom prst="rect">
@@ -4225,7 +4250,7 @@
         </p:nvSpPr>
         <p:spPr>
           <a:xfrm>
-            <a:off x="566928" y="3730752"/>
+            <a:off x="566928" y="3986784"/>
             <a:ext cx="11057839" cy="9525"/>
           </a:xfrm>
           <a:prstGeom prst="rect">
@@ -4269,7 +4294,7 @@
         </p:nvSpPr>
         <p:spPr>
           <a:xfrm>
-            <a:off x="566928" y="3803904"/>
+            <a:off x="566928" y="4059936"/>
             <a:ext cx="3566160" cy="512064"/>
           </a:xfrm>
           <a:prstGeom prst="rect">
@@ -4304,7 +4329,7 @@
         </p:nvSpPr>
         <p:spPr>
           <a:xfrm>
-            <a:off x="4133088" y="3803904"/>
+            <a:off x="4133088" y="4059936"/>
             <a:ext cx="2743200" cy="512064"/>
           </a:xfrm>
           <a:prstGeom prst="rect">
@@ -4348,7 +4373,7 @@
         </p:nvSpPr>
         <p:spPr>
           <a:xfrm>
-            <a:off x="566928" y="4242816"/>
+            <a:off x="566928" y="4498848"/>
             <a:ext cx="11057839" cy="9525"/>
           </a:xfrm>
           <a:prstGeom prst="rect">
@@ -4392,7 +4417,7 @@
         </p:nvSpPr>
         <p:spPr>
           <a:xfrm>
-            <a:off x="566928" y="4224528"/>
+            <a:off x="566928" y="4462272"/>
             <a:ext cx="5943600" cy="640080"/>
           </a:xfrm>
           <a:prstGeom prst="rect">
@@ -4427,7 +4452,7 @@
         </p:nvSpPr>
         <p:spPr>
           <a:xfrm>
-            <a:off x="7223760" y="2286000"/>
+            <a:off x="7223760" y="2560320"/>
             <a:ext cx="4389120" cy="2286000"/>
           </a:xfrm>
           <a:prstGeom prst="rect">
@@ -4473,7 +4498,7 @@
         </p:nvSpPr>
         <p:spPr>
           <a:xfrm>
-            <a:off x="7223760" y="2286000"/>
+            <a:off x="7223760" y="2560320"/>
             <a:ext cx="4389120" cy="41148"/>
           </a:xfrm>
           <a:prstGeom prst="rect">
@@ -4517,7 +4542,7 @@
         </p:nvSpPr>
         <p:spPr>
           <a:xfrm>
-            <a:off x="7516368" y="2606040"/>
+            <a:off x="7516368" y="2880360"/>
             <a:ext cx="3840480" cy="1828800"/>
           </a:xfrm>
           <a:prstGeom prst="rect">
@@ -9125,7 +9150,7 @@
         <p:spPr>
           <a:xfrm>
             <a:off x="566928" y="3154680"/>
-            <a:ext cx="5440680" cy="2331720"/>
+            <a:ext cx="5440680" cy="2468880"/>
           </a:xfrm>
           <a:prstGeom prst="rect">
             <a:avLst/>
@@ -9246,13 +9271,13 @@
               </a:spcBef>
             </a:pPr>
             <a:r>
-              <a:rPr sz="1350" b="0" i="1">
+              <a:rPr sz="1200" b="0" i="1">
                 <a:solidFill>
                   <a:srgbClr val="171A21"/>
                 </a:solidFill>
                 <a:latin typeface="Arial"/>
               </a:rPr>
-              <a:t>“Work the problem yourself, then judge.”</a:t>
+              <a:t>“First, transcribe the final result the student arrived at, exactly as written. Then check that result by working the problem yourself. Only then decide whether the Answer contains an error.”</a:t>
             </a:r>
           </a:p>
           <a:p>
@@ -9332,7 +9357,7 @@
         <p:spPr>
           <a:xfrm>
             <a:off x="6355080" y="3154680"/>
-            <a:ext cx="5257800" cy="2331720"/>
+            <a:ext cx="5257800" cy="2468880"/>
           </a:xfrm>
           <a:prstGeom prst="rect">
             <a:avLst/>
@@ -9504,8 +9529,8 @@
         </p:nvSpPr>
         <p:spPr>
           <a:xfrm>
-            <a:off x="566928" y="5715000"/>
-            <a:ext cx="11057839" cy="658368"/>
+            <a:off x="566928" y="5687568"/>
+            <a:ext cx="11057839" cy="548640"/>
           </a:xfrm>
           <a:prstGeom prst="rect">
             <a:avLst/>
@@ -9550,7 +9575,7 @@
         </p:nvSpPr>
         <p:spPr>
           <a:xfrm>
-            <a:off x="566928" y="5715000"/>
+            <a:off x="566928" y="5687568"/>
             <a:ext cx="11057839" cy="41148"/>
           </a:xfrm>
           <a:prstGeom prst="rect">
@@ -9594,8 +9619,8 @@
         </p:nvSpPr>
         <p:spPr>
           <a:xfrm>
-            <a:off x="886968" y="5870448"/>
-            <a:ext cx="10789920" cy="411480"/>
+            <a:off x="886968" y="5815584"/>
+            <a:ext cx="10789920" cy="384048"/>
           </a:xfrm>
           <a:prstGeom prst="rect">
             <a:avLst/>

--- a/slides/fermat_findings.pptx
+++ b/slides/fermat_findings.pptx
@@ -5737,11 +5737,11 @@
             <a:r>
               <a:rPr sz="1100" b="1" i="0">
                 <a:solidFill>
-                  <a:srgbClr val="9A6A12"/>
-                </a:solidFill>
-                <a:latin typeface="Arial"/>
-              </a:rPr>
-              <a:t>REASONING — THE KEY FINDING</a:t>
+                  <a:srgbClr val="B23A34"/>
+                </a:solidFill>
+                <a:latin typeface="Arial"/>
+              </a:rPr>
+              <a:t>REASONING — NEGATIVE</a:t>
             </a:r>
           </a:p>
         </p:txBody>
@@ -5776,7 +5776,7 @@
                 </a:solidFill>
                 <a:latin typeface="Georgia"/>
               </a:rPr>
-              <a:t>The average hid the finding</a:t>
+              <a:t>The same signal does not work for grading</a:t>
             </a:r>
           </a:p>
         </p:txBody>
@@ -5829,23 +5829,7 @@
                 </a:solidFill>
                 <a:latin typeface="Arial"/>
               </a:rPr>
-              <a:t>  It is never shown the correct answer.</a:t>
-            </a:r>
-          </a:p>
-          <a:p>
-            <a:pPr>
-              <a:spcBef>
-                <a:spcPts val="500"/>
-              </a:spcBef>
-            </a:pPr>
-            <a:r>
-              <a:rPr sz="1500" b="0" i="0">
-                <a:solidFill>
-                  <a:srgbClr val="4A5260"/>
-                </a:solidFill>
-                <a:latin typeface="Arial"/>
-              </a:rPr>
-              <a:t>Same 300 pages, split by whether an error was really there.</a:t>
+              <a:t>  It never sees the correct answer.</a:t>
             </a:r>
           </a:p>
         </p:txBody>
@@ -5858,8 +5842,8 @@
         </p:nvSpPr>
         <p:spPr>
           <a:xfrm>
-            <a:off x="566928" y="2606040"/>
-            <a:ext cx="3931920" cy="237744"/>
+            <a:off x="566928" y="2697480"/>
+            <a:ext cx="4206240" cy="237744"/>
           </a:xfrm>
           <a:prstGeom prst="rect">
             <a:avLst/>
@@ -5880,7 +5864,7 @@
                 </a:solidFill>
                 <a:latin typeface="Arial"/>
               </a:rPr>
-              <a:t>SCORED ON</a:t>
+              <a:t/>
             </a:r>
           </a:p>
         </p:txBody>
@@ -5893,8 +5877,8 @@
         </p:nvSpPr>
         <p:spPr>
           <a:xfrm>
-            <a:off x="4498848" y="2606040"/>
-            <a:ext cx="3291840" cy="237744"/>
+            <a:off x="4773168" y="2697480"/>
+            <a:ext cx="3108960" cy="237744"/>
           </a:xfrm>
           <a:prstGeom prst="rect">
             <a:avLst/>
@@ -5928,8 +5912,8 @@
         </p:nvSpPr>
         <p:spPr>
           <a:xfrm>
-            <a:off x="7790688" y="2606040"/>
-            <a:ext cx="3749039" cy="237744"/>
+            <a:off x="7882128" y="2697480"/>
+            <a:ext cx="2743200" cy="237744"/>
           </a:xfrm>
           <a:prstGeom prst="rect">
             <a:avLst/>
@@ -5963,7 +5947,7 @@
         </p:nvSpPr>
         <p:spPr>
           <a:xfrm>
-            <a:off x="566928" y="2880360"/>
+            <a:off x="566928" y="2971800"/>
             <a:ext cx="11057839" cy="9525"/>
           </a:xfrm>
           <a:prstGeom prst="rect">
@@ -6007,8 +5991,8 @@
         </p:nvSpPr>
         <p:spPr>
           <a:xfrm>
-            <a:off x="566928" y="2990088"/>
-            <a:ext cx="3931920" cy="566928"/>
+            <a:off x="566928" y="3081528"/>
+            <a:ext cx="4206240" cy="640080"/>
           </a:xfrm>
           <a:prstGeom prst="rect">
             <a:avLst/>
@@ -6029,7 +6013,7 @@
                 </a:solidFill>
                 <a:latin typeface="Arial"/>
               </a:rPr>
-              <a:t>Everything pooled</a:t>
+              <a:t>Grading, 300 balanced pages</a:t>
             </a:r>
           </a:p>
         </p:txBody>
@@ -6042,8 +6026,8 @@
         </p:nvSpPr>
         <p:spPr>
           <a:xfrm>
-            <a:off x="4498848" y="2990088"/>
-            <a:ext cx="3291840" cy="566928"/>
+            <a:off x="4773168" y="3081528"/>
+            <a:ext cx="3108960" cy="640080"/>
           </a:xfrm>
           <a:prstGeom prst="rect">
             <a:avLst/>
@@ -6058,7 +6042,7 @@
           <a:p>
             <a:pPr algn="l"/>
             <a:r>
-              <a:rPr sz="1600" b="1" i="0">
+              <a:rPr sz="1700" b="1" i="0">
                 <a:solidFill>
                   <a:srgbClr val="B23A34"/>
                 </a:solidFill>
@@ -6067,7 +6051,7 @@
               <a:t>0.520</a:t>
             </a:r>
             <a:r>
-              <a:rPr sz="1250" b="0" i="0">
+              <a:rPr sz="1350" b="0" i="0">
                 <a:solidFill>
                   <a:srgbClr val="79828F"/>
                 </a:solidFill>
@@ -6086,8 +6070,8 @@
         </p:nvSpPr>
         <p:spPr>
           <a:xfrm>
-            <a:off x="7790688" y="2990088"/>
-            <a:ext cx="3749039" cy="566928"/>
+            <a:off x="7882128" y="3081528"/>
+            <a:ext cx="2743200" cy="640080"/>
           </a:xfrm>
           <a:prstGeom prst="rect">
             <a:avLst/>
@@ -6108,7 +6092,7 @@
                 </a:solidFill>
                 <a:latin typeface="Arial"/>
               </a:rPr>
-              <a:t>looks like chance</a:t>
+              <a:t>interval contains chance</a:t>
             </a:r>
           </a:p>
         </p:txBody>
@@ -6121,7 +6105,7 @@
         </p:nvSpPr>
         <p:spPr>
           <a:xfrm>
-            <a:off x="566928" y="3483864"/>
+            <a:off x="566928" y="3648456"/>
             <a:ext cx="11057839" cy="9525"/>
           </a:xfrm>
           <a:prstGeom prst="rect">
@@ -6159,330 +6143,14 @@
       </p:sp>
       <p:sp>
         <p:nvSpPr>
-          <p:cNvPr id="13" name="TextBox 12"/>
-          <p:cNvSpPr txBox="1"/>
-          <p:nvPr/>
-        </p:nvSpPr>
-        <p:spPr>
-          <a:xfrm>
-            <a:off x="566928" y="3557016"/>
-            <a:ext cx="3931920" cy="566928"/>
-          </a:xfrm>
-          <a:prstGeom prst="rect">
-            <a:avLst/>
-          </a:prstGeom>
-          <a:noFill/>
-        </p:spPr>
-        <p:txBody>
-          <a:bodyPr wrap="square" lIns="0" rIns="0" tIns="0" bIns="0" anchor="t">
-            <a:spAutoFit/>
-          </a:bodyPr>
-          <a:lstStyle/>
-          <a:p>
-            <a:pPr algn="l"/>
-            <a:r>
-              <a:rPr sz="1300" b="1" i="0">
-                <a:solidFill>
-                  <a:srgbClr val="171A21"/>
-                </a:solidFill>
-                <a:latin typeface="Arial"/>
-              </a:rPr>
-              <a:t>Pages with an error</a:t>
-            </a:r>
-          </a:p>
-        </p:txBody>
-      </p:sp>
-      <p:sp>
-        <p:nvSpPr>
-          <p:cNvPr id="14" name="TextBox 13"/>
-          <p:cNvSpPr txBox="1"/>
-          <p:nvPr/>
-        </p:nvSpPr>
-        <p:spPr>
-          <a:xfrm>
-            <a:off x="4498848" y="3557016"/>
-            <a:ext cx="3291840" cy="566928"/>
-          </a:xfrm>
-          <a:prstGeom prst="rect">
-            <a:avLst/>
-          </a:prstGeom>
-          <a:noFill/>
-        </p:spPr>
-        <p:txBody>
-          <a:bodyPr wrap="square" lIns="0" rIns="0" tIns="0" bIns="0" anchor="t">
-            <a:spAutoFit/>
-          </a:bodyPr>
-          <a:lstStyle/>
-          <a:p>
-            <a:pPr algn="l"/>
-            <a:r>
-              <a:rPr sz="1600" b="1" i="0">
-                <a:solidFill>
-                  <a:srgbClr val="1B7A4B"/>
-                </a:solidFill>
-                <a:latin typeface="Arial"/>
-              </a:rPr>
-              <a:t>0.801</a:t>
-            </a:r>
-            <a:r>
-              <a:rPr sz="1250" b="0" i="0">
-                <a:solidFill>
-                  <a:srgbClr val="79828F"/>
-                </a:solidFill>
-                <a:latin typeface="Arial"/>
-              </a:rPr>
-              <a:t>  [0.751, 0.846]</a:t>
-            </a:r>
-          </a:p>
-        </p:txBody>
-      </p:sp>
-      <p:sp>
-        <p:nvSpPr>
-          <p:cNvPr id="15" name="TextBox 14"/>
-          <p:cNvSpPr txBox="1"/>
-          <p:nvPr/>
-        </p:nvSpPr>
-        <p:spPr>
-          <a:xfrm>
-            <a:off x="7790688" y="3557016"/>
-            <a:ext cx="3749039" cy="566928"/>
-          </a:xfrm>
-          <a:prstGeom prst="rect">
-            <a:avLst/>
-          </a:prstGeom>
-          <a:noFill/>
-        </p:spPr>
-        <p:txBody>
-          <a:bodyPr wrap="square" lIns="0" rIns="0" tIns="0" bIns="0" anchor="t">
-            <a:spAutoFit/>
-          </a:bodyPr>
-          <a:lstStyle/>
-          <a:p>
-            <a:pPr algn="l"/>
-            <a:r>
-              <a:rPr sz="1300" b="0" i="0">
-                <a:solidFill>
-                  <a:srgbClr val="1B7A4B"/>
-                </a:solidFill>
-                <a:latin typeface="Arial"/>
-              </a:rPr>
-              <a:t>works well</a:t>
-            </a:r>
-          </a:p>
-        </p:txBody>
-      </p:sp>
-      <p:sp>
-        <p:nvSpPr>
-          <p:cNvPr id="16" name="Rectangle 15"/>
+          <p:cNvPr id="13" name="Rectangle 12"/>
           <p:cNvSpPr/>
           <p:nvPr/>
         </p:nvSpPr>
         <p:spPr>
           <a:xfrm>
-            <a:off x="566928" y="4050792"/>
-            <a:ext cx="11057839" cy="9525"/>
-          </a:xfrm>
-          <a:prstGeom prst="rect">
-            <a:avLst/>
-          </a:prstGeom>
-          <a:solidFill>
-            <a:srgbClr val="DDE2EA"/>
-          </a:solidFill>
-          <a:ln>
-            <a:noFill/>
-          </a:ln>
-          <a:effectLst/>
-        </p:spPr>
-        <p:style>
-          <a:lnRef idx="1">
-            <a:schemeClr val="accent1"/>
-          </a:lnRef>
-          <a:fillRef idx="3">
-            <a:schemeClr val="accent1"/>
-          </a:fillRef>
-          <a:effectRef idx="2">
-            <a:schemeClr val="accent1"/>
-          </a:effectRef>
-          <a:fontRef idx="minor">
-            <a:schemeClr val="lt1"/>
-          </a:fontRef>
-        </p:style>
-        <p:txBody>
-          <a:bodyPr rtlCol="0" anchor="ctr"/>
-          <a:lstStyle/>
-          <a:p>
-            <a:pPr algn="ctr"/>
-          </a:p>
-        </p:txBody>
-      </p:sp>
-      <p:sp>
-        <p:nvSpPr>
-          <p:cNvPr id="17" name="TextBox 16"/>
-          <p:cNvSpPr txBox="1"/>
-          <p:nvPr/>
-        </p:nvSpPr>
-        <p:spPr>
-          <a:xfrm>
-            <a:off x="566928" y="4123944"/>
-            <a:ext cx="3931920" cy="566928"/>
-          </a:xfrm>
-          <a:prstGeom prst="rect">
-            <a:avLst/>
-          </a:prstGeom>
-          <a:noFill/>
-        </p:spPr>
-        <p:txBody>
-          <a:bodyPr wrap="square" lIns="0" rIns="0" tIns="0" bIns="0" anchor="t">
-            <a:spAutoFit/>
-          </a:bodyPr>
-          <a:lstStyle/>
-          <a:p>
-            <a:pPr algn="l"/>
-            <a:r>
-              <a:rPr sz="1300" b="1" i="0">
-                <a:solidFill>
-                  <a:srgbClr val="171A21"/>
-                </a:solidFill>
-                <a:latin typeface="Arial"/>
-              </a:rPr>
-              <a:t>Pages that are correct</a:t>
-            </a:r>
-          </a:p>
-        </p:txBody>
-      </p:sp>
-      <p:sp>
-        <p:nvSpPr>
-          <p:cNvPr id="18" name="TextBox 17"/>
-          <p:cNvSpPr txBox="1"/>
-          <p:nvPr/>
-        </p:nvSpPr>
-        <p:spPr>
-          <a:xfrm>
-            <a:off x="4498848" y="4123944"/>
-            <a:ext cx="3291840" cy="566928"/>
-          </a:xfrm>
-          <a:prstGeom prst="rect">
-            <a:avLst/>
-          </a:prstGeom>
-          <a:noFill/>
-        </p:spPr>
-        <p:txBody>
-          <a:bodyPr wrap="square" lIns="0" rIns="0" tIns="0" bIns="0" anchor="t">
-            <a:spAutoFit/>
-          </a:bodyPr>
-          <a:lstStyle/>
-          <a:p>
-            <a:pPr algn="l"/>
-            <a:r>
-              <a:rPr sz="1600" b="1" i="0">
-                <a:solidFill>
-                  <a:srgbClr val="1B7A4B"/>
-                </a:solidFill>
-                <a:latin typeface="Arial"/>
-              </a:rPr>
-              <a:t>0.280</a:t>
-            </a:r>
-            <a:r>
-              <a:rPr sz="1250" b="0" i="0">
-                <a:solidFill>
-                  <a:srgbClr val="79828F"/>
-                </a:solidFill>
-                <a:latin typeface="Arial"/>
-              </a:rPr>
-              <a:t>  [0.200, 0.366]</a:t>
-            </a:r>
-          </a:p>
-        </p:txBody>
-      </p:sp>
-      <p:sp>
-        <p:nvSpPr>
-          <p:cNvPr id="19" name="TextBox 18"/>
-          <p:cNvSpPr txBox="1"/>
-          <p:nvPr/>
-        </p:nvSpPr>
-        <p:spPr>
-          <a:xfrm>
-            <a:off x="7790688" y="4123944"/>
-            <a:ext cx="3749039" cy="566928"/>
-          </a:xfrm>
-          <a:prstGeom prst="rect">
-            <a:avLst/>
-          </a:prstGeom>
-          <a:noFill/>
-        </p:spPr>
-        <p:txBody>
-          <a:bodyPr wrap="square" lIns="0" rIns="0" tIns="0" bIns="0" anchor="t">
-            <a:spAutoFit/>
-          </a:bodyPr>
-          <a:lstStyle/>
-          <a:p>
-            <a:pPr algn="l"/>
-            <a:r>
-              <a:rPr sz="1300" b="0" i="0">
-                <a:solidFill>
-                  <a:srgbClr val="1B7A4B"/>
-                </a:solidFill>
-                <a:latin typeface="Arial"/>
-              </a:rPr>
-              <a:t>works backwards</a:t>
-            </a:r>
-          </a:p>
-        </p:txBody>
-      </p:sp>
-      <p:sp>
-        <p:nvSpPr>
-          <p:cNvPr id="20" name="Rectangle 19"/>
-          <p:cNvSpPr/>
-          <p:nvPr/>
-        </p:nvSpPr>
-        <p:spPr>
-          <a:xfrm>
-            <a:off x="566928" y="4617720"/>
-            <a:ext cx="11057839" cy="9525"/>
-          </a:xfrm>
-          <a:prstGeom prst="rect">
-            <a:avLst/>
-          </a:prstGeom>
-          <a:solidFill>
-            <a:srgbClr val="DDE2EA"/>
-          </a:solidFill>
-          <a:ln>
-            <a:noFill/>
-          </a:ln>
-          <a:effectLst/>
-        </p:spPr>
-        <p:style>
-          <a:lnRef idx="1">
-            <a:schemeClr val="accent1"/>
-          </a:lnRef>
-          <a:fillRef idx="3">
-            <a:schemeClr val="accent1"/>
-          </a:fillRef>
-          <a:effectRef idx="2">
-            <a:schemeClr val="accent1"/>
-          </a:effectRef>
-          <a:fontRef idx="minor">
-            <a:schemeClr val="lt1"/>
-          </a:fontRef>
-        </p:style>
-        <p:txBody>
-          <a:bodyPr rtlCol="0" anchor="ctr"/>
-          <a:lstStyle/>
-          <a:p>
-            <a:pPr algn="ctr"/>
-          </a:p>
-        </p:txBody>
-      </p:sp>
-      <p:sp>
-        <p:nvSpPr>
-          <p:cNvPr id="21" name="Rectangle 20"/>
-          <p:cNvSpPr/>
-          <p:nvPr/>
-        </p:nvSpPr>
-        <p:spPr>
-          <a:xfrm>
-            <a:off x="566928" y="4709160"/>
-            <a:ext cx="11057839" cy="1298448"/>
+            <a:off x="566928" y="3977639"/>
+            <a:ext cx="11057839" cy="1783080"/>
           </a:xfrm>
           <a:prstGeom prst="rect">
             <a:avLst/>
@@ -6521,13 +6189,13 @@
       </p:sp>
       <p:sp>
         <p:nvSpPr>
-          <p:cNvPr id="22" name="Rectangle 21"/>
+          <p:cNvPr id="14" name="Rectangle 13"/>
           <p:cNvSpPr/>
           <p:nvPr/>
         </p:nvSpPr>
         <p:spPr>
           <a:xfrm>
-            <a:off x="566928" y="4709160"/>
+            <a:off x="566928" y="3977639"/>
             <a:ext cx="11057839" cy="41148"/>
           </a:xfrm>
           <a:prstGeom prst="rect">
@@ -6565,14 +6233,14 @@
       </p:sp>
       <p:sp>
         <p:nvSpPr>
-          <p:cNvPr id="23" name="TextBox 22"/>
+          <p:cNvPr id="15" name="TextBox 14"/>
           <p:cNvSpPr txBox="1"/>
           <p:nvPr/>
         </p:nvSpPr>
         <p:spPr>
           <a:xfrm>
-            <a:off x="886968" y="4956048"/>
-            <a:ext cx="10789920" cy="914400"/>
+            <a:off x="886968" y="4224528"/>
+            <a:ext cx="10789920" cy="1463040"/>
           </a:xfrm>
           <a:prstGeom prst="rect">
             <a:avLst/>
@@ -6593,30 +6261,30 @@
                 </a:solidFill>
                 <a:latin typeface="Georgia"/>
               </a:rPr>
-              <a:t>0.80 and 0.28 average out to 0.52.</a:t>
+              <a:t>No signal. That is the honest reasoning result.</a:t>
             </a:r>
           </a:p>
           <a:p>
             <a:pPr>
               <a:spcBef>
-                <a:spcPts val="800"/>
+                <a:spcPts val="1000"/>
               </a:spcBef>
             </a:pPr>
             <a:r>
-              <a:rPr sz="1350" b="0" i="0">
+              <a:rPr sz="1400" b="0" i="0">
                 <a:solidFill>
                   <a:srgbClr val="4A5260"/>
                 </a:solidFill>
                 <a:latin typeface="Arial"/>
               </a:rPr>
-              <a:t>Both halves are real. Pooling reports neither. Only visible because FERMAT has correct pages to separate out.</a:t>
-            </a:r>
-          </a:p>
-        </p:txBody>
-      </p:sp>
-      <p:sp>
-        <p:nvSpPr>
-          <p:cNvPr id="24" name="TextBox 23"/>
+              <a:t>The model answers “error” for 80–90% of pages regardless of what is on them. Balancing the set is what makes this readable — on an unbalanced set that bias alone would score well.</a:t>
+            </a:r>
+          </a:p>
+        </p:txBody>
+      </p:sp>
+      <p:sp>
+        <p:nvSpPr>
+          <p:cNvPr id="16" name="TextBox 15"/>
           <p:cNvSpPr txBox="1"/>
           <p:nvPr/>
         </p:nvSpPr>
@@ -6669,7 +6337,7 @@
       </p:sp>
       <p:sp>
         <p:nvSpPr>
-          <p:cNvPr id="25" name="TextBox 24"/>
+          <p:cNvPr id="17" name="TextBox 16"/>
           <p:cNvSpPr txBox="1"/>
           <p:nvPr/>
         </p:nvSpPr>
@@ -6746,11 +6414,11 @@
             <a:r>
               <a:rPr sz="1100" b="1" i="0">
                 <a:solidFill>
-                  <a:srgbClr val="1B7A4B"/>
-                </a:solidFill>
-                <a:latin typeface="Arial"/>
-              </a:rPr>
-              <a:t>REASONING — REPLICATION</a:t>
+                  <a:srgbClr val="9A6A12"/>
+                </a:solidFill>
+                <a:latin typeface="Arial"/>
+              </a:rPr>
+              <a:t>WHAT WE GOT WRONG</a:t>
             </a:r>
           </a:p>
         </p:txBody>
@@ -6779,13 +6447,13 @@
           <a:p>
             <a:pPr algn="l"/>
             <a:r>
-              <a:rPr sz="3100" b="1" i="0">
+              <a:rPr sz="3000" b="1" i="0">
                 <a:solidFill>
                   <a:srgbClr val="171A21"/>
                 </a:solidFill>
                 <a:latin typeface="Georgia"/>
               </a:rPr>
-              <a:t>Holds across three model families</a:t>
+              <a:t>We believed the opposite for three weeks</a:t>
             </a:r>
           </a:p>
         </p:txBody>
@@ -6798,8 +6466,8 @@
         </p:nvSpPr>
         <p:spPr>
           <a:xfrm>
-            <a:off x="566928" y="1737360"/>
-            <a:ext cx="10058400" cy="365760"/>
+            <a:off x="566928" y="1572768"/>
+            <a:ext cx="10881360" cy="548640"/>
           </a:xfrm>
           <a:prstGeom prst="rect">
             <a:avLst/>
@@ -6820,7 +6488,7 @@
                 </a:solidFill>
                 <a:latin typeface="Arial"/>
               </a:rPr>
-              <a:t>The 0.80 result above, on pages that contain an error.</a:t>
+              <a:t>Splitting the grading data by ground truth seemed to recover a strong effect — replicated across three model families.</a:t>
             </a:r>
           </a:p>
         </p:txBody>
@@ -6833,8 +6501,8 @@
         </p:nvSpPr>
         <p:spPr>
           <a:xfrm>
-            <a:off x="566928" y="2468880"/>
-            <a:ext cx="3291840" cy="237744"/>
+            <a:off x="566928" y="2240280"/>
+            <a:ext cx="3108960" cy="237744"/>
           </a:xfrm>
           <a:prstGeom prst="rect">
             <a:avLst/>
@@ -6868,8 +6536,8 @@
         </p:nvSpPr>
         <p:spPr>
           <a:xfrm>
-            <a:off x="3858768" y="2468880"/>
-            <a:ext cx="3474720" cy="237744"/>
+            <a:off x="3675888" y="2240280"/>
+            <a:ext cx="2468880" cy="237744"/>
           </a:xfrm>
           <a:prstGeom prst="rect">
             <a:avLst/>
@@ -6890,20 +6558,90 @@
                 </a:solidFill>
                 <a:latin typeface="Arial"/>
               </a:rPr>
-              <a:t>AUROC  (95% CI)</a:t>
-            </a:r>
-          </a:p>
-        </p:txBody>
-      </p:sp>
-      <p:sp>
-        <p:nvSpPr>
-          <p:cNvPr id="7" name="Rectangle 6"/>
+              <a:t>WE REPORTED</a:t>
+            </a:r>
+          </a:p>
+        </p:txBody>
+      </p:sp>
+      <p:sp>
+        <p:nvSpPr>
+          <p:cNvPr id="7" name="TextBox 6"/>
+          <p:cNvSpPr txBox="1"/>
+          <p:nvPr/>
+        </p:nvSpPr>
+        <p:spPr>
+          <a:xfrm>
+            <a:off x="6144768" y="2240280"/>
+            <a:ext cx="2743200" cy="237744"/>
+          </a:xfrm>
+          <a:prstGeom prst="rect">
+            <a:avLst/>
+          </a:prstGeom>
+          <a:noFill/>
+        </p:spPr>
+        <p:txBody>
+          <a:bodyPr wrap="square" lIns="0" rIns="0" tIns="0" bIns="0" anchor="t">
+            <a:spAutoFit/>
+          </a:bodyPr>
+          <a:lstStyle/>
+          <a:p>
+            <a:pPr algn="l"/>
+            <a:r>
+              <a:rPr sz="950" b="1" i="0">
+                <a:solidFill>
+                  <a:srgbClr val="79828F"/>
+                </a:solidFill>
+                <a:latin typeface="Arial"/>
+              </a:rPr>
+              <a:t>SIGNAL-FREE COIN</a:t>
+            </a:r>
+          </a:p>
+        </p:txBody>
+      </p:sp>
+      <p:sp>
+        <p:nvSpPr>
+          <p:cNvPr id="8" name="TextBox 7"/>
+          <p:cNvSpPr txBox="1"/>
+          <p:nvPr/>
+        </p:nvSpPr>
+        <p:spPr>
+          <a:xfrm>
+            <a:off x="8887968" y="2240280"/>
+            <a:ext cx="2286000" cy="237744"/>
+          </a:xfrm>
+          <a:prstGeom prst="rect">
+            <a:avLst/>
+          </a:prstGeom>
+          <a:noFill/>
+        </p:spPr>
+        <p:txBody>
+          <a:bodyPr wrap="square" lIns="0" rIns="0" tIns="0" bIns="0" anchor="t">
+            <a:spAutoFit/>
+          </a:bodyPr>
+          <a:lstStyle/>
+          <a:p>
+            <a:pPr algn="l"/>
+            <a:r>
+              <a:rPr sz="950" b="1" i="0">
+                <a:solidFill>
+                  <a:srgbClr val="79828F"/>
+                </a:solidFill>
+                <a:latin typeface="Arial"/>
+              </a:rPr>
+              <a:t>COLLAPSE</a:t>
+            </a:r>
+          </a:p>
+        </p:txBody>
+      </p:sp>
+      <p:sp>
+        <p:nvSpPr>
+          <p:cNvPr id="9" name="Rectangle 8"/>
           <p:cNvSpPr/>
           <p:nvPr/>
         </p:nvSpPr>
         <p:spPr>
           <a:xfrm>
-            <a:off x="566928" y="2743200"/>
+            <a:off x="566928" y="2514600"/>
             <a:ext cx="11057839" cy="9525"/>
           </a:xfrm>
           <a:prstGeom prst="rect">
@@ -6941,14 +6679,14 @@
       </p:sp>
       <p:sp>
         <p:nvSpPr>
-          <p:cNvPr id="8" name="TextBox 7"/>
+          <p:cNvPr id="10" name="TextBox 9"/>
           <p:cNvSpPr txBox="1"/>
           <p:nvPr/>
         </p:nvSpPr>
         <p:spPr>
           <a:xfrm>
-            <a:off x="566928" y="2852928"/>
-            <a:ext cx="3291840" cy="530352"/>
+            <a:off x="566928" y="2624328"/>
+            <a:ext cx="3108960" cy="457200"/>
           </a:xfrm>
           <a:prstGeom prst="rect">
             <a:avLst/>
@@ -6976,14 +6714,14 @@
       </p:sp>
       <p:sp>
         <p:nvSpPr>
-          <p:cNvPr id="9" name="TextBox 8"/>
+          <p:cNvPr id="11" name="TextBox 10"/>
           <p:cNvSpPr txBox="1"/>
           <p:nvPr/>
         </p:nvSpPr>
         <p:spPr>
           <a:xfrm>
-            <a:off x="3858768" y="2852928"/>
-            <a:ext cx="3474720" cy="530352"/>
+            <a:off x="3675888" y="2624328"/>
+            <a:ext cx="2468880" cy="457200"/>
           </a:xfrm>
           <a:prstGeom prst="rect">
             <a:avLst/>
@@ -7006,27 +6744,88 @@
               </a:rPr>
               <a:t>0.854</a:t>
             </a:r>
-            <a:r>
-              <a:rPr sz="1150" b="0" i="0">
-                <a:solidFill>
-                  <a:srgbClr val="79828F"/>
-                </a:solidFill>
-                <a:latin typeface="Arial"/>
-              </a:rPr>
-              <a:t>  [0.796, 0.902]</a:t>
-            </a:r>
-          </a:p>
-        </p:txBody>
-      </p:sp>
-      <p:sp>
-        <p:nvSpPr>
-          <p:cNvPr id="10" name="Rectangle 9"/>
+          </a:p>
+        </p:txBody>
+      </p:sp>
+      <p:sp>
+        <p:nvSpPr>
+          <p:cNvPr id="12" name="TextBox 11"/>
+          <p:cNvSpPr txBox="1"/>
+          <p:nvPr/>
+        </p:nvSpPr>
+        <p:spPr>
+          <a:xfrm>
+            <a:off x="6144768" y="2624328"/>
+            <a:ext cx="2743200" cy="457200"/>
+          </a:xfrm>
+          <a:prstGeom prst="rect">
+            <a:avLst/>
+          </a:prstGeom>
+          <a:noFill/>
+        </p:spPr>
+        <p:txBody>
+          <a:bodyPr wrap="square" lIns="0" rIns="0" tIns="0" bIns="0" anchor="t">
+            <a:spAutoFit/>
+          </a:bodyPr>
+          <a:lstStyle/>
+          <a:p>
+            <a:pPr algn="l"/>
+            <a:r>
+              <a:rPr sz="1500" b="1" i="0">
+                <a:solidFill>
+                  <a:srgbClr val="B23A34"/>
+                </a:solidFill>
+                <a:latin typeface="Arial"/>
+              </a:rPr>
+              <a:t>0.901</a:t>
+            </a:r>
+          </a:p>
+        </p:txBody>
+      </p:sp>
+      <p:sp>
+        <p:nvSpPr>
+          <p:cNvPr id="13" name="TextBox 12"/>
+          <p:cNvSpPr txBox="1"/>
+          <p:nvPr/>
+        </p:nvSpPr>
+        <p:spPr>
+          <a:xfrm>
+            <a:off x="8887968" y="2624328"/>
+            <a:ext cx="2286000" cy="457200"/>
+          </a:xfrm>
+          <a:prstGeom prst="rect">
+            <a:avLst/>
+          </a:prstGeom>
+          <a:noFill/>
+        </p:spPr>
+        <p:txBody>
+          <a:bodyPr wrap="square" lIns="0" rIns="0" tIns="0" bIns="0" anchor="t">
+            <a:spAutoFit/>
+          </a:bodyPr>
+          <a:lstStyle/>
+          <a:p>
+            <a:pPr algn="l"/>
+            <a:r>
+              <a:rPr sz="1400" b="1" i="0">
+                <a:solidFill>
+                  <a:srgbClr val="B23A34"/>
+                </a:solidFill>
+                <a:latin typeface="Arial"/>
+              </a:rPr>
+              <a:t>99.8%</a:t>
+            </a:r>
+          </a:p>
+        </p:txBody>
+      </p:sp>
+      <p:sp>
+        <p:nvSpPr>
+          <p:cNvPr id="14" name="Rectangle 13"/>
           <p:cNvSpPr/>
           <p:nvPr/>
         </p:nvSpPr>
         <p:spPr>
           <a:xfrm>
-            <a:off x="566928" y="3310128"/>
+            <a:off x="566928" y="3008376"/>
             <a:ext cx="11057839" cy="9525"/>
           </a:xfrm>
           <a:prstGeom prst="rect">
@@ -7064,14 +6863,14 @@
       </p:sp>
       <p:sp>
         <p:nvSpPr>
-          <p:cNvPr id="11" name="TextBox 10"/>
+          <p:cNvPr id="15" name="TextBox 14"/>
           <p:cNvSpPr txBox="1"/>
           <p:nvPr/>
         </p:nvSpPr>
         <p:spPr>
           <a:xfrm>
-            <a:off x="566928" y="3383280"/>
-            <a:ext cx="3291840" cy="530352"/>
+            <a:off x="566928" y="3081528"/>
+            <a:ext cx="3108960" cy="457200"/>
           </a:xfrm>
           <a:prstGeom prst="rect">
             <a:avLst/>
@@ -7099,14 +6898,14 @@
       </p:sp>
       <p:sp>
         <p:nvSpPr>
-          <p:cNvPr id="12" name="TextBox 11"/>
+          <p:cNvPr id="16" name="TextBox 15"/>
           <p:cNvSpPr txBox="1"/>
           <p:nvPr/>
         </p:nvSpPr>
         <p:spPr>
           <a:xfrm>
-            <a:off x="3858768" y="3383280"/>
-            <a:ext cx="3474720" cy="530352"/>
+            <a:off x="3675888" y="3081528"/>
+            <a:ext cx="2468880" cy="457200"/>
           </a:xfrm>
           <a:prstGeom prst="rect">
             <a:avLst/>
@@ -7129,27 +6928,88 @@
               </a:rPr>
               <a:t>0.801</a:t>
             </a:r>
-            <a:r>
-              <a:rPr sz="1150" b="0" i="0">
-                <a:solidFill>
-                  <a:srgbClr val="79828F"/>
-                </a:solidFill>
-                <a:latin typeface="Arial"/>
-              </a:rPr>
-              <a:t>  [0.751, 0.846]</a:t>
-            </a:r>
-          </a:p>
-        </p:txBody>
-      </p:sp>
-      <p:sp>
-        <p:nvSpPr>
-          <p:cNvPr id="13" name="Rectangle 12"/>
+          </a:p>
+        </p:txBody>
+      </p:sp>
+      <p:sp>
+        <p:nvSpPr>
+          <p:cNvPr id="17" name="TextBox 16"/>
+          <p:cNvSpPr txBox="1"/>
+          <p:nvPr/>
+        </p:nvSpPr>
+        <p:spPr>
+          <a:xfrm>
+            <a:off x="6144768" y="3081528"/>
+            <a:ext cx="2743200" cy="457200"/>
+          </a:xfrm>
+          <a:prstGeom prst="rect">
+            <a:avLst/>
+          </a:prstGeom>
+          <a:noFill/>
+        </p:spPr>
+        <p:txBody>
+          <a:bodyPr wrap="square" lIns="0" rIns="0" tIns="0" bIns="0" anchor="t">
+            <a:spAutoFit/>
+          </a:bodyPr>
+          <a:lstStyle/>
+          <a:p>
+            <a:pPr algn="l"/>
+            <a:r>
+              <a:rPr sz="1500" b="1" i="0">
+                <a:solidFill>
+                  <a:srgbClr val="B23A34"/>
+                </a:solidFill>
+                <a:latin typeface="Arial"/>
+              </a:rPr>
+              <a:t>0.868</a:t>
+            </a:r>
+          </a:p>
+        </p:txBody>
+      </p:sp>
+      <p:sp>
+        <p:nvSpPr>
+          <p:cNvPr id="18" name="TextBox 17"/>
+          <p:cNvSpPr txBox="1"/>
+          <p:nvPr/>
+        </p:nvSpPr>
+        <p:spPr>
+          <a:xfrm>
+            <a:off x="8887968" y="3081528"/>
+            <a:ext cx="2286000" cy="457200"/>
+          </a:xfrm>
+          <a:prstGeom prst="rect">
+            <a:avLst/>
+          </a:prstGeom>
+          <a:noFill/>
+        </p:spPr>
+        <p:txBody>
+          <a:bodyPr wrap="square" lIns="0" rIns="0" tIns="0" bIns="0" anchor="t">
+            <a:spAutoFit/>
+          </a:bodyPr>
+          <a:lstStyle/>
+          <a:p>
+            <a:pPr algn="l"/>
+            <a:r>
+              <a:rPr sz="1400" b="1" i="0">
+                <a:solidFill>
+                  <a:srgbClr val="B23A34"/>
+                </a:solidFill>
+                <a:latin typeface="Arial"/>
+              </a:rPr>
+              <a:t>100%</a:t>
+            </a:r>
+          </a:p>
+        </p:txBody>
+      </p:sp>
+      <p:sp>
+        <p:nvSpPr>
+          <p:cNvPr id="19" name="Rectangle 18"/>
           <p:cNvSpPr/>
           <p:nvPr/>
         </p:nvSpPr>
         <p:spPr>
           <a:xfrm>
-            <a:off x="566928" y="3840480"/>
+            <a:off x="566928" y="3465576"/>
             <a:ext cx="11057839" cy="9525"/>
           </a:xfrm>
           <a:prstGeom prst="rect">
@@ -7187,14 +7047,14 @@
       </p:sp>
       <p:sp>
         <p:nvSpPr>
-          <p:cNvPr id="14" name="TextBox 13"/>
+          <p:cNvPr id="20" name="TextBox 19"/>
           <p:cNvSpPr txBox="1"/>
           <p:nvPr/>
         </p:nvSpPr>
         <p:spPr>
           <a:xfrm>
-            <a:off x="566928" y="3913632"/>
-            <a:ext cx="3291840" cy="530352"/>
+            <a:off x="566928" y="3538728"/>
+            <a:ext cx="3108960" cy="457200"/>
           </a:xfrm>
           <a:prstGeom prst="rect">
             <a:avLst/>
@@ -7222,14 +7082,14 @@
       </p:sp>
       <p:sp>
         <p:nvSpPr>
-          <p:cNvPr id="15" name="TextBox 14"/>
+          <p:cNvPr id="21" name="TextBox 20"/>
           <p:cNvSpPr txBox="1"/>
           <p:nvPr/>
         </p:nvSpPr>
         <p:spPr>
           <a:xfrm>
-            <a:off x="3858768" y="3913632"/>
-            <a:ext cx="3474720" cy="530352"/>
+            <a:off x="3675888" y="3538728"/>
+            <a:ext cx="2468880" cy="457200"/>
           </a:xfrm>
           <a:prstGeom prst="rect">
             <a:avLst/>
@@ -7252,27 +7112,88 @@
               </a:rPr>
               <a:t>0.775</a:t>
             </a:r>
-            <a:r>
-              <a:rPr sz="1150" b="0" i="0">
-                <a:solidFill>
-                  <a:srgbClr val="79828F"/>
-                </a:solidFill>
-                <a:latin typeface="Arial"/>
-              </a:rPr>
-              <a:t>  [0.694, 0.848]</a:t>
-            </a:r>
-          </a:p>
-        </p:txBody>
-      </p:sp>
-      <p:sp>
-        <p:nvSpPr>
-          <p:cNvPr id="16" name="Rectangle 15"/>
+          </a:p>
+        </p:txBody>
+      </p:sp>
+      <p:sp>
+        <p:nvSpPr>
+          <p:cNvPr id="22" name="TextBox 21"/>
+          <p:cNvSpPr txBox="1"/>
+          <p:nvPr/>
+        </p:nvSpPr>
+        <p:spPr>
+          <a:xfrm>
+            <a:off x="6144768" y="3538728"/>
+            <a:ext cx="2743200" cy="457200"/>
+          </a:xfrm>
+          <a:prstGeom prst="rect">
+            <a:avLst/>
+          </a:prstGeom>
+          <a:noFill/>
+        </p:spPr>
+        <p:txBody>
+          <a:bodyPr wrap="square" lIns="0" rIns="0" tIns="0" bIns="0" anchor="t">
+            <a:spAutoFit/>
+          </a:bodyPr>
+          <a:lstStyle/>
+          <a:p>
+            <a:pPr algn="l"/>
+            <a:r>
+              <a:rPr sz="1500" b="1" i="0">
+                <a:solidFill>
+                  <a:srgbClr val="B23A34"/>
+                </a:solidFill>
+                <a:latin typeface="Arial"/>
+              </a:rPr>
+              <a:t>0.831</a:t>
+            </a:r>
+          </a:p>
+        </p:txBody>
+      </p:sp>
+      <p:sp>
+        <p:nvSpPr>
+          <p:cNvPr id="23" name="TextBox 22"/>
+          <p:cNvSpPr txBox="1"/>
+          <p:nvPr/>
+        </p:nvSpPr>
+        <p:spPr>
+          <a:xfrm>
+            <a:off x="8887968" y="3538728"/>
+            <a:ext cx="2286000" cy="457200"/>
+          </a:xfrm>
+          <a:prstGeom prst="rect">
+            <a:avLst/>
+          </a:prstGeom>
+          <a:noFill/>
+        </p:spPr>
+        <p:txBody>
+          <a:bodyPr wrap="square" lIns="0" rIns="0" tIns="0" bIns="0" anchor="t">
+            <a:spAutoFit/>
+          </a:bodyPr>
+          <a:lstStyle/>
+          <a:p>
+            <a:pPr algn="l"/>
+            <a:r>
+              <a:rPr sz="1400" b="1" i="0">
+                <a:solidFill>
+                  <a:srgbClr val="B23A34"/>
+                </a:solidFill>
+                <a:latin typeface="Arial"/>
+              </a:rPr>
+              <a:t>97.2%</a:t>
+            </a:r>
+          </a:p>
+        </p:txBody>
+      </p:sp>
+      <p:sp>
+        <p:nvSpPr>
+          <p:cNvPr id="24" name="Rectangle 23"/>
           <p:cNvSpPr/>
           <p:nvPr/>
         </p:nvSpPr>
         <p:spPr>
           <a:xfrm>
-            <a:off x="566928" y="4370832"/>
+            <a:off x="566928" y="3922776"/>
             <a:ext cx="11057839" cy="9525"/>
           </a:xfrm>
           <a:prstGeom prst="rect">
@@ -7310,14 +7231,14 @@
       </p:sp>
       <p:sp>
         <p:nvSpPr>
-          <p:cNvPr id="17" name="Rectangle 16"/>
+          <p:cNvPr id="25" name="Rectangle 24"/>
           <p:cNvSpPr/>
           <p:nvPr/>
         </p:nvSpPr>
         <p:spPr>
           <a:xfrm>
-            <a:off x="566928" y="4572000"/>
-            <a:ext cx="11057839" cy="1234440"/>
+            <a:off x="566928" y="4297680"/>
+            <a:ext cx="11057839" cy="1737360"/>
           </a:xfrm>
           <a:prstGeom prst="rect">
             <a:avLst/>
@@ -7356,20 +7277,20 @@
       </p:sp>
       <p:sp>
         <p:nvSpPr>
-          <p:cNvPr id="18" name="Rectangle 17"/>
+          <p:cNvPr id="26" name="Rectangle 25"/>
           <p:cNvSpPr/>
           <p:nvPr/>
         </p:nvSpPr>
         <p:spPr>
           <a:xfrm>
-            <a:off x="566928" y="4572000"/>
+            <a:off x="566928" y="4297680"/>
             <a:ext cx="11057839" cy="41148"/>
           </a:xfrm>
           <a:prstGeom prst="rect">
             <a:avLst/>
           </a:prstGeom>
           <a:solidFill>
-            <a:srgbClr val="1B7A4B"/>
+            <a:srgbClr val="B23A34"/>
           </a:solidFill>
           <a:ln>
             <a:noFill/>
@@ -7400,14 +7321,14 @@
       </p:sp>
       <p:sp>
         <p:nvSpPr>
-          <p:cNvPr id="19" name="TextBox 18"/>
+          <p:cNvPr id="27" name="TextBox 26"/>
           <p:cNvSpPr txBox="1"/>
           <p:nvPr/>
         </p:nvSpPr>
         <p:spPr>
           <a:xfrm>
-            <a:off x="886968" y="4846320"/>
-            <a:ext cx="10789920" cy="822960"/>
+            <a:off x="886968" y="4526280"/>
+            <a:ext cx="10789920" cy="1463040"/>
           </a:xfrm>
           <a:prstGeom prst="rect">
             <a:avLst/>
@@ -7422,19 +7343,19 @@
           <a:p>
             <a:pPr algn="l"/>
             <a:r>
-              <a:rPr sz="2000" b="1" i="0">
+              <a:rPr sz="1900" b="1" i="0">
                 <a:solidFill>
                   <a:srgbClr val="171A21"/>
                 </a:solidFill>
                 <a:latin typeface="Georgia"/>
               </a:rPr>
-              <a:t>Three independently built models. Intervals overlap.</a:t>
+              <a:t>Inside one label group, “was it correct” IS “what did it answer”.</a:t>
             </a:r>
           </a:p>
           <a:p>
             <a:pPr>
               <a:spcBef>
-                <a:spcPts val="700"/>
+                <a:spcPts val="800"/>
               </a:spcBef>
             </a:pPr>
             <a:r>
@@ -7444,14 +7365,39 @@
                 </a:solidFill>
                 <a:latin typeface="Arial"/>
               </a:rPr>
-              <a:t>Not a quirk of one model.</a:t>
-            </a:r>
-          </a:p>
-        </p:txBody>
-      </p:sp>
-      <p:sp>
-        <p:nvSpPr>
-          <p:cNvPr id="20" name="TextBox 19"/>
+              <a:t>The same column, 100% of the time. Entropy is computed from those very votes, so it predicts correctness almost by definition. </a:t>
+            </a:r>
+            <a:r>
+              <a:rPr sz="1350" b="1" i="0">
+                <a:solidFill>
+                  <a:srgbClr val="B23A34"/>
+                </a:solidFill>
+                <a:latin typeface="Arial"/>
+              </a:rPr>
+              <a:t>A coin with no signal scores higher than we did.</a:t>
+            </a:r>
+          </a:p>
+          <a:p>
+            <a:pPr>
+              <a:spcBef>
+                <a:spcPts val="600"/>
+              </a:spcBef>
+            </a:pPr>
+            <a:r>
+              <a:rPr sz="1300" b="0" i="1">
+                <a:solidFill>
+                  <a:srgbClr val="79828F"/>
+                </a:solidFill>
+                <a:latin typeface="Arial"/>
+              </a:rPr>
+              <a:t>Not caught by pre-registration, by power, or by replicating it three times.</a:t>
+            </a:r>
+          </a:p>
+        </p:txBody>
+      </p:sp>
+      <p:sp>
+        <p:nvSpPr>
+          <p:cNvPr id="28" name="TextBox 27"/>
           <p:cNvSpPr txBox="1"/>
           <p:nvPr/>
         </p:nvSpPr>
@@ -7497,14 +7443,14 @@
                 </a:solidFill>
                 <a:latin typeface="Arial"/>
               </a:rPr>
-              <a:t>reasoning — grading the page</a:t>
-            </a:r>
-          </a:p>
-        </p:txBody>
-      </p:sp>
-      <p:sp>
-        <p:nvSpPr>
-          <p:cNvPr id="21" name="TextBox 20"/>
+              <a:t>reasoning — retracted 2026-08-09</a:t>
+            </a:r>
+          </a:p>
+        </p:txBody>
+      </p:sp>
+      <p:sp>
+        <p:nvSpPr>
+          <p:cNvPr id="29" name="TextBox 28"/>
           <p:cNvSpPr txBox="1"/>
           <p:nvPr/>
         </p:nvSpPr>
@@ -8451,7 +8397,7 @@
                 </a:solidFill>
                 <a:latin typeface="Arial"/>
               </a:rPr>
-              <a:t>— Reasoning: confirmed on 3 model families</a:t>
+              <a:t>— Reasoning: no signal — measured, not assumed</a:t>
             </a:r>
           </a:p>
           <a:p>
@@ -8467,7 +8413,7 @@
                 </a:solidFill>
                 <a:latin typeface="Arial"/>
               </a:rPr>
-              <a:t>— Pooled-vs-split: a method contribution</a:t>
+              <a:t>— The stratification trap: a method finding</a:t>
             </a:r>
           </a:p>
         </p:txBody>

--- a/slides/fermat_findings.pptx
+++ b/slides/fermat_findings.pptx
@@ -3934,7 +3934,7 @@
         </p:nvSpPr>
         <p:spPr>
           <a:xfrm>
-            <a:off x="566928" y="2651760"/>
+            <a:off x="566928" y="2487168"/>
             <a:ext cx="3566160" cy="237744"/>
           </a:xfrm>
           <a:prstGeom prst="rect">
@@ -3969,7 +3969,7 @@
         </p:nvSpPr>
         <p:spPr>
           <a:xfrm>
-            <a:off x="4133088" y="2651760"/>
+            <a:off x="4133088" y="2487168"/>
             <a:ext cx="2743200" cy="237744"/>
           </a:xfrm>
           <a:prstGeom prst="rect">
@@ -4004,7 +4004,7 @@
         </p:nvSpPr>
         <p:spPr>
           <a:xfrm>
-            <a:off x="566928" y="2926080"/>
+            <a:off x="566928" y="2761488"/>
             <a:ext cx="11057839" cy="9525"/>
           </a:xfrm>
           <a:prstGeom prst="rect">
@@ -4048,8 +4048,8 @@
         </p:nvSpPr>
         <p:spPr>
           <a:xfrm>
-            <a:off x="566928" y="3035808"/>
-            <a:ext cx="3566160" cy="512064"/>
+            <a:off x="566928" y="2871216"/>
+            <a:ext cx="3566160" cy="457200"/>
           </a:xfrm>
           <a:prstGeom prst="rect">
             <a:avLst/>
@@ -4083,8 +4083,8 @@
         </p:nvSpPr>
         <p:spPr>
           <a:xfrm>
-            <a:off x="4133088" y="3035808"/>
-            <a:ext cx="2743200" cy="512064"/>
+            <a:off x="4133088" y="2871216"/>
+            <a:ext cx="2743200" cy="457200"/>
           </a:xfrm>
           <a:prstGeom prst="rect">
             <a:avLst/>
@@ -4127,7 +4127,7 @@
         </p:nvSpPr>
         <p:spPr>
           <a:xfrm>
-            <a:off x="566928" y="3474720"/>
+            <a:off x="566928" y="3255264"/>
             <a:ext cx="11057839" cy="9525"/>
           </a:xfrm>
           <a:prstGeom prst="rect">
@@ -4171,8 +4171,8 @@
         </p:nvSpPr>
         <p:spPr>
           <a:xfrm>
-            <a:off x="566928" y="3547872"/>
-            <a:ext cx="3566160" cy="512064"/>
+            <a:off x="566928" y="3328416"/>
+            <a:ext cx="3566160" cy="457200"/>
           </a:xfrm>
           <a:prstGeom prst="rect">
             <a:avLst/>
@@ -4206,8 +4206,8 @@
         </p:nvSpPr>
         <p:spPr>
           <a:xfrm>
-            <a:off x="4133088" y="3547872"/>
-            <a:ext cx="2743200" cy="512064"/>
+            <a:off x="4133088" y="3328416"/>
+            <a:ext cx="2743200" cy="457200"/>
           </a:xfrm>
           <a:prstGeom prst="rect">
             <a:avLst/>
@@ -4250,7 +4250,7 @@
         </p:nvSpPr>
         <p:spPr>
           <a:xfrm>
-            <a:off x="566928" y="3986784"/>
+            <a:off x="566928" y="3712464"/>
             <a:ext cx="11057839" cy="9525"/>
           </a:xfrm>
           <a:prstGeom prst="rect">
@@ -4294,8 +4294,8 @@
         </p:nvSpPr>
         <p:spPr>
           <a:xfrm>
-            <a:off x="566928" y="4059936"/>
-            <a:ext cx="3566160" cy="512064"/>
+            <a:off x="566928" y="3785616"/>
+            <a:ext cx="3566160" cy="457200"/>
           </a:xfrm>
           <a:prstGeom prst="rect">
             <a:avLst/>
@@ -4329,8 +4329,8 @@
         </p:nvSpPr>
         <p:spPr>
           <a:xfrm>
-            <a:off x="4133088" y="4059936"/>
-            <a:ext cx="2743200" cy="512064"/>
+            <a:off x="4133088" y="3785616"/>
+            <a:ext cx="2743200" cy="457200"/>
           </a:xfrm>
           <a:prstGeom prst="rect">
             <a:avLst/>
@@ -4373,7 +4373,7 @@
         </p:nvSpPr>
         <p:spPr>
           <a:xfrm>
-            <a:off x="566928" y="4498848"/>
+            <a:off x="566928" y="4169664"/>
             <a:ext cx="11057839" cy="9525"/>
           </a:xfrm>
           <a:prstGeom prst="rect">
@@ -4417,8 +4417,8 @@
         </p:nvSpPr>
         <p:spPr>
           <a:xfrm>
-            <a:off x="566928" y="4462272"/>
-            <a:ext cx="5943600" cy="640080"/>
+            <a:off x="566928" y="4114800"/>
+            <a:ext cx="5943600" cy="548640"/>
           </a:xfrm>
           <a:prstGeom prst="rect">
             <a:avLst/>
@@ -4452,8 +4452,8 @@
         </p:nvSpPr>
         <p:spPr>
           <a:xfrm>
-            <a:off x="7223760" y="2560320"/>
-            <a:ext cx="4389120" cy="2286000"/>
+            <a:off x="7223760" y="2377440"/>
+            <a:ext cx="4389120" cy="2011680"/>
           </a:xfrm>
           <a:prstGeom prst="rect">
             <a:avLst/>
@@ -4498,7 +4498,7 @@
         </p:nvSpPr>
         <p:spPr>
           <a:xfrm>
-            <a:off x="7223760" y="2560320"/>
+            <a:off x="7223760" y="2377440"/>
             <a:ext cx="4389120" cy="41148"/>
           </a:xfrm>
           <a:prstGeom prst="rect">
@@ -4542,8 +4542,8 @@
         </p:nvSpPr>
         <p:spPr>
           <a:xfrm>
-            <a:off x="7516368" y="2880360"/>
-            <a:ext cx="3840480" cy="1828800"/>
+            <a:off x="7516368" y="2633472"/>
+            <a:ext cx="3840480" cy="1737360"/>
           </a:xfrm>
           <a:prstGeom prst="rect">
             <a:avLst/>
@@ -4603,14 +4603,104 @@
       </p:sp>
       <p:sp>
         <p:nvSpPr>
-          <p:cNvPr id="21" name="TextBox 20"/>
+          <p:cNvPr id="21" name="Rectangle 20"/>
+          <p:cNvSpPr/>
+          <p:nvPr/>
+        </p:nvSpPr>
+        <p:spPr>
+          <a:xfrm>
+            <a:off x="566928" y="4864608"/>
+            <a:ext cx="11057839" cy="1371600"/>
+          </a:xfrm>
+          <a:prstGeom prst="rect">
+            <a:avLst/>
+          </a:prstGeom>
+          <a:solidFill>
+            <a:srgbClr val="F5F7FA"/>
+          </a:solidFill>
+          <a:ln w="9525">
+            <a:solidFill>
+              <a:srgbClr val="DDE2EA"/>
+            </a:solidFill>
+          </a:ln>
+          <a:effectLst/>
+        </p:spPr>
+        <p:style>
+          <a:lnRef idx="1">
+            <a:schemeClr val="accent1"/>
+          </a:lnRef>
+          <a:fillRef idx="3">
+            <a:schemeClr val="accent1"/>
+          </a:fillRef>
+          <a:effectRef idx="2">
+            <a:schemeClr val="accent1"/>
+          </a:effectRef>
+          <a:fontRef idx="minor">
+            <a:schemeClr val="lt1"/>
+          </a:fontRef>
+        </p:style>
+        <p:txBody>
+          <a:bodyPr rtlCol="0" anchor="ctr"/>
+          <a:lstStyle/>
+          <a:p>
+            <a:pPr algn="ctr"/>
+          </a:p>
+        </p:txBody>
+      </p:sp>
+      <p:sp>
+        <p:nvSpPr>
+          <p:cNvPr id="22" name="Rectangle 21"/>
+          <p:cNvSpPr/>
+          <p:nvPr/>
+        </p:nvSpPr>
+        <p:spPr>
+          <a:xfrm>
+            <a:off x="566928" y="4864608"/>
+            <a:ext cx="11057839" cy="41148"/>
+          </a:xfrm>
+          <a:prstGeom prst="rect">
+            <a:avLst/>
+          </a:prstGeom>
+          <a:solidFill>
+            <a:srgbClr val="2F5D8C"/>
+          </a:solidFill>
+          <a:ln>
+            <a:noFill/>
+          </a:ln>
+          <a:effectLst/>
+        </p:spPr>
+        <p:style>
+          <a:lnRef idx="1">
+            <a:schemeClr val="accent1"/>
+          </a:lnRef>
+          <a:fillRef idx="3">
+            <a:schemeClr val="accent1"/>
+          </a:fillRef>
+          <a:effectRef idx="2">
+            <a:schemeClr val="accent1"/>
+          </a:effectRef>
+          <a:fontRef idx="minor">
+            <a:schemeClr val="lt1"/>
+          </a:fontRef>
+        </p:style>
+        <p:txBody>
+          <a:bodyPr rtlCol="0" anchor="ctr"/>
+          <a:lstStyle/>
+          <a:p>
+            <a:pPr algn="ctr"/>
+          </a:p>
+        </p:txBody>
+      </p:sp>
+      <p:sp>
+        <p:nvSpPr>
+          <p:cNvPr id="23" name="TextBox 22"/>
           <p:cNvSpPr txBox="1"/>
           <p:nvPr/>
         </p:nvSpPr>
         <p:spPr>
           <a:xfrm>
-            <a:off x="566928" y="6364224"/>
-            <a:ext cx="8229600" cy="292608"/>
+            <a:off x="841248" y="5029200"/>
+            <a:ext cx="3291840" cy="1143000"/>
           </a:xfrm>
           <a:prstGeom prst="rect">
             <a:avLst/>
@@ -4631,6 +4721,809 @@
                 </a:solidFill>
                 <a:latin typeface="Arial"/>
               </a:rPr>
+              <a:t>ACROSS MODEL FAMILIES</a:t>
+            </a:r>
+          </a:p>
+          <a:p>
+            <a:pPr>
+              <a:spcBef>
+                <a:spcPts val="500"/>
+              </a:spcBef>
+            </a:pPr>
+            <a:r>
+              <a:rPr sz="1250" b="0" i="0">
+                <a:solidFill>
+                  <a:srgbClr val="4A5260"/>
+                </a:solidFill>
+                <a:latin typeface="Arial"/>
+              </a:rPr>
+              <a:t>A high score means nothing until the control is applied.</a:t>
+            </a:r>
+          </a:p>
+          <a:p>
+            <a:pPr>
+              <a:spcBef>
+                <a:spcPts val="400"/>
+              </a:spcBef>
+            </a:pPr>
+            <a:r>
+              <a:rPr sz="1150" b="0" i="0">
+                <a:solidFill>
+                  <a:srgbClr val="79828F"/>
+                </a:solidFill>
+                <a:latin typeface="Arial"/>
+              </a:rPr>
+              <a:t>A fourth, LLaVA-NeXT-7B, could not read the pages at all.</a:t>
+            </a:r>
+          </a:p>
+        </p:txBody>
+      </p:sp>
+      <p:sp>
+        <p:nvSpPr>
+          <p:cNvPr id="24" name="TextBox 23"/>
+          <p:cNvSpPr txBox="1"/>
+          <p:nvPr/>
+        </p:nvSpPr>
+        <p:spPr>
+          <a:xfrm>
+            <a:off x="4389120" y="5029200"/>
+            <a:ext cx="2194560" cy="237744"/>
+          </a:xfrm>
+          <a:prstGeom prst="rect">
+            <a:avLst/>
+          </a:prstGeom>
+          <a:noFill/>
+        </p:spPr>
+        <p:txBody>
+          <a:bodyPr wrap="square" lIns="0" rIns="0" tIns="0" bIns="0" anchor="t">
+            <a:spAutoFit/>
+          </a:bodyPr>
+          <a:lstStyle/>
+          <a:p>
+            <a:pPr algn="l"/>
+            <a:r>
+              <a:rPr sz="950" b="1" i="0">
+                <a:solidFill>
+                  <a:srgbClr val="79828F"/>
+                </a:solidFill>
+                <a:latin typeface="Arial"/>
+              </a:rPr>
+              <a:t/>
+            </a:r>
+          </a:p>
+        </p:txBody>
+      </p:sp>
+      <p:sp>
+        <p:nvSpPr>
+          <p:cNvPr id="25" name="TextBox 24"/>
+          <p:cNvSpPr txBox="1"/>
+          <p:nvPr/>
+        </p:nvSpPr>
+        <p:spPr>
+          <a:xfrm>
+            <a:off x="6583680" y="5029200"/>
+            <a:ext cx="1280160" cy="237744"/>
+          </a:xfrm>
+          <a:prstGeom prst="rect">
+            <a:avLst/>
+          </a:prstGeom>
+          <a:noFill/>
+        </p:spPr>
+        <p:txBody>
+          <a:bodyPr wrap="square" lIns="0" rIns="0" tIns="0" bIns="0" anchor="t">
+            <a:spAutoFit/>
+          </a:bodyPr>
+          <a:lstStyle/>
+          <a:p>
+            <a:pPr algn="l"/>
+            <a:r>
+              <a:rPr sz="950" b="1" i="0">
+                <a:solidFill>
+                  <a:srgbClr val="79828F"/>
+                </a:solidFill>
+                <a:latin typeface="Arial"/>
+              </a:rPr>
+              <a:t>AUROC</a:t>
+            </a:r>
+          </a:p>
+        </p:txBody>
+      </p:sp>
+      <p:sp>
+        <p:nvSpPr>
+          <p:cNvPr id="26" name="TextBox 25"/>
+          <p:cNvSpPr txBox="1"/>
+          <p:nvPr/>
+        </p:nvSpPr>
+        <p:spPr>
+          <a:xfrm>
+            <a:off x="7863840" y="5029200"/>
+            <a:ext cx="1737360" cy="237744"/>
+          </a:xfrm>
+          <a:prstGeom prst="rect">
+            <a:avLst/>
+          </a:prstGeom>
+          <a:noFill/>
+        </p:spPr>
+        <p:txBody>
+          <a:bodyPr wrap="square" lIns="0" rIns="0" tIns="0" bIns="0" anchor="t">
+            <a:spAutoFit/>
+          </a:bodyPr>
+          <a:lstStyle/>
+          <a:p>
+            <a:pPr algn="l"/>
+            <a:r>
+              <a:rPr sz="950" b="1" i="0">
+                <a:solidFill>
+                  <a:srgbClr val="79828F"/>
+                </a:solidFill>
+                <a:latin typeface="Arial"/>
+              </a:rPr>
+              <a:t>AFTER CONTROL</a:t>
+            </a:r>
+          </a:p>
+        </p:txBody>
+      </p:sp>
+      <p:sp>
+        <p:nvSpPr>
+          <p:cNvPr id="27" name="TextBox 26"/>
+          <p:cNvSpPr txBox="1"/>
+          <p:nvPr/>
+        </p:nvSpPr>
+        <p:spPr>
+          <a:xfrm>
+            <a:off x="9601200" y="5029200"/>
+            <a:ext cx="2011680" cy="237744"/>
+          </a:xfrm>
+          <a:prstGeom prst="rect">
+            <a:avLst/>
+          </a:prstGeom>
+          <a:noFill/>
+        </p:spPr>
+        <p:txBody>
+          <a:bodyPr wrap="square" lIns="0" rIns="0" tIns="0" bIns="0" anchor="t">
+            <a:spAutoFit/>
+          </a:bodyPr>
+          <a:lstStyle/>
+          <a:p>
+            <a:pPr algn="l"/>
+            <a:r>
+              <a:rPr sz="950" b="1" i="0">
+                <a:solidFill>
+                  <a:srgbClr val="79828F"/>
+                </a:solidFill>
+                <a:latin typeface="Arial"/>
+              </a:rPr>
+              <a:t/>
+            </a:r>
+          </a:p>
+        </p:txBody>
+      </p:sp>
+      <p:sp>
+        <p:nvSpPr>
+          <p:cNvPr id="28" name="Rectangle 27"/>
+          <p:cNvSpPr/>
+          <p:nvPr/>
+        </p:nvSpPr>
+        <p:spPr>
+          <a:xfrm>
+            <a:off x="566928" y="5303520"/>
+            <a:ext cx="11057839" cy="9525"/>
+          </a:xfrm>
+          <a:prstGeom prst="rect">
+            <a:avLst/>
+          </a:prstGeom>
+          <a:solidFill>
+            <a:srgbClr val="DDE2EA"/>
+          </a:solidFill>
+          <a:ln>
+            <a:noFill/>
+          </a:ln>
+          <a:effectLst/>
+        </p:spPr>
+        <p:style>
+          <a:lnRef idx="1">
+            <a:schemeClr val="accent1"/>
+          </a:lnRef>
+          <a:fillRef idx="3">
+            <a:schemeClr val="accent1"/>
+          </a:fillRef>
+          <a:effectRef idx="2">
+            <a:schemeClr val="accent1"/>
+          </a:effectRef>
+          <a:fontRef idx="minor">
+            <a:schemeClr val="lt1"/>
+          </a:fontRef>
+        </p:style>
+        <p:txBody>
+          <a:bodyPr rtlCol="0" anchor="ctr"/>
+          <a:lstStyle/>
+          <a:p>
+            <a:pPr algn="ctr"/>
+          </a:p>
+        </p:txBody>
+      </p:sp>
+      <p:sp>
+        <p:nvSpPr>
+          <p:cNvPr id="29" name="TextBox 28"/>
+          <p:cNvSpPr txBox="1"/>
+          <p:nvPr/>
+        </p:nvSpPr>
+        <p:spPr>
+          <a:xfrm>
+            <a:off x="4389120" y="5413248"/>
+            <a:ext cx="2194560" cy="265176"/>
+          </a:xfrm>
+          <a:prstGeom prst="rect">
+            <a:avLst/>
+          </a:prstGeom>
+          <a:noFill/>
+        </p:spPr>
+        <p:txBody>
+          <a:bodyPr wrap="square" lIns="0" rIns="0" tIns="0" bIns="0" anchor="t">
+            <a:spAutoFit/>
+          </a:bodyPr>
+          <a:lstStyle/>
+          <a:p>
+            <a:pPr algn="l"/>
+            <a:r>
+              <a:rPr sz="1300" b="1" i="0">
+                <a:solidFill>
+                  <a:srgbClr val="171A21"/>
+                </a:solidFill>
+                <a:latin typeface="Arial"/>
+              </a:rPr>
+              <a:t>Qwen2.5-VL-3B</a:t>
+            </a:r>
+          </a:p>
+        </p:txBody>
+      </p:sp>
+      <p:sp>
+        <p:nvSpPr>
+          <p:cNvPr id="30" name="TextBox 29"/>
+          <p:cNvSpPr txBox="1"/>
+          <p:nvPr/>
+        </p:nvSpPr>
+        <p:spPr>
+          <a:xfrm>
+            <a:off x="6583680" y="5413248"/>
+            <a:ext cx="1280160" cy="265176"/>
+          </a:xfrm>
+          <a:prstGeom prst="rect">
+            <a:avLst/>
+          </a:prstGeom>
+          <a:noFill/>
+        </p:spPr>
+        <p:txBody>
+          <a:bodyPr wrap="square" lIns="0" rIns="0" tIns="0" bIns="0" anchor="t">
+            <a:spAutoFit/>
+          </a:bodyPr>
+          <a:lstStyle/>
+          <a:p>
+            <a:pPr algn="l"/>
+            <a:r>
+              <a:rPr sz="1300" b="1" i="0">
+                <a:solidFill>
+                  <a:srgbClr val="1B7A4B"/>
+                </a:solidFill>
+                <a:latin typeface="Arial"/>
+              </a:rPr>
+              <a:t>0.835</a:t>
+            </a:r>
+          </a:p>
+        </p:txBody>
+      </p:sp>
+      <p:sp>
+        <p:nvSpPr>
+          <p:cNvPr id="31" name="TextBox 30"/>
+          <p:cNvSpPr txBox="1"/>
+          <p:nvPr/>
+        </p:nvSpPr>
+        <p:spPr>
+          <a:xfrm>
+            <a:off x="7863840" y="5413248"/>
+            <a:ext cx="1737360" cy="265176"/>
+          </a:xfrm>
+          <a:prstGeom prst="rect">
+            <a:avLst/>
+          </a:prstGeom>
+          <a:noFill/>
+        </p:spPr>
+        <p:txBody>
+          <a:bodyPr wrap="square" lIns="0" rIns="0" tIns="0" bIns="0" anchor="t">
+            <a:spAutoFit/>
+          </a:bodyPr>
+          <a:lstStyle/>
+          <a:p>
+            <a:pPr algn="l"/>
+            <a:r>
+              <a:rPr sz="1300" b="1" i="0">
+                <a:solidFill>
+                  <a:srgbClr val="1B7A4B"/>
+                </a:solidFill>
+                <a:latin typeface="Arial"/>
+              </a:rPr>
+              <a:t>0.796</a:t>
+            </a:r>
+          </a:p>
+        </p:txBody>
+      </p:sp>
+      <p:sp>
+        <p:nvSpPr>
+          <p:cNvPr id="32" name="TextBox 31"/>
+          <p:cNvSpPr txBox="1"/>
+          <p:nvPr/>
+        </p:nvSpPr>
+        <p:spPr>
+          <a:xfrm>
+            <a:off x="9601200" y="5413248"/>
+            <a:ext cx="2011680" cy="265176"/>
+          </a:xfrm>
+          <a:prstGeom prst="rect">
+            <a:avLst/>
+          </a:prstGeom>
+          <a:noFill/>
+        </p:spPr>
+        <p:txBody>
+          <a:bodyPr wrap="square" lIns="0" rIns="0" tIns="0" bIns="0" anchor="t">
+            <a:spAutoFit/>
+          </a:bodyPr>
+          <a:lstStyle/>
+          <a:p>
+            <a:pPr algn="l"/>
+            <a:r>
+              <a:rPr sz="1200" b="0" i="0">
+                <a:solidFill>
+                  <a:srgbClr val="1B7A4B"/>
+                </a:solidFill>
+                <a:latin typeface="Arial"/>
+              </a:rPr>
+              <a:t>holds</a:t>
+            </a:r>
+          </a:p>
+        </p:txBody>
+      </p:sp>
+      <p:sp>
+        <p:nvSpPr>
+          <p:cNvPr id="33" name="Rectangle 32"/>
+          <p:cNvSpPr/>
+          <p:nvPr/>
+        </p:nvSpPr>
+        <p:spPr>
+          <a:xfrm>
+            <a:off x="566928" y="5605272"/>
+            <a:ext cx="11057839" cy="9525"/>
+          </a:xfrm>
+          <a:prstGeom prst="rect">
+            <a:avLst/>
+          </a:prstGeom>
+          <a:solidFill>
+            <a:srgbClr val="DDE2EA"/>
+          </a:solidFill>
+          <a:ln>
+            <a:noFill/>
+          </a:ln>
+          <a:effectLst/>
+        </p:spPr>
+        <p:style>
+          <a:lnRef idx="1">
+            <a:schemeClr val="accent1"/>
+          </a:lnRef>
+          <a:fillRef idx="3">
+            <a:schemeClr val="accent1"/>
+          </a:fillRef>
+          <a:effectRef idx="2">
+            <a:schemeClr val="accent1"/>
+          </a:effectRef>
+          <a:fontRef idx="minor">
+            <a:schemeClr val="lt1"/>
+          </a:fontRef>
+        </p:style>
+        <p:txBody>
+          <a:bodyPr rtlCol="0" anchor="ctr"/>
+          <a:lstStyle/>
+          <a:p>
+            <a:pPr algn="ctr"/>
+          </a:p>
+        </p:txBody>
+      </p:sp>
+      <p:sp>
+        <p:nvSpPr>
+          <p:cNvPr id="34" name="TextBox 33"/>
+          <p:cNvSpPr txBox="1"/>
+          <p:nvPr/>
+        </p:nvSpPr>
+        <p:spPr>
+          <a:xfrm>
+            <a:off x="4389120" y="5678424"/>
+            <a:ext cx="2194560" cy="265176"/>
+          </a:xfrm>
+          <a:prstGeom prst="rect">
+            <a:avLst/>
+          </a:prstGeom>
+          <a:noFill/>
+        </p:spPr>
+        <p:txBody>
+          <a:bodyPr wrap="square" lIns="0" rIns="0" tIns="0" bIns="0" anchor="t">
+            <a:spAutoFit/>
+          </a:bodyPr>
+          <a:lstStyle/>
+          <a:p>
+            <a:pPr algn="l"/>
+            <a:r>
+              <a:rPr sz="1300" b="1" i="0">
+                <a:solidFill>
+                  <a:srgbClr val="171A21"/>
+                </a:solidFill>
+                <a:latin typeface="Arial"/>
+              </a:rPr>
+              <a:t>Pixtral-12B</a:t>
+            </a:r>
+          </a:p>
+        </p:txBody>
+      </p:sp>
+      <p:sp>
+        <p:nvSpPr>
+          <p:cNvPr id="35" name="TextBox 34"/>
+          <p:cNvSpPr txBox="1"/>
+          <p:nvPr/>
+        </p:nvSpPr>
+        <p:spPr>
+          <a:xfrm>
+            <a:off x="6583680" y="5678424"/>
+            <a:ext cx="1280160" cy="265176"/>
+          </a:xfrm>
+          <a:prstGeom prst="rect">
+            <a:avLst/>
+          </a:prstGeom>
+          <a:noFill/>
+        </p:spPr>
+        <p:txBody>
+          <a:bodyPr wrap="square" lIns="0" rIns="0" tIns="0" bIns="0" anchor="t">
+            <a:spAutoFit/>
+          </a:bodyPr>
+          <a:lstStyle/>
+          <a:p>
+            <a:pPr algn="l"/>
+            <a:r>
+              <a:rPr sz="1300" b="1" i="0">
+                <a:solidFill>
+                  <a:srgbClr val="1B7A4B"/>
+                </a:solidFill>
+                <a:latin typeface="Arial"/>
+              </a:rPr>
+              <a:t>0.828</a:t>
+            </a:r>
+          </a:p>
+        </p:txBody>
+      </p:sp>
+      <p:sp>
+        <p:nvSpPr>
+          <p:cNvPr id="36" name="TextBox 35"/>
+          <p:cNvSpPr txBox="1"/>
+          <p:nvPr/>
+        </p:nvSpPr>
+        <p:spPr>
+          <a:xfrm>
+            <a:off x="7863840" y="5678424"/>
+            <a:ext cx="1737360" cy="265176"/>
+          </a:xfrm>
+          <a:prstGeom prst="rect">
+            <a:avLst/>
+          </a:prstGeom>
+          <a:noFill/>
+        </p:spPr>
+        <p:txBody>
+          <a:bodyPr wrap="square" lIns="0" rIns="0" tIns="0" bIns="0" anchor="t">
+            <a:spAutoFit/>
+          </a:bodyPr>
+          <a:lstStyle/>
+          <a:p>
+            <a:pPr algn="l"/>
+            <a:r>
+              <a:rPr sz="1300" b="1" i="0">
+                <a:solidFill>
+                  <a:srgbClr val="1B7A4B"/>
+                </a:solidFill>
+                <a:latin typeface="Arial"/>
+              </a:rPr>
+              <a:t>0.772</a:t>
+            </a:r>
+          </a:p>
+        </p:txBody>
+      </p:sp>
+      <p:sp>
+        <p:nvSpPr>
+          <p:cNvPr id="37" name="TextBox 36"/>
+          <p:cNvSpPr txBox="1"/>
+          <p:nvPr/>
+        </p:nvSpPr>
+        <p:spPr>
+          <a:xfrm>
+            <a:off x="9601200" y="5678424"/>
+            <a:ext cx="2011680" cy="265176"/>
+          </a:xfrm>
+          <a:prstGeom prst="rect">
+            <a:avLst/>
+          </a:prstGeom>
+          <a:noFill/>
+        </p:spPr>
+        <p:txBody>
+          <a:bodyPr wrap="square" lIns="0" rIns="0" tIns="0" bIns="0" anchor="t">
+            <a:spAutoFit/>
+          </a:bodyPr>
+          <a:lstStyle/>
+          <a:p>
+            <a:pPr algn="l"/>
+            <a:r>
+              <a:rPr sz="1200" b="0" i="0">
+                <a:solidFill>
+                  <a:srgbClr val="1B7A4B"/>
+                </a:solidFill>
+                <a:latin typeface="Arial"/>
+              </a:rPr>
+              <a:t>holds</a:t>
+            </a:r>
+          </a:p>
+        </p:txBody>
+      </p:sp>
+      <p:sp>
+        <p:nvSpPr>
+          <p:cNvPr id="38" name="Rectangle 37"/>
+          <p:cNvSpPr/>
+          <p:nvPr/>
+        </p:nvSpPr>
+        <p:spPr>
+          <a:xfrm>
+            <a:off x="566928" y="5870448"/>
+            <a:ext cx="11057839" cy="9525"/>
+          </a:xfrm>
+          <a:prstGeom prst="rect">
+            <a:avLst/>
+          </a:prstGeom>
+          <a:solidFill>
+            <a:srgbClr val="DDE2EA"/>
+          </a:solidFill>
+          <a:ln>
+            <a:noFill/>
+          </a:ln>
+          <a:effectLst/>
+        </p:spPr>
+        <p:style>
+          <a:lnRef idx="1">
+            <a:schemeClr val="accent1"/>
+          </a:lnRef>
+          <a:fillRef idx="3">
+            <a:schemeClr val="accent1"/>
+          </a:fillRef>
+          <a:effectRef idx="2">
+            <a:schemeClr val="accent1"/>
+          </a:effectRef>
+          <a:fontRef idx="minor">
+            <a:schemeClr val="lt1"/>
+          </a:fontRef>
+        </p:style>
+        <p:txBody>
+          <a:bodyPr rtlCol="0" anchor="ctr"/>
+          <a:lstStyle/>
+          <a:p>
+            <a:pPr algn="ctr"/>
+          </a:p>
+        </p:txBody>
+      </p:sp>
+      <p:sp>
+        <p:nvSpPr>
+          <p:cNvPr id="39" name="TextBox 38"/>
+          <p:cNvSpPr txBox="1"/>
+          <p:nvPr/>
+        </p:nvSpPr>
+        <p:spPr>
+          <a:xfrm>
+            <a:off x="4389120" y="5943600"/>
+            <a:ext cx="2194560" cy="265176"/>
+          </a:xfrm>
+          <a:prstGeom prst="rect">
+            <a:avLst/>
+          </a:prstGeom>
+          <a:noFill/>
+        </p:spPr>
+        <p:txBody>
+          <a:bodyPr wrap="square" lIns="0" rIns="0" tIns="0" bIns="0" anchor="t">
+            <a:spAutoFit/>
+          </a:bodyPr>
+          <a:lstStyle/>
+          <a:p>
+            <a:pPr algn="l"/>
+            <a:r>
+              <a:rPr sz="1300" b="1" i="0">
+                <a:solidFill>
+                  <a:srgbClr val="171A21"/>
+                </a:solidFill>
+                <a:latin typeface="Arial"/>
+              </a:rPr>
+              <a:t>InternVL3-8B</a:t>
+            </a:r>
+          </a:p>
+        </p:txBody>
+      </p:sp>
+      <p:sp>
+        <p:nvSpPr>
+          <p:cNvPr id="40" name="TextBox 39"/>
+          <p:cNvSpPr txBox="1"/>
+          <p:nvPr/>
+        </p:nvSpPr>
+        <p:spPr>
+          <a:xfrm>
+            <a:off x="6583680" y="5943600"/>
+            <a:ext cx="1280160" cy="265176"/>
+          </a:xfrm>
+          <a:prstGeom prst="rect">
+            <a:avLst/>
+          </a:prstGeom>
+          <a:noFill/>
+        </p:spPr>
+        <p:txBody>
+          <a:bodyPr wrap="square" lIns="0" rIns="0" tIns="0" bIns="0" anchor="t">
+            <a:spAutoFit/>
+          </a:bodyPr>
+          <a:lstStyle/>
+          <a:p>
+            <a:pPr algn="l"/>
+            <a:r>
+              <a:rPr sz="1300" b="1" i="0">
+                <a:solidFill>
+                  <a:srgbClr val="B23A34"/>
+                </a:solidFill>
+                <a:latin typeface="Arial"/>
+              </a:rPr>
+              <a:t>0.915</a:t>
+            </a:r>
+          </a:p>
+        </p:txBody>
+      </p:sp>
+      <p:sp>
+        <p:nvSpPr>
+          <p:cNvPr id="41" name="TextBox 40"/>
+          <p:cNvSpPr txBox="1"/>
+          <p:nvPr/>
+        </p:nvSpPr>
+        <p:spPr>
+          <a:xfrm>
+            <a:off x="7863840" y="5943600"/>
+            <a:ext cx="1737360" cy="265176"/>
+          </a:xfrm>
+          <a:prstGeom prst="rect">
+            <a:avLst/>
+          </a:prstGeom>
+          <a:noFill/>
+        </p:spPr>
+        <p:txBody>
+          <a:bodyPr wrap="square" lIns="0" rIns="0" tIns="0" bIns="0" anchor="t">
+            <a:spAutoFit/>
+          </a:bodyPr>
+          <a:lstStyle/>
+          <a:p>
+            <a:pPr algn="l"/>
+            <a:r>
+              <a:rPr sz="1300" b="1" i="0">
+                <a:solidFill>
+                  <a:srgbClr val="B23A34"/>
+                </a:solidFill>
+                <a:latin typeface="Arial"/>
+              </a:rPr>
+              <a:t>0.556</a:t>
+            </a:r>
+          </a:p>
+        </p:txBody>
+      </p:sp>
+      <p:sp>
+        <p:nvSpPr>
+          <p:cNvPr id="42" name="TextBox 41"/>
+          <p:cNvSpPr txBox="1"/>
+          <p:nvPr/>
+        </p:nvSpPr>
+        <p:spPr>
+          <a:xfrm>
+            <a:off x="9601200" y="5943600"/>
+            <a:ext cx="2011680" cy="265176"/>
+          </a:xfrm>
+          <a:prstGeom prst="rect">
+            <a:avLst/>
+          </a:prstGeom>
+          <a:noFill/>
+        </p:spPr>
+        <p:txBody>
+          <a:bodyPr wrap="square" lIns="0" rIns="0" tIns="0" bIns="0" anchor="t">
+            <a:spAutoFit/>
+          </a:bodyPr>
+          <a:lstStyle/>
+          <a:p>
+            <a:pPr algn="l"/>
+            <a:r>
+              <a:rPr sz="1200" b="0" i="0">
+                <a:solidFill>
+                  <a:srgbClr val="B23A34"/>
+                </a:solidFill>
+                <a:latin typeface="Arial"/>
+              </a:rPr>
+              <a:t>collapses</a:t>
+            </a:r>
+          </a:p>
+        </p:txBody>
+      </p:sp>
+      <p:sp>
+        <p:nvSpPr>
+          <p:cNvPr id="43" name="Rectangle 42"/>
+          <p:cNvSpPr/>
+          <p:nvPr/>
+        </p:nvSpPr>
+        <p:spPr>
+          <a:xfrm>
+            <a:off x="566928" y="6135624"/>
+            <a:ext cx="11057839" cy="9525"/>
+          </a:xfrm>
+          <a:prstGeom prst="rect">
+            <a:avLst/>
+          </a:prstGeom>
+          <a:solidFill>
+            <a:srgbClr val="DDE2EA"/>
+          </a:solidFill>
+          <a:ln>
+            <a:noFill/>
+          </a:ln>
+          <a:effectLst/>
+        </p:spPr>
+        <p:style>
+          <a:lnRef idx="1">
+            <a:schemeClr val="accent1"/>
+          </a:lnRef>
+          <a:fillRef idx="3">
+            <a:schemeClr val="accent1"/>
+          </a:fillRef>
+          <a:effectRef idx="2">
+            <a:schemeClr val="accent1"/>
+          </a:effectRef>
+          <a:fontRef idx="minor">
+            <a:schemeClr val="lt1"/>
+          </a:fontRef>
+        </p:style>
+        <p:txBody>
+          <a:bodyPr rtlCol="0" anchor="ctr"/>
+          <a:lstStyle/>
+          <a:p>
+            <a:pPr algn="ctr"/>
+          </a:p>
+        </p:txBody>
+      </p:sp>
+      <p:sp>
+        <p:nvSpPr>
+          <p:cNvPr id="44" name="TextBox 43"/>
+          <p:cNvSpPr txBox="1"/>
+          <p:nvPr/>
+        </p:nvSpPr>
+        <p:spPr>
+          <a:xfrm>
+            <a:off x="566928" y="6364224"/>
+            <a:ext cx="8229600" cy="292608"/>
+          </a:xfrm>
+          <a:prstGeom prst="rect">
+            <a:avLst/>
+          </a:prstGeom>
+          <a:noFill/>
+        </p:spPr>
+        <p:txBody>
+          <a:bodyPr wrap="square" lIns="0" rIns="0" tIns="0" bIns="0" anchor="t">
+            <a:spAutoFit/>
+          </a:bodyPr>
+          <a:lstStyle/>
+          <a:p>
+            <a:pPr algn="l"/>
+            <a:r>
+              <a:rPr sz="1000" b="1" i="0">
+                <a:solidFill>
+                  <a:srgbClr val="2F5D8C"/>
+                </a:solidFill>
+                <a:latin typeface="Arial"/>
+              </a:rPr>
               <a:t>FERMAT</a:t>
             </a:r>
             <a:r>
@@ -4656,7 +5549,7 @@
       </p:sp>
       <p:sp>
         <p:nvSpPr>
-          <p:cNvPr id="22" name="TextBox 21"/>
+          <p:cNvPr id="45" name="TextBox 44"/>
           <p:cNvSpPr txBox="1"/>
           <p:nvPr/>
         </p:nvSpPr>
@@ -8365,7 +9258,8 @@
                 </a:solidFill>
                 <a:latin typeface="Arial"/>
               </a:rPr>
-              <a:t>— Perception: 0.835, survives every check</a:t>
+              <a:t>— Perception: 0.835, replicated at 0.828
+    on a second model family</a:t>
             </a:r>
           </a:p>
           <a:p>
